--- a/output/presentation/Spark-Task-Tracker-Walkthrough.pptx
+++ b/output/presentation/Spark-Task-Tracker-Walkthrough.pptx
@@ -2,18 +2,19 @@
 <file path=ppt/presentation.xml><?xml version="1.0" encoding="utf-8"?>
 <p:presentation xmlns:p="http://schemas.openxmlformats.org/presentationml/2006/main">
   <p:sldMasterIdLst>
-    <p:sldMasterId xmlns:r="http://schemas.openxmlformats.org/officeDocument/2006/relationships" id="2147483648" r:id="R6a09cd61d12e4795"/>
+    <p:sldMasterId xmlns:r="http://schemas.openxmlformats.org/officeDocument/2006/relationships" id="2147483648" r:id="Rd15a66b5d9594b5a"/>
   </p:sldMasterIdLst>
   <p:notesMasterIdLst>
-    <p:notesMasterId xmlns:r="http://schemas.openxmlformats.org/officeDocument/2006/relationships" r:id="Rbb8059aa37794d6b"/>
+    <p:notesMasterId xmlns:r="http://schemas.openxmlformats.org/officeDocument/2006/relationships" r:id="R5c2364db77b6443b"/>
   </p:notesMasterIdLst>
   <p:sldIdLst>
-    <p:sldId xmlns:r="http://schemas.openxmlformats.org/officeDocument/2006/relationships" id="256" r:id="Rc868939f6ce84bc1"/>
-    <p:sldId xmlns:r="http://schemas.openxmlformats.org/officeDocument/2006/relationships" id="257" r:id="R5d204716fd164755"/>
-    <p:sldId xmlns:r="http://schemas.openxmlformats.org/officeDocument/2006/relationships" id="258" r:id="R24f92b29f3ac470b"/>
-    <p:sldId xmlns:r="http://schemas.openxmlformats.org/officeDocument/2006/relationships" id="259" r:id="Rdcef2c58d8614ead"/>
-    <p:sldId xmlns:r="http://schemas.openxmlformats.org/officeDocument/2006/relationships" id="260" r:id="Rbbe6de8aa3e54a84"/>
-    <p:sldId xmlns:r="http://schemas.openxmlformats.org/officeDocument/2006/relationships" id="261" r:id="R0063c9a747ac41d5"/>
+    <p:sldId xmlns:r="http://schemas.openxmlformats.org/officeDocument/2006/relationships" id="256" r:id="R5f8e784585c749b1"/>
+    <p:sldId xmlns:r="http://schemas.openxmlformats.org/officeDocument/2006/relationships" id="257" r:id="Rb7e04e43455a4256"/>
+    <p:sldId xmlns:r="http://schemas.openxmlformats.org/officeDocument/2006/relationships" id="258" r:id="R312787a32ca24f31"/>
+    <p:sldId xmlns:r="http://schemas.openxmlformats.org/officeDocument/2006/relationships" id="259" r:id="Rdae1547460264bea"/>
+    <p:sldId xmlns:r="http://schemas.openxmlformats.org/officeDocument/2006/relationships" id="260" r:id="R63d4c8fcf38147fa"/>
+    <p:sldId xmlns:r="http://schemas.openxmlformats.org/officeDocument/2006/relationships" id="261" r:id="Rbd736d8c9b8c49bd"/>
+    <p:sldId xmlns:r="http://schemas.openxmlformats.org/officeDocument/2006/relationships" id="262" r:id="R7cac3bc8e6a347d3"/>
   </p:sldIdLst>
   <p:sldSz cx="12192000" cy="6858000"/>
   <p:notesSz cx="6858000" cy="9144000"/>
@@ -627,7 +628,7 @@
           <a:lstStyle xmlns:a="http://schemas.openxmlformats.org/drawingml/2006/main"/>
           <a:p xmlns:a="http://schemas.openxmlformats.org/drawingml/2006/main">
             <a:r>
-              <a:t>Explain the trade-off: quality is concentrated on the required workflow. Search/filter is the only chosen bonus because it delivers immediate value without expanding the data model.</a:t>
+              <a:t>Play the embedded preview to show the required workflow in one concise sequence: add a task, assign an owner, edit and reassign it, mark it complete, then demonstrate search and status filtering.</a:t>
             </a:r>
           </a:p>
           <a:p xmlns:a="http://schemas.openxmlformats.org/drawingml/2006/main">
@@ -642,12 +643,12 @@
           </a:p>
           <a:p xmlns:a="http://schemas.openxmlformats.org/drawingml/2006/main">
             <a:r>
-              <a:t>- Spark Tutoring Full Stack Developer - Task Tracker Challenge.pdf (required and bonus features)</a:t>
-            </a:r>
-          </a:p>
-          <a:p xmlns:a="http://schemas.openxmlformats.org/drawingml/2006/main">
-            <a:r>
-              <a:t>- README.md (deliberate trade-offs)</a:t>
+              <a:t>- docs/assets/spark-task-tracker-demo.mp4 (local browser walkthrough, 32 seconds)</a:t>
+            </a:r>
+          </a:p>
+          <a:p xmlns:a="http://schemas.openxmlformats.org/drawingml/2006/main">
+            <a:r>
+              <a:t>- tmp/presentation-video-update/capture-01-overview.jpg through capture-09-search-filter.jpg (browser captures)</a:t>
             </a:r>
           </a:p>
         </p:txBody>
@@ -717,7 +718,7 @@
           <a:lstStyle xmlns:a="http://schemas.openxmlformats.org/drawingml/2006/main"/>
           <a:p xmlns:a="http://schemas.openxmlformats.org/drawingml/2006/main">
             <a:r>
-              <a:t>Move left to right. React renders; the API service owns HTTP; Django REST validates and coordinates; the ORM persists. Call out the SQLite/PostgreSQL choice as review convenience, not architectural compromise.</a:t>
+              <a:t>Explain the trade-off: quality is concentrated on the required workflow. Search/filter is the only chosen bonus because it delivers immediate value without expanding the data model.</a:t>
             </a:r>
           </a:p>
           <a:p xmlns:a="http://schemas.openxmlformats.org/drawingml/2006/main">
@@ -732,17 +733,12 @@
           </a:p>
           <a:p xmlns:a="http://schemas.openxmlformats.org/drawingml/2006/main">
             <a:r>
-              <a:t>- frontend/src (application source)</a:t>
-            </a:r>
-          </a:p>
-          <a:p xmlns:a="http://schemas.openxmlformats.org/drawingml/2006/main">
-            <a:r>
-              <a:t>- backend/tasks and backend/config (application source)</a:t>
-            </a:r>
-          </a:p>
-          <a:p xmlns:a="http://schemas.openxmlformats.org/drawingml/2006/main">
-            <a:r>
-              <a:t>- README.md (architecture and technology choices)</a:t>
+              <a:t>- Spark Tutoring Full Stack Developer - Task Tracker Challenge.pdf (required and bonus features)</a:t>
+            </a:r>
+          </a:p>
+          <a:p xmlns:a="http://schemas.openxmlformats.org/drawingml/2006/main">
+            <a:r>
+              <a:t>- README.md (deliberate trade-offs)</a:t>
             </a:r>
           </a:p>
         </p:txBody>
@@ -812,7 +808,7 @@
           <a:lstStyle xmlns:a="http://schemas.openxmlformats.org/drawingml/2006/main"/>
           <a:p xmlns:a="http://schemas.openxmlformats.org/drawingml/2006/main">
             <a:r>
-              <a:t>Use the numbers as evidence, not decoration. The backend tests cover every required behavior. The browser pass exercised add, edit, assign, complete/incomplete, search, filters, and responsive layout with a clean console.</a:t>
+              <a:t>Move left to right. React renders; the API service owns HTTP; Django REST validates and coordinates; the ORM persists. Call out the SQLite/PostgreSQL choice as review convenience, not architectural compromise.</a:t>
             </a:r>
           </a:p>
           <a:p xmlns:a="http://schemas.openxmlformats.org/drawingml/2006/main">
@@ -827,22 +823,17 @@
           </a:p>
           <a:p xmlns:a="http://schemas.openxmlformats.org/drawingml/2006/main">
             <a:r>
-              <a:t>- backend/tasks/tests (12 passing tests)</a:t>
-            </a:r>
-          </a:p>
-          <a:p xmlns:a="http://schemas.openxmlformats.org/drawingml/2006/main">
-            <a:r>
-              <a:t>- frontend/src/components/*.test.tsx (3 passing tests)</a:t>
-            </a:r>
-          </a:p>
-          <a:p xmlns:a="http://schemas.openxmlformats.org/drawingml/2006/main">
-            <a:r>
-              <a:t>- .github/workflows/ci.yml (automated checks)</a:t>
-            </a:r>
-          </a:p>
-          <a:p xmlns:a="http://schemas.openxmlformats.org/drawingml/2006/main">
-            <a:r>
-              <a:t>- Local browser QA run on 2026-08-07</a:t>
+              <a:t>- frontend/src (application source)</a:t>
+            </a:r>
+          </a:p>
+          <a:p xmlns:a="http://schemas.openxmlformats.org/drawingml/2006/main">
+            <a:r>
+              <a:t>- backend/tasks and backend/config (application source)</a:t>
+            </a:r>
+          </a:p>
+          <a:p xmlns:a="http://schemas.openxmlformats.org/drawingml/2006/main">
+            <a:r>
+              <a:t>- README.md (architecture and technology choices)</a:t>
             </a:r>
           </a:p>
         </p:txBody>
@@ -873,6 +864,106 @@
 </file>
 
 <file path=ppt/notesSlides/notesSlide6.xml><?xml version="1.0" encoding="utf-8"?>
+<p:notes xmlns:p="http://schemas.openxmlformats.org/presentationml/2006/main">
+  <p:cSld>
+    <p:spTree>
+      <p:nvGrpSpPr>
+        <p:cNvPr id="1" name=""/>
+        <p:cNvGrpSpPr/>
+        <p:nvPr/>
+      </p:nvGrpSpPr>
+      <p:grpSpPr>
+        <a:xfrm xmlns:a="http://schemas.openxmlformats.org/drawingml/2006/main"/>
+      </p:grpSpPr>
+      <p:sp>
+        <p:nvSpPr>
+          <p:cNvPr id="2" name="Slide Image Placeholder 1"/>
+          <p:cNvSpPr>
+            <a:spLocks xmlns:a="http://schemas.openxmlformats.org/drawingml/2006/main" noGrp="1"/>
+          </p:cNvSpPr>
+          <p:nvPr>
+            <p:ph type="sldImg" idx="0"/>
+          </p:nvPr>
+        </p:nvSpPr>
+        <p:spPr/>
+      </p:sp>
+      <p:sp>
+        <p:nvSpPr>
+          <p:cNvPr id="3" name="Notes Placeholder 2"/>
+          <p:cNvSpPr>
+            <a:spLocks xmlns:a="http://schemas.openxmlformats.org/drawingml/2006/main" noGrp="1"/>
+          </p:cNvSpPr>
+          <p:nvPr>
+            <p:ph type="body" idx="1"/>
+          </p:nvPr>
+        </p:nvSpPr>
+        <p:spPr/>
+        <p:txBody>
+          <a:bodyPr xmlns:a="http://schemas.openxmlformats.org/drawingml/2006/main"/>
+          <a:lstStyle xmlns:a="http://schemas.openxmlformats.org/drawingml/2006/main"/>
+          <a:p xmlns:a="http://schemas.openxmlformats.org/drawingml/2006/main">
+            <a:r>
+              <a:t>Use the numbers as evidence, not decoration. The backend tests cover every required behavior. The browser pass exercised add, edit, assign, complete/incomplete, search, filters, and responsive layout with a clean console.</a:t>
+            </a:r>
+          </a:p>
+          <a:p xmlns:a="http://schemas.openxmlformats.org/drawingml/2006/main">
+            <a:r>
+              <a:t/>
+            </a:r>
+          </a:p>
+          <a:p xmlns:a="http://schemas.openxmlformats.org/drawingml/2006/main">
+            <a:r>
+              <a:t>[Sources]</a:t>
+            </a:r>
+          </a:p>
+          <a:p xmlns:a="http://schemas.openxmlformats.org/drawingml/2006/main">
+            <a:r>
+              <a:t>- backend/tasks/tests (12 passing tests)</a:t>
+            </a:r>
+          </a:p>
+          <a:p xmlns:a="http://schemas.openxmlformats.org/drawingml/2006/main">
+            <a:r>
+              <a:t>- frontend/src/components/*.test.tsx (3 passing tests)</a:t>
+            </a:r>
+          </a:p>
+          <a:p xmlns:a="http://schemas.openxmlformats.org/drawingml/2006/main">
+            <a:r>
+              <a:t>- .github/workflows/ci.yml (automated checks)</a:t>
+            </a:r>
+          </a:p>
+          <a:p xmlns:a="http://schemas.openxmlformats.org/drawingml/2006/main">
+            <a:r>
+              <a:t>- Local browser QA run on 2026-08-07</a:t>
+            </a:r>
+          </a:p>
+        </p:txBody>
+      </p:sp>
+      <p:sp>
+        <p:nvSpPr>
+          <p:cNvPr id="4" name="Slide Number Placeholder 3"/>
+          <p:cNvSpPr>
+            <a:spLocks xmlns:a="http://schemas.openxmlformats.org/drawingml/2006/main" noGrp="1"/>
+          </p:cNvSpPr>
+          <p:nvPr>
+            <p:ph type="sldNum" idx="5"/>
+          </p:nvPr>
+        </p:nvSpPr>
+        <p:spPr/>
+        <p:txBody>
+          <a:bodyPr xmlns:a="http://schemas.openxmlformats.org/drawingml/2006/main"/>
+          <a:lstStyle xmlns:a="http://schemas.openxmlformats.org/drawingml/2006/main"/>
+          <a:p xmlns:a="http://schemas.openxmlformats.org/drawingml/2006/main"/>
+        </p:txBody>
+      </p:sp>
+    </p:spTree>
+  </p:cSld>
+  <p:clrMapOvr>
+    <a:masterClrMapping xmlns:a="http://schemas.openxmlformats.org/drawingml/2006/main"/>
+  </p:clrMapOvr>
+</p:notes>
+</file>
+
+<file path=ppt/notesSlides/notesSlide7.xml><?xml version="1.0" encoding="utf-8"?>
 <p:notes xmlns:p="http://schemas.openxmlformats.org/presentationml/2006/main">
   <p:cSld>
     <p:spTree>
@@ -1005,7 +1096,7 @@
   </p:cSld>
   <p:clrMap bg1="lt1" tx1="dk1" bg2="lt2" tx2="dk2" accent1="accent1" accent2="accent2" accent3="accent3" accent4="accent4" accent5="accent5" accent6="accent6" hlink="hlink" folHlink="folHlink"/>
   <p:sldLayoutIdLst>
-    <p:sldLayoutId xmlns:r="http://schemas.openxmlformats.org/officeDocument/2006/relationships" id="2147483649" r:id="Rc84c1ae862954eea"/>
+    <p:sldLayoutId xmlns:r="http://schemas.openxmlformats.org/officeDocument/2006/relationships" id="2147483649" r:id="R939932bc490f4038"/>
   </p:sldLayoutIdLst>
   <p:txStyles>
     <p:titleStyle>
@@ -1615,6 +1706,7 @@
           <a:lstStyle xmlns:a="http://schemas.openxmlformats.org/drawingml/2006/main"/>
           <a:p xmlns:a="http://schemas.openxmlformats.org/drawingml/2006/main">
             <a:pPr algn="l">
+              <a:buNone/>
               <a:defRPr sz="1350" b="1">
                 <a:solidFill>
                   <a:srgbClr val="B64F00"/>
@@ -1671,6 +1763,7 @@
           <a:lstStyle xmlns:a="http://schemas.openxmlformats.org/drawingml/2006/main"/>
           <a:p xmlns:a="http://schemas.openxmlformats.org/drawingml/2006/main">
             <a:pPr algn="r">
+              <a:buNone/>
               <a:defRPr sz="1200" b="0">
                 <a:solidFill>
                   <a:srgbClr val="62656A"/>
@@ -1727,6 +1820,7 @@
           <a:lstStyle xmlns:a="http://schemas.openxmlformats.org/drawingml/2006/main"/>
           <a:p xmlns:a="http://schemas.openxmlformats.org/drawingml/2006/main">
             <a:pPr algn="l">
+              <a:buNone/>
               <a:defRPr sz="5850" b="1">
                 <a:solidFill>
                   <a:srgbClr val="202124"/>
@@ -1750,6 +1844,7 @@
           </a:p>
           <a:p xmlns:a="http://schemas.openxmlformats.org/drawingml/2006/main">
             <a:pPr algn="l">
+              <a:buNone/>
               <a:defRPr sz="5850" b="1">
                 <a:solidFill>
                   <a:srgbClr val="202124"/>
@@ -1806,6 +1901,7 @@
           <a:lstStyle xmlns:a="http://schemas.openxmlformats.org/drawingml/2006/main"/>
           <a:p xmlns:a="http://schemas.openxmlformats.org/drawingml/2006/main">
             <a:pPr algn="l">
+              <a:buNone/>
               <a:defRPr sz="1875" b="0">
                 <a:solidFill>
                   <a:srgbClr val="62656A"/>
@@ -1862,6 +1958,7 @@
           <a:lstStyle xmlns:a="http://schemas.openxmlformats.org/drawingml/2006/main"/>
           <a:p xmlns:a="http://schemas.openxmlformats.org/drawingml/2006/main">
             <a:pPr algn="r">
+              <a:buNone/>
               <a:defRPr sz="2400" b="1">
                 <a:solidFill>
                   <a:srgbClr val="FF7A00"/>
@@ -1947,6 +2044,7 @@
           <a:lstStyle xmlns:a="http://schemas.openxmlformats.org/drawingml/2006/main"/>
           <a:p xmlns:a="http://schemas.openxmlformats.org/drawingml/2006/main">
             <a:pPr algn="l">
+              <a:buNone/>
               <a:defRPr sz="3150" b="1">
                 <a:solidFill>
                   <a:srgbClr val="202124"/>
@@ -2034,6 +2132,7 @@
           <a:lstStyle xmlns:a="http://schemas.openxmlformats.org/drawingml/2006/main"/>
           <a:p xmlns:a="http://schemas.openxmlformats.org/drawingml/2006/main">
             <a:pPr algn="r">
+              <a:buNone/>
               <a:defRPr sz="1050" b="0">
                 <a:solidFill>
                   <a:srgbClr val="62656A"/>
@@ -2090,6 +2189,7 @@
           <a:lstStyle xmlns:a="http://schemas.openxmlformats.org/drawingml/2006/main"/>
           <a:p xmlns:a="http://schemas.openxmlformats.org/drawingml/2006/main">
             <a:pPr algn="l">
+              <a:buNone/>
               <a:defRPr sz="1350" b="1">
                 <a:solidFill>
                   <a:srgbClr val="FF7A00"/>
@@ -2146,6 +2246,7 @@
           <a:lstStyle xmlns:a="http://schemas.openxmlformats.org/drawingml/2006/main"/>
           <a:p xmlns:a="http://schemas.openxmlformats.org/drawingml/2006/main">
             <a:pPr algn="l">
+              <a:buNone/>
               <a:defRPr sz="1875" b="1">
                 <a:solidFill>
                   <a:srgbClr val="202124"/>
@@ -2202,6 +2303,7 @@
           <a:lstStyle xmlns:a="http://schemas.openxmlformats.org/drawingml/2006/main"/>
           <a:p xmlns:a="http://schemas.openxmlformats.org/drawingml/2006/main">
             <a:pPr algn="l">
+              <a:buNone/>
               <a:defRPr sz="1350" b="0">
                 <a:solidFill>
                   <a:srgbClr val="62656A"/>
@@ -2258,6 +2360,7 @@
           <a:lstStyle xmlns:a="http://schemas.openxmlformats.org/drawingml/2006/main"/>
           <a:p xmlns:a="http://schemas.openxmlformats.org/drawingml/2006/main">
             <a:pPr algn="l">
+              <a:buNone/>
               <a:defRPr sz="1350" b="1">
                 <a:solidFill>
                   <a:srgbClr val="FF7A00"/>
@@ -2314,6 +2417,7 @@
           <a:lstStyle xmlns:a="http://schemas.openxmlformats.org/drawingml/2006/main"/>
           <a:p xmlns:a="http://schemas.openxmlformats.org/drawingml/2006/main">
             <a:pPr algn="l">
+              <a:buNone/>
               <a:defRPr sz="1875" b="1">
                 <a:solidFill>
                   <a:srgbClr val="202124"/>
@@ -2370,6 +2474,7 @@
           <a:lstStyle xmlns:a="http://schemas.openxmlformats.org/drawingml/2006/main"/>
           <a:p xmlns:a="http://schemas.openxmlformats.org/drawingml/2006/main">
             <a:pPr algn="l">
+              <a:buNone/>
               <a:defRPr sz="1350" b="0">
                 <a:solidFill>
                   <a:srgbClr val="62656A"/>
@@ -2426,6 +2531,7 @@
           <a:lstStyle xmlns:a="http://schemas.openxmlformats.org/drawingml/2006/main"/>
           <a:p xmlns:a="http://schemas.openxmlformats.org/drawingml/2006/main">
             <a:pPr algn="l">
+              <a:buNone/>
               <a:defRPr sz="1350" b="1">
                 <a:solidFill>
                   <a:srgbClr val="FF7A00"/>
@@ -2482,6 +2588,7 @@
           <a:lstStyle xmlns:a="http://schemas.openxmlformats.org/drawingml/2006/main"/>
           <a:p xmlns:a="http://schemas.openxmlformats.org/drawingml/2006/main">
             <a:pPr algn="l">
+              <a:buNone/>
               <a:defRPr sz="1875" b="1">
                 <a:solidFill>
                   <a:srgbClr val="202124"/>
@@ -2538,6 +2645,7 @@
           <a:lstStyle xmlns:a="http://schemas.openxmlformats.org/drawingml/2006/main"/>
           <a:p xmlns:a="http://schemas.openxmlformats.org/drawingml/2006/main">
             <a:pPr algn="l">
+              <a:buNone/>
               <a:defRPr sz="1350" b="0">
                 <a:solidFill>
                   <a:srgbClr val="62656A"/>
@@ -2594,6 +2702,7 @@
           <a:lstStyle xmlns:a="http://schemas.openxmlformats.org/drawingml/2006/main"/>
           <a:p xmlns:a="http://schemas.openxmlformats.org/drawingml/2006/main">
             <a:pPr algn="l">
+              <a:buNone/>
               <a:defRPr sz="1350" b="1">
                 <a:solidFill>
                   <a:srgbClr val="FF7A00"/>
@@ -2650,6 +2759,7 @@
           <a:lstStyle xmlns:a="http://schemas.openxmlformats.org/drawingml/2006/main"/>
           <a:p xmlns:a="http://schemas.openxmlformats.org/drawingml/2006/main">
             <a:pPr algn="l">
+              <a:buNone/>
               <a:defRPr sz="1875" b="1">
                 <a:solidFill>
                   <a:srgbClr val="202124"/>
@@ -2706,6 +2816,7 @@
           <a:lstStyle xmlns:a="http://schemas.openxmlformats.org/drawingml/2006/main"/>
           <a:p xmlns:a="http://schemas.openxmlformats.org/drawingml/2006/main">
             <a:pPr algn="l">
+              <a:buNone/>
               <a:defRPr sz="1350" b="0">
                 <a:solidFill>
                   <a:srgbClr val="62656A"/>
@@ -2766,14 +2877,14 @@
       </p:sp>
       <p:pic>
         <p:nvPicPr>
-          <p:cNvPr id="34" name=""/>
+          <p:cNvPr id="36" name=""/>
           <p:cNvPicPr>
             <a:picLocks xmlns:a="http://schemas.openxmlformats.org/drawingml/2006/main" noChangeAspect="1"/>
           </p:cNvPicPr>
           <p:nvPr/>
         </p:nvPicPr>
         <p:blipFill>
-          <a:blip xmlns:r="http://schemas.openxmlformats.org/officeDocument/2006/relationships" xmlns:a="http://schemas.openxmlformats.org/drawingml/2006/main" r:embed="R1dd5c8eee69b4997"/>
+          <a:blip xmlns:r="http://schemas.openxmlformats.org/officeDocument/2006/relationships" xmlns:a="http://schemas.openxmlformats.org/drawingml/2006/main" r:embed="R32777cf2f79c46de"/>
           <a:srcRect xmlns:a="http://schemas.openxmlformats.org/drawingml/2006/main" l="0" t="914" r="0" b="914"/>
           <a:stretch xmlns:a="http://schemas.openxmlformats.org/drawingml/2006/main">
             <a:fillRect l="0" t="0" r="0" b="0"/>
@@ -2804,13 +2915,6 @@
 <file path=ppt/slides/slide3.xml><?xml version="1.0" encoding="utf-8"?>
 <p:sld xmlns:p="http://schemas.openxmlformats.org/presentationml/2006/main">
   <p:cSld>
-    <p:bg>
-      <p:bgPr>
-        <a:solidFill xmlns:a="http://schemas.openxmlformats.org/drawingml/2006/main">
-          <a:srgbClr val="FFFFFF"/>
-        </a:solidFill>
-      </p:bgPr>
-    </p:bg>
     <p:spTree>
       <p:nvGrpSpPr>
         <p:cNvPr id="1" name=""/>
@@ -2822,10 +2926,10 @@
       </p:grpSpPr>
       <p:sp>
         <p:nvSpPr>
-          <p:cNvPr id="25" name="slide-3-title">
-            <a:extLst xmlns:a="http://schemas.openxmlformats.org/drawingml/2006/main">
-              <a:ext uri="{FF2B5EF4-FFF2-40B4-BE49-F238E27FC236}">
-                <a16:creationId xmlns:a16="http://schemas.microsoft.com/office/drawing/2014/main" id="{FF1714A1-5A57-43F3-BABA-D237E63EF147}"/>
+          <p:cNvPr id="7" name="demo-title">
+            <a:extLst xmlns:a="http://schemas.openxmlformats.org/drawingml/2006/main">
+              <a:ext uri="{FF2B5EF4-FFF2-40B4-BE49-F238E27FC236}">
+                <a16:creationId xmlns:a16="http://schemas.microsoft.com/office/drawing/2014/main" id="{F1757406-31FC-4BC9-8192-F558DC36B82A}"/>
               </a:ext>
             </a:extLst>
           </p:cNvPr>
@@ -2871,7 +2975,7 @@
                 <a:ea typeface="Helvetica Neue"/>
                 <a:cs typeface="Helvetica Neue"/>
               </a:rPr>
-              <a:t>Scope discipline keeps the product simple.</a:t>
+              <a:t>Play the complete 32-second task flow.</a:t>
             </a:r>
           </a:p>
         </p:txBody>
@@ -2881,7 +2985,7 @@
           <p:cNvPr id="2" name="">
             <a:extLst xmlns:a="http://schemas.openxmlformats.org/drawingml/2006/main">
               <a:ext uri="{FF2B5EF4-FFF2-40B4-BE49-F238E27FC236}">
-                <a16:creationId xmlns:a16="http://schemas.microsoft.com/office/drawing/2014/main" id="{FC2287AD-960B-463B-AEEB-F82871BFA775}"/>
+                <a16:creationId xmlns:a16="http://schemas.microsoft.com/office/drawing/2014/main" id="{E06DB824-B999-4E6D-85FE-7C00A0AD75BF}"/>
               </a:ext>
             </a:extLst>
           </p:cNvPr>
@@ -2909,10 +3013,128 @@
       </p:sp>
       <p:sp>
         <p:nvSpPr>
-          <p:cNvPr id="3" name="slide-3-number">
-            <a:extLst xmlns:a="http://schemas.openxmlformats.org/drawingml/2006/main">
-              <a:ext uri="{FF2B5EF4-FFF2-40B4-BE49-F238E27FC236}">
-                <a16:creationId xmlns:a16="http://schemas.microsoft.com/office/drawing/2014/main" id="{256E8E9A-23F4-4A75-83E7-90BC50711977}"/>
+          <p:cNvPr id="3" name="demo-media-frame">
+            <a:extLst xmlns:a="http://schemas.openxmlformats.org/drawingml/2006/main">
+              <a:ext uri="{FF2B5EF4-FFF2-40B4-BE49-F238E27FC236}">
+                <a16:creationId xmlns:a16="http://schemas.microsoft.com/office/drawing/2014/main" id="{739CC0F8-E4AF-46A8-93FD-5AB6FFA7528C}"/>
+              </a:ext>
+            </a:extLst>
+          </p:cNvPr>
+          <p:cNvSpPr>
+            <a:spLocks xmlns:a="http://schemas.openxmlformats.org/drawingml/2006/main" noGrp="1"/>
+          </p:cNvSpPr>
+          <p:nvPr/>
+        </p:nvSpPr>
+        <p:spPr>
+          <a:xfrm xmlns:a="http://schemas.openxmlformats.org/drawingml/2006/main">
+            <a:off x="1790700" y="1676400"/>
+            <a:ext cx="8610600" cy="4838700"/>
+          </a:xfrm>
+          <a:prstGeom xmlns:a="http://schemas.openxmlformats.org/drawingml/2006/main" prst="roundRect">
+            <a:avLst>
+              <a:gd name="adj" fmla="val 2362"/>
+            </a:avLst>
+          </a:prstGeom>
+          <a:solidFill xmlns:a="http://schemas.openxmlformats.org/drawingml/2006/main">
+            <a:srgbClr val="F1F1EF"/>
+          </a:solidFill>
+          <a:ln xmlns:a="http://schemas.openxmlformats.org/drawingml/2006/main" w="9525">
+            <a:solidFill>
+              <a:srgbClr val="D4D4D0"/>
+            </a:solidFill>
+            <a:prstDash val="solid"/>
+          </a:ln>
+        </p:spPr>
+      </p:sp>
+      <p:pic>
+        <p:nvPicPr>
+          <p:cNvPr id="10" name=""/>
+          <p:cNvPicPr>
+            <a:picLocks xmlns:a="http://schemas.openxmlformats.org/drawingml/2006/main" noChangeAspect="1"/>
+          </p:cNvPicPr>
+          <p:nvPr/>
+        </p:nvPicPr>
+        <p:blipFill>
+          <a:blip xmlns:r="http://schemas.openxmlformats.org/officeDocument/2006/relationships" xmlns:a="http://schemas.openxmlformats.org/drawingml/2006/main" r:embed="R5a5960fd13584218"/>
+          <a:srcRect xmlns:a="http://schemas.openxmlformats.org/drawingml/2006/main" l="0" t="930" r="0" b="930"/>
+          <a:stretch xmlns:a="http://schemas.openxmlformats.org/drawingml/2006/main">
+            <a:fillRect l="0" t="0" r="0" b="0"/>
+          </a:stretch>
+        </p:blipFill>
+        <p:spPr>
+          <a:xfrm xmlns:a="http://schemas.openxmlformats.org/drawingml/2006/main">
+            <a:off x="1885950" y="1771650"/>
+            <a:ext cx="8420100" cy="4648200"/>
+          </a:xfrm>
+          <a:prstGeom xmlns:a="http://schemas.openxmlformats.org/drawingml/2006/main" prst="roundRect">
+            <a:avLst>
+              <a:gd name="adj" fmla="val 2459"/>
+            </a:avLst>
+          </a:prstGeom>
+        </p:spPr>
+      </p:pic>
+      <p:sp>
+        <p:nvSpPr>
+          <p:cNvPr id="5" name="demo-duration">
+            <a:extLst xmlns:a="http://schemas.openxmlformats.org/drawingml/2006/main">
+              <a:ext uri="{FF2B5EF4-FFF2-40B4-BE49-F238E27FC236}">
+                <a16:creationId xmlns:a16="http://schemas.microsoft.com/office/drawing/2014/main" id="{EE88C17D-B071-45DB-9E89-EF82000A016E}"/>
+              </a:ext>
+            </a:extLst>
+          </p:cNvPr>
+          <p:cNvSpPr>
+            <a:spLocks xmlns:a="http://schemas.openxmlformats.org/drawingml/2006/main" noGrp="1"/>
+          </p:cNvSpPr>
+          <p:nvPr/>
+        </p:nvSpPr>
+        <p:spPr>
+          <a:xfrm xmlns:a="http://schemas.openxmlformats.org/drawingml/2006/main">
+            <a:off x="8096250" y="1428750"/>
+            <a:ext cx="2305050" cy="247650"/>
+          </a:xfrm>
+          <a:prstGeom xmlns:a="http://schemas.openxmlformats.org/drawingml/2006/main" prst="rect">
+            <a:avLst/>
+          </a:prstGeom>
+          <a:noFill xmlns:a="http://schemas.openxmlformats.org/drawingml/2006/main"/>
+          <a:ln xmlns:a="http://schemas.openxmlformats.org/drawingml/2006/main" w="0">
+            <a:noFill/>
+            <a:prstDash val="solid"/>
+          </a:ln>
+        </p:spPr>
+        <p:txBody>
+          <a:bodyPr xmlns:a="http://schemas.openxmlformats.org/drawingml/2006/main" anchor="t"/>
+          <a:lstStyle xmlns:a="http://schemas.openxmlformats.org/drawingml/2006/main"/>
+          <a:p xmlns:a="http://schemas.openxmlformats.org/drawingml/2006/main">
+            <a:pPr algn="r">
+              <a:defRPr sz="1050" b="1">
+                <a:solidFill>
+                  <a:srgbClr val="FF7A00"/>
+                </a:solidFill>
+                <a:latin typeface="Helvetica Neue"/>
+                <a:ea typeface="Helvetica Neue"/>
+                <a:cs typeface="Helvetica Neue"/>
+              </a:defRPr>
+            </a:pPr>
+            <a:r>
+              <a:rPr sz="1050" b="1">
+                <a:solidFill>
+                  <a:srgbClr val="FF7A00"/>
+                </a:solidFill>
+                <a:latin typeface="Helvetica Neue"/>
+                <a:ea typeface="Helvetica Neue"/>
+                <a:cs typeface="Helvetica Neue"/>
+              </a:rPr>
+              <a:t>VIDEO PREVIEW · 00:32</a:t>
+            </a:r>
+          </a:p>
+        </p:txBody>
+      </p:sp>
+      <p:sp>
+        <p:nvSpPr>
+          <p:cNvPr id="6" name="demo-slide-number">
+            <a:extLst xmlns:a="http://schemas.openxmlformats.org/drawingml/2006/main">
+              <a:ext uri="{FF2B5EF4-FFF2-40B4-BE49-F238E27FC236}">
+                <a16:creationId xmlns:a16="http://schemas.microsoft.com/office/drawing/2014/main" id="{26A300D4-614A-4FEA-A9A6-8DD8296DA742}"/>
               </a:ext>
             </a:extLst>
           </p:cNvPr>
@@ -2963,1164 +3185,68 @@
           </a:p>
         </p:txBody>
       </p:sp>
-      <p:sp>
-        <p:nvSpPr>
-          <p:cNvPr id="4" name="">
-            <a:extLst xmlns:a="http://schemas.openxmlformats.org/drawingml/2006/main">
-              <a:ext uri="{FF2B5EF4-FFF2-40B4-BE49-F238E27FC236}">
-                <a16:creationId xmlns:a16="http://schemas.microsoft.com/office/drawing/2014/main" id="{6572D6B6-A317-4D60-85E0-8085F5594E83}"/>
-              </a:ext>
-            </a:extLst>
-          </p:cNvPr>
-          <p:cNvSpPr>
-            <a:spLocks xmlns:a="http://schemas.openxmlformats.org/drawingml/2006/main" noGrp="1"/>
-          </p:cNvSpPr>
-          <p:nvPr/>
-        </p:nvSpPr>
-        <p:spPr>
-          <a:xfrm xmlns:a="http://schemas.openxmlformats.org/drawingml/2006/main">
-            <a:off x="685800" y="2000250"/>
-            <a:ext cx="4572000" cy="400050"/>
-          </a:xfrm>
-          <a:prstGeom xmlns:a="http://schemas.openxmlformats.org/drawingml/2006/main" prst="rect">
-            <a:avLst/>
-          </a:prstGeom>
-          <a:noFill xmlns:a="http://schemas.openxmlformats.org/drawingml/2006/main"/>
-          <a:ln xmlns:a="http://schemas.openxmlformats.org/drawingml/2006/main" w="0">
-            <a:noFill/>
-            <a:prstDash val="solid"/>
-          </a:ln>
-        </p:spPr>
-        <p:txBody>
-          <a:bodyPr xmlns:a="http://schemas.openxmlformats.org/drawingml/2006/main" anchor="t"/>
-          <a:lstStyle xmlns:a="http://schemas.openxmlformats.org/drawingml/2006/main"/>
-          <a:p xmlns:a="http://schemas.openxmlformats.org/drawingml/2006/main">
-            <a:pPr algn="l">
-              <a:defRPr sz="2100" b="1">
-                <a:solidFill>
-                  <a:srgbClr val="B64F00"/>
-                </a:solidFill>
-                <a:latin typeface="Helvetica Neue"/>
-                <a:ea typeface="Helvetica Neue"/>
-                <a:cs typeface="Helvetica Neue"/>
-              </a:defRPr>
-            </a:pPr>
-            <a:r>
-              <a:rPr sz="2100" b="1">
-                <a:solidFill>
-                  <a:srgbClr val="B64F00"/>
-                </a:solidFill>
-                <a:latin typeface="Helvetica Neue"/>
-                <a:ea typeface="Helvetica Neue"/>
-                <a:cs typeface="Helvetica Neue"/>
-              </a:rPr>
-              <a:t>Included</a:t>
-            </a:r>
-          </a:p>
-        </p:txBody>
-      </p:sp>
-      <p:sp>
-        <p:nvSpPr>
-          <p:cNvPr id="5" name="">
-            <a:extLst xmlns:a="http://schemas.openxmlformats.org/drawingml/2006/main">
-              <a:ext uri="{FF2B5EF4-FFF2-40B4-BE49-F238E27FC236}">
-                <a16:creationId xmlns:a16="http://schemas.microsoft.com/office/drawing/2014/main" id="{FA671628-20D0-43F3-91B7-2699500D3FE9}"/>
-              </a:ext>
-            </a:extLst>
-          </p:cNvPr>
-          <p:cNvSpPr>
-            <a:spLocks xmlns:a="http://schemas.openxmlformats.org/drawingml/2006/main" noGrp="1"/>
-          </p:cNvSpPr>
-          <p:nvPr/>
-        </p:nvSpPr>
-        <p:spPr>
-          <a:xfrm xmlns:a="http://schemas.openxmlformats.org/drawingml/2006/main">
-            <a:off x="6496050" y="2000250"/>
-            <a:ext cx="4953000" cy="400050"/>
-          </a:xfrm>
-          <a:prstGeom xmlns:a="http://schemas.openxmlformats.org/drawingml/2006/main" prst="rect">
-            <a:avLst/>
-          </a:prstGeom>
-          <a:noFill xmlns:a="http://schemas.openxmlformats.org/drawingml/2006/main"/>
-          <a:ln xmlns:a="http://schemas.openxmlformats.org/drawingml/2006/main" w="0">
-            <a:noFill/>
-            <a:prstDash val="solid"/>
-          </a:ln>
-        </p:spPr>
-        <p:txBody>
-          <a:bodyPr xmlns:a="http://schemas.openxmlformats.org/drawingml/2006/main" anchor="t"/>
-          <a:lstStyle xmlns:a="http://schemas.openxmlformats.org/drawingml/2006/main"/>
-          <a:p xmlns:a="http://schemas.openxmlformats.org/drawingml/2006/main">
-            <a:pPr algn="l">
-              <a:defRPr sz="2100" b="1">
-                <a:solidFill>
-                  <a:srgbClr val="62656A"/>
-                </a:solidFill>
-                <a:latin typeface="Helvetica Neue"/>
-                <a:ea typeface="Helvetica Neue"/>
-                <a:cs typeface="Helvetica Neue"/>
-              </a:defRPr>
-            </a:pPr>
-            <a:r>
-              <a:rPr sz="2100" b="1">
-                <a:solidFill>
-                  <a:srgbClr val="62656A"/>
-                </a:solidFill>
-                <a:latin typeface="Helvetica Neue"/>
-                <a:ea typeface="Helvetica Neue"/>
-                <a:cs typeface="Helvetica Neue"/>
-              </a:rPr>
-              <a:t>Intentionally excluded</a:t>
-            </a:r>
-          </a:p>
-        </p:txBody>
-      </p:sp>
-      <p:sp>
-        <p:nvSpPr>
-          <p:cNvPr id="6" name="">
-            <a:extLst xmlns:a="http://schemas.openxmlformats.org/drawingml/2006/main">
-              <a:ext uri="{FF2B5EF4-FFF2-40B4-BE49-F238E27FC236}">
-                <a16:creationId xmlns:a16="http://schemas.microsoft.com/office/drawing/2014/main" id="{3C250B21-86F8-4203-A83A-D45AF4696B1C}"/>
-              </a:ext>
-            </a:extLst>
-          </p:cNvPr>
-          <p:cNvSpPr>
-            <a:spLocks xmlns:a="http://schemas.openxmlformats.org/drawingml/2006/main" noGrp="1"/>
-          </p:cNvSpPr>
-          <p:nvPr/>
-        </p:nvSpPr>
-        <p:spPr>
-          <a:xfrm xmlns:a="http://schemas.openxmlformats.org/drawingml/2006/main">
-            <a:off x="6096000" y="1885950"/>
-            <a:ext cx="19050" cy="3810000"/>
-          </a:xfrm>
-          <a:prstGeom xmlns:a="http://schemas.openxmlformats.org/drawingml/2006/main" prst="rect">
-            <a:avLst/>
-          </a:prstGeom>
-          <a:solidFill xmlns:a="http://schemas.openxmlformats.org/drawingml/2006/main">
-            <a:srgbClr val="D4D4D0"/>
-          </a:solidFill>
-          <a:ln xmlns:a="http://schemas.openxmlformats.org/drawingml/2006/main" w="0">
-            <a:noFill/>
-            <a:prstDash val="solid"/>
-          </a:ln>
-        </p:spPr>
-      </p:sp>
-      <p:sp>
-        <p:nvSpPr>
-          <p:cNvPr id="7" name="">
-            <a:extLst xmlns:a="http://schemas.openxmlformats.org/drawingml/2006/main">
-              <a:ext uri="{FF2B5EF4-FFF2-40B4-BE49-F238E27FC236}">
-                <a16:creationId xmlns:a16="http://schemas.microsoft.com/office/drawing/2014/main" id="{DBB6397F-0213-4888-8BA6-A8AC90822B65}"/>
-              </a:ext>
-            </a:extLst>
-          </p:cNvPr>
-          <p:cNvSpPr>
-            <a:spLocks xmlns:a="http://schemas.openxmlformats.org/drawingml/2006/main" noGrp="1"/>
-          </p:cNvSpPr>
-          <p:nvPr/>
-        </p:nvSpPr>
-        <p:spPr>
-          <a:xfrm xmlns:a="http://schemas.openxmlformats.org/drawingml/2006/main">
-            <a:off x="685800" y="2724150"/>
-            <a:ext cx="438150" cy="285750"/>
-          </a:xfrm>
-          <a:prstGeom xmlns:a="http://schemas.openxmlformats.org/drawingml/2006/main" prst="rect">
-            <a:avLst/>
-          </a:prstGeom>
-          <a:noFill xmlns:a="http://schemas.openxmlformats.org/drawingml/2006/main"/>
-          <a:ln xmlns:a="http://schemas.openxmlformats.org/drawingml/2006/main" w="0">
-            <a:noFill/>
-            <a:prstDash val="solid"/>
-          </a:ln>
-        </p:spPr>
-        <p:txBody>
-          <a:bodyPr xmlns:a="http://schemas.openxmlformats.org/drawingml/2006/main" anchor="t"/>
-          <a:lstStyle xmlns:a="http://schemas.openxmlformats.org/drawingml/2006/main"/>
-          <a:p xmlns:a="http://schemas.openxmlformats.org/drawingml/2006/main">
-            <a:pPr algn="l">
-              <a:defRPr sz="1350" b="1">
-                <a:solidFill>
-                  <a:srgbClr val="FF7A00"/>
-                </a:solidFill>
-                <a:latin typeface="Helvetica Neue"/>
-                <a:ea typeface="Helvetica Neue"/>
-                <a:cs typeface="Helvetica Neue"/>
-              </a:defRPr>
-            </a:pPr>
-            <a:r>
-              <a:rPr sz="1350" b="1">
-                <a:solidFill>
-                  <a:srgbClr val="FF7A00"/>
-                </a:solidFill>
-                <a:latin typeface="Helvetica Neue"/>
-                <a:ea typeface="Helvetica Neue"/>
-                <a:cs typeface="Helvetica Neue"/>
-              </a:rPr>
-              <a:t>01</a:t>
-            </a:r>
-          </a:p>
-        </p:txBody>
-      </p:sp>
-      <p:sp>
-        <p:nvSpPr>
-          <p:cNvPr id="8" name="">
-            <a:extLst xmlns:a="http://schemas.openxmlformats.org/drawingml/2006/main">
-              <a:ext uri="{FF2B5EF4-FFF2-40B4-BE49-F238E27FC236}">
-                <a16:creationId xmlns:a16="http://schemas.microsoft.com/office/drawing/2014/main" id="{5ECEE9F2-1517-436F-B31B-AE358B871E43}"/>
-              </a:ext>
-            </a:extLst>
-          </p:cNvPr>
-          <p:cNvSpPr>
-            <a:spLocks xmlns:a="http://schemas.openxmlformats.org/drawingml/2006/main" noGrp="1"/>
-          </p:cNvSpPr>
-          <p:nvPr/>
-        </p:nvSpPr>
-        <p:spPr>
-          <a:xfrm xmlns:a="http://schemas.openxmlformats.org/drawingml/2006/main">
-            <a:off x="1276350" y="2705100"/>
-            <a:ext cx="4171950" cy="304800"/>
-          </a:xfrm>
-          <a:prstGeom xmlns:a="http://schemas.openxmlformats.org/drawingml/2006/main" prst="rect">
-            <a:avLst/>
-          </a:prstGeom>
-          <a:noFill xmlns:a="http://schemas.openxmlformats.org/drawingml/2006/main"/>
-          <a:ln xmlns:a="http://schemas.openxmlformats.org/drawingml/2006/main" w="0">
-            <a:noFill/>
-            <a:prstDash val="solid"/>
-          </a:ln>
-        </p:spPr>
-        <p:txBody>
-          <a:bodyPr xmlns:a="http://schemas.openxmlformats.org/drawingml/2006/main" anchor="t"/>
-          <a:lstStyle xmlns:a="http://schemas.openxmlformats.org/drawingml/2006/main"/>
-          <a:p xmlns:a="http://schemas.openxmlformats.org/drawingml/2006/main">
-            <a:pPr algn="l">
-              <a:defRPr sz="1875" b="1">
-                <a:solidFill>
-                  <a:srgbClr val="202124"/>
-                </a:solidFill>
-                <a:latin typeface="Helvetica Neue"/>
-                <a:ea typeface="Helvetica Neue"/>
-                <a:cs typeface="Helvetica Neue"/>
-              </a:defRPr>
-            </a:pPr>
-            <a:r>
-              <a:rPr sz="1875" b="1">
-                <a:solidFill>
-                  <a:srgbClr val="202124"/>
-                </a:solidFill>
-                <a:latin typeface="Helvetica Neue"/>
-                <a:ea typeface="Helvetica Neue"/>
-                <a:cs typeface="Helvetica Neue"/>
-              </a:rPr>
-              <a:t>Persistent CRUD subset</a:t>
-            </a:r>
-          </a:p>
-        </p:txBody>
-      </p:sp>
-      <p:sp>
-        <p:nvSpPr>
-          <p:cNvPr id="9" name="">
-            <a:extLst xmlns:a="http://schemas.openxmlformats.org/drawingml/2006/main">
-              <a:ext uri="{FF2B5EF4-FFF2-40B4-BE49-F238E27FC236}">
-                <a16:creationId xmlns:a16="http://schemas.microsoft.com/office/drawing/2014/main" id="{A6D9C579-3E1F-4145-908C-76AFBF10E6E3}"/>
-              </a:ext>
-            </a:extLst>
-          </p:cNvPr>
-          <p:cNvSpPr>
-            <a:spLocks xmlns:a="http://schemas.openxmlformats.org/drawingml/2006/main" noGrp="1"/>
-          </p:cNvSpPr>
-          <p:nvPr/>
-        </p:nvSpPr>
-        <p:spPr>
-          <a:xfrm xmlns:a="http://schemas.openxmlformats.org/drawingml/2006/main">
-            <a:off x="1276350" y="3086100"/>
-            <a:ext cx="4171950" cy="590550"/>
-          </a:xfrm>
-          <a:prstGeom xmlns:a="http://schemas.openxmlformats.org/drawingml/2006/main" prst="rect">
-            <a:avLst/>
-          </a:prstGeom>
-          <a:noFill xmlns:a="http://schemas.openxmlformats.org/drawingml/2006/main"/>
-          <a:ln xmlns:a="http://schemas.openxmlformats.org/drawingml/2006/main" w="0">
-            <a:noFill/>
-            <a:prstDash val="solid"/>
-          </a:ln>
-        </p:spPr>
-        <p:txBody>
-          <a:bodyPr xmlns:a="http://schemas.openxmlformats.org/drawingml/2006/main" anchor="t"/>
-          <a:lstStyle xmlns:a="http://schemas.openxmlformats.org/drawingml/2006/main"/>
-          <a:p xmlns:a="http://schemas.openxmlformats.org/drawingml/2006/main">
-            <a:pPr algn="l">
-              <a:defRPr sz="1350" b="0">
-                <a:solidFill>
-                  <a:srgbClr val="62656A"/>
-                </a:solidFill>
-                <a:latin typeface="Helvetica Neue"/>
-                <a:ea typeface="Helvetica Neue"/>
-                <a:cs typeface="Helvetica Neue"/>
-              </a:defRPr>
-            </a:pPr>
-            <a:r>
-              <a:rPr sz="1350" b="0">
-                <a:solidFill>
-                  <a:srgbClr val="62656A"/>
-                </a:solidFill>
-                <a:latin typeface="Helvetica Neue"/>
-                <a:ea typeface="Helvetica Neue"/>
-                <a:cs typeface="Helvetica Neue"/>
-              </a:rPr>
-              <a:t>Create and update only - deletion was not requested.</a:t>
-            </a:r>
-          </a:p>
-        </p:txBody>
-      </p:sp>
-      <p:sp>
-        <p:nvSpPr>
-          <p:cNvPr id="10" name="">
-            <a:extLst xmlns:a="http://schemas.openxmlformats.org/drawingml/2006/main">
-              <a:ext uri="{FF2B5EF4-FFF2-40B4-BE49-F238E27FC236}">
-                <a16:creationId xmlns:a16="http://schemas.microsoft.com/office/drawing/2014/main" id="{8CF903E5-3152-4D51-B7FB-6BD8B3F10507}"/>
-              </a:ext>
-            </a:extLst>
-          </p:cNvPr>
-          <p:cNvSpPr>
-            <a:spLocks xmlns:a="http://schemas.openxmlformats.org/drawingml/2006/main" noGrp="1"/>
-          </p:cNvSpPr>
-          <p:nvPr/>
-        </p:nvSpPr>
-        <p:spPr>
-          <a:xfrm xmlns:a="http://schemas.openxmlformats.org/drawingml/2006/main">
-            <a:off x="685800" y="3886200"/>
-            <a:ext cx="438150" cy="285750"/>
-          </a:xfrm>
-          <a:prstGeom xmlns:a="http://schemas.openxmlformats.org/drawingml/2006/main" prst="rect">
-            <a:avLst/>
-          </a:prstGeom>
-          <a:noFill xmlns:a="http://schemas.openxmlformats.org/drawingml/2006/main"/>
-          <a:ln xmlns:a="http://schemas.openxmlformats.org/drawingml/2006/main" w="0">
-            <a:noFill/>
-            <a:prstDash val="solid"/>
-          </a:ln>
-        </p:spPr>
-        <p:txBody>
-          <a:bodyPr xmlns:a="http://schemas.openxmlformats.org/drawingml/2006/main" anchor="t"/>
-          <a:lstStyle xmlns:a="http://schemas.openxmlformats.org/drawingml/2006/main"/>
-          <a:p xmlns:a="http://schemas.openxmlformats.org/drawingml/2006/main">
-            <a:pPr algn="l">
-              <a:defRPr sz="1350" b="1">
-                <a:solidFill>
-                  <a:srgbClr val="FF7A00"/>
-                </a:solidFill>
-                <a:latin typeface="Helvetica Neue"/>
-                <a:ea typeface="Helvetica Neue"/>
-                <a:cs typeface="Helvetica Neue"/>
-              </a:defRPr>
-            </a:pPr>
-            <a:r>
-              <a:rPr sz="1350" b="1">
-                <a:solidFill>
-                  <a:srgbClr val="FF7A00"/>
-                </a:solidFill>
-                <a:latin typeface="Helvetica Neue"/>
-                <a:ea typeface="Helvetica Neue"/>
-                <a:cs typeface="Helvetica Neue"/>
-              </a:rPr>
-              <a:t>02</a:t>
-            </a:r>
-          </a:p>
-        </p:txBody>
-      </p:sp>
-      <p:sp>
-        <p:nvSpPr>
-          <p:cNvPr id="11" name="">
-            <a:extLst xmlns:a="http://schemas.openxmlformats.org/drawingml/2006/main">
-              <a:ext uri="{FF2B5EF4-FFF2-40B4-BE49-F238E27FC236}">
-                <a16:creationId xmlns:a16="http://schemas.microsoft.com/office/drawing/2014/main" id="{211D9B73-A7E8-4B31-9F83-3F4FA92BD52E}"/>
-              </a:ext>
-            </a:extLst>
-          </p:cNvPr>
-          <p:cNvSpPr>
-            <a:spLocks xmlns:a="http://schemas.openxmlformats.org/drawingml/2006/main" noGrp="1"/>
-          </p:cNvSpPr>
-          <p:nvPr/>
-        </p:nvSpPr>
-        <p:spPr>
-          <a:xfrm xmlns:a="http://schemas.openxmlformats.org/drawingml/2006/main">
-            <a:off x="1276350" y="3867150"/>
-            <a:ext cx="4171950" cy="304800"/>
-          </a:xfrm>
-          <a:prstGeom xmlns:a="http://schemas.openxmlformats.org/drawingml/2006/main" prst="rect">
-            <a:avLst/>
-          </a:prstGeom>
-          <a:noFill xmlns:a="http://schemas.openxmlformats.org/drawingml/2006/main"/>
-          <a:ln xmlns:a="http://schemas.openxmlformats.org/drawingml/2006/main" w="0">
-            <a:noFill/>
-            <a:prstDash val="solid"/>
-          </a:ln>
-        </p:spPr>
-        <p:txBody>
-          <a:bodyPr xmlns:a="http://schemas.openxmlformats.org/drawingml/2006/main" anchor="t"/>
-          <a:lstStyle xmlns:a="http://schemas.openxmlformats.org/drawingml/2006/main"/>
-          <a:p xmlns:a="http://schemas.openxmlformats.org/drawingml/2006/main">
-            <a:pPr algn="l">
-              <a:defRPr sz="1875" b="1">
-                <a:solidFill>
-                  <a:srgbClr val="202124"/>
-                </a:solidFill>
-                <a:latin typeface="Helvetica Neue"/>
-                <a:ea typeface="Helvetica Neue"/>
-                <a:cs typeface="Helvetica Neue"/>
-              </a:defRPr>
-            </a:pPr>
-            <a:r>
-              <a:rPr sz="1875" b="1">
-                <a:solidFill>
-                  <a:srgbClr val="202124"/>
-                </a:solidFill>
-                <a:latin typeface="Helvetica Neue"/>
-                <a:ea typeface="Helvetica Neue"/>
-                <a:cs typeface="Helvetica Neue"/>
-              </a:rPr>
-              <a:t>One practical bonus</a:t>
-            </a:r>
-          </a:p>
-        </p:txBody>
-      </p:sp>
-      <p:sp>
-        <p:nvSpPr>
-          <p:cNvPr id="12" name="">
-            <a:extLst xmlns:a="http://schemas.openxmlformats.org/drawingml/2006/main">
-              <a:ext uri="{FF2B5EF4-FFF2-40B4-BE49-F238E27FC236}">
-                <a16:creationId xmlns:a16="http://schemas.microsoft.com/office/drawing/2014/main" id="{81707D27-B506-4EFD-9016-7F2281C8FEE9}"/>
-              </a:ext>
-            </a:extLst>
-          </p:cNvPr>
-          <p:cNvSpPr>
-            <a:spLocks xmlns:a="http://schemas.openxmlformats.org/drawingml/2006/main" noGrp="1"/>
-          </p:cNvSpPr>
-          <p:nvPr/>
-        </p:nvSpPr>
-        <p:spPr>
-          <a:xfrm xmlns:a="http://schemas.openxmlformats.org/drawingml/2006/main">
-            <a:off x="1276350" y="4248150"/>
-            <a:ext cx="4171950" cy="590550"/>
-          </a:xfrm>
-          <a:prstGeom xmlns:a="http://schemas.openxmlformats.org/drawingml/2006/main" prst="rect">
-            <a:avLst/>
-          </a:prstGeom>
-          <a:noFill xmlns:a="http://schemas.openxmlformats.org/drawingml/2006/main"/>
-          <a:ln xmlns:a="http://schemas.openxmlformats.org/drawingml/2006/main" w="0">
-            <a:noFill/>
-            <a:prstDash val="solid"/>
-          </a:ln>
-        </p:spPr>
-        <p:txBody>
-          <a:bodyPr xmlns:a="http://schemas.openxmlformats.org/drawingml/2006/main" anchor="t"/>
-          <a:lstStyle xmlns:a="http://schemas.openxmlformats.org/drawingml/2006/main"/>
-          <a:p xmlns:a="http://schemas.openxmlformats.org/drawingml/2006/main">
-            <a:pPr algn="l">
-              <a:defRPr sz="1350" b="0">
-                <a:solidFill>
-                  <a:srgbClr val="62656A"/>
-                </a:solidFill>
-                <a:latin typeface="Helvetica Neue"/>
-                <a:ea typeface="Helvetica Neue"/>
-                <a:cs typeface="Helvetica Neue"/>
-              </a:defRPr>
-            </a:pPr>
-            <a:r>
-              <a:rPr sz="1350" b="0">
-                <a:solidFill>
-                  <a:srgbClr val="62656A"/>
-                </a:solidFill>
-                <a:latin typeface="Helvetica Neue"/>
-                <a:ea typeface="Helvetica Neue"/>
-                <a:cs typeface="Helvetica Neue"/>
-              </a:rPr>
-              <a:t>Search and status filters improve daily use at low complexity.</a:t>
-            </a:r>
-          </a:p>
-        </p:txBody>
-      </p:sp>
-      <p:sp>
-        <p:nvSpPr>
-          <p:cNvPr id="13" name="">
-            <a:extLst xmlns:a="http://schemas.openxmlformats.org/drawingml/2006/main">
-              <a:ext uri="{FF2B5EF4-FFF2-40B4-BE49-F238E27FC236}">
-                <a16:creationId xmlns:a16="http://schemas.microsoft.com/office/drawing/2014/main" id="{E6EE08EE-2BE1-4064-9F90-2FDCBD2747D1}"/>
-              </a:ext>
-            </a:extLst>
-          </p:cNvPr>
-          <p:cNvSpPr>
-            <a:spLocks xmlns:a="http://schemas.openxmlformats.org/drawingml/2006/main" noGrp="1"/>
-          </p:cNvSpPr>
-          <p:nvPr/>
-        </p:nvSpPr>
-        <p:spPr>
-          <a:xfrm xmlns:a="http://schemas.openxmlformats.org/drawingml/2006/main">
-            <a:off x="685800" y="5048250"/>
-            <a:ext cx="438150" cy="285750"/>
-          </a:xfrm>
-          <a:prstGeom xmlns:a="http://schemas.openxmlformats.org/drawingml/2006/main" prst="rect">
-            <a:avLst/>
-          </a:prstGeom>
-          <a:noFill xmlns:a="http://schemas.openxmlformats.org/drawingml/2006/main"/>
-          <a:ln xmlns:a="http://schemas.openxmlformats.org/drawingml/2006/main" w="0">
-            <a:noFill/>
-            <a:prstDash val="solid"/>
-          </a:ln>
-        </p:spPr>
-        <p:txBody>
-          <a:bodyPr xmlns:a="http://schemas.openxmlformats.org/drawingml/2006/main" anchor="t"/>
-          <a:lstStyle xmlns:a="http://schemas.openxmlformats.org/drawingml/2006/main"/>
-          <a:p xmlns:a="http://schemas.openxmlformats.org/drawingml/2006/main">
-            <a:pPr algn="l">
-              <a:defRPr sz="1350" b="1">
-                <a:solidFill>
-                  <a:srgbClr val="FF7A00"/>
-                </a:solidFill>
-                <a:latin typeface="Helvetica Neue"/>
-                <a:ea typeface="Helvetica Neue"/>
-                <a:cs typeface="Helvetica Neue"/>
-              </a:defRPr>
-            </a:pPr>
-            <a:r>
-              <a:rPr sz="1350" b="1">
-                <a:solidFill>
-                  <a:srgbClr val="FF7A00"/>
-                </a:solidFill>
-                <a:latin typeface="Helvetica Neue"/>
-                <a:ea typeface="Helvetica Neue"/>
-                <a:cs typeface="Helvetica Neue"/>
-              </a:rPr>
-              <a:t>03</a:t>
-            </a:r>
-          </a:p>
-        </p:txBody>
-      </p:sp>
-      <p:sp>
-        <p:nvSpPr>
-          <p:cNvPr id="14" name="">
-            <a:extLst xmlns:a="http://schemas.openxmlformats.org/drawingml/2006/main">
-              <a:ext uri="{FF2B5EF4-FFF2-40B4-BE49-F238E27FC236}">
-                <a16:creationId xmlns:a16="http://schemas.microsoft.com/office/drawing/2014/main" id="{4B79D25C-5066-4160-B0A2-530651CB9BED}"/>
-              </a:ext>
-            </a:extLst>
-          </p:cNvPr>
-          <p:cNvSpPr>
-            <a:spLocks xmlns:a="http://schemas.openxmlformats.org/drawingml/2006/main" noGrp="1"/>
-          </p:cNvSpPr>
-          <p:nvPr/>
-        </p:nvSpPr>
-        <p:spPr>
-          <a:xfrm xmlns:a="http://schemas.openxmlformats.org/drawingml/2006/main">
-            <a:off x="1276350" y="5029200"/>
-            <a:ext cx="4171950" cy="304800"/>
-          </a:xfrm>
-          <a:prstGeom xmlns:a="http://schemas.openxmlformats.org/drawingml/2006/main" prst="rect">
-            <a:avLst/>
-          </a:prstGeom>
-          <a:noFill xmlns:a="http://schemas.openxmlformats.org/drawingml/2006/main"/>
-          <a:ln xmlns:a="http://schemas.openxmlformats.org/drawingml/2006/main" w="0">
-            <a:noFill/>
-            <a:prstDash val="solid"/>
-          </a:ln>
-        </p:spPr>
-        <p:txBody>
-          <a:bodyPr xmlns:a="http://schemas.openxmlformats.org/drawingml/2006/main" anchor="t"/>
-          <a:lstStyle xmlns:a="http://schemas.openxmlformats.org/drawingml/2006/main"/>
-          <a:p xmlns:a="http://schemas.openxmlformats.org/drawingml/2006/main">
-            <a:pPr algn="l">
-              <a:defRPr sz="1875" b="1">
-                <a:solidFill>
-                  <a:srgbClr val="202124"/>
-                </a:solidFill>
-                <a:latin typeface="Helvetica Neue"/>
-                <a:ea typeface="Helvetica Neue"/>
-                <a:cs typeface="Helvetica Neue"/>
-              </a:defRPr>
-            </a:pPr>
-            <a:r>
-              <a:rPr sz="1875" b="1">
-                <a:solidFill>
-                  <a:srgbClr val="202124"/>
-                </a:solidFill>
-                <a:latin typeface="Helvetica Neue"/>
-                <a:ea typeface="Helvetica Neue"/>
-                <a:cs typeface="Helvetica Neue"/>
-              </a:rPr>
-              <a:t>Demo-ready data</a:t>
-            </a:r>
-          </a:p>
-        </p:txBody>
-      </p:sp>
-      <p:sp>
-        <p:nvSpPr>
-          <p:cNvPr id="15" name="">
-            <a:extLst xmlns:a="http://schemas.openxmlformats.org/drawingml/2006/main">
-              <a:ext uri="{FF2B5EF4-FFF2-40B4-BE49-F238E27FC236}">
-                <a16:creationId xmlns:a16="http://schemas.microsoft.com/office/drawing/2014/main" id="{306D93A1-0ADD-4767-AF13-521FBE98D2B6}"/>
-              </a:ext>
-            </a:extLst>
-          </p:cNvPr>
-          <p:cNvSpPr>
-            <a:spLocks xmlns:a="http://schemas.openxmlformats.org/drawingml/2006/main" noGrp="1"/>
-          </p:cNvSpPr>
-          <p:nvPr/>
-        </p:nvSpPr>
-        <p:spPr>
-          <a:xfrm xmlns:a="http://schemas.openxmlformats.org/drawingml/2006/main">
-            <a:off x="1276350" y="5410200"/>
-            <a:ext cx="4171950" cy="590550"/>
-          </a:xfrm>
-          <a:prstGeom xmlns:a="http://schemas.openxmlformats.org/drawingml/2006/main" prst="rect">
-            <a:avLst/>
-          </a:prstGeom>
-          <a:noFill xmlns:a="http://schemas.openxmlformats.org/drawingml/2006/main"/>
-          <a:ln xmlns:a="http://schemas.openxmlformats.org/drawingml/2006/main" w="0">
-            <a:noFill/>
-            <a:prstDash val="solid"/>
-          </a:ln>
-        </p:spPr>
-        <p:txBody>
-          <a:bodyPr xmlns:a="http://schemas.openxmlformats.org/drawingml/2006/main" anchor="t"/>
-          <a:lstStyle xmlns:a="http://schemas.openxmlformats.org/drawingml/2006/main"/>
-          <a:p xmlns:a="http://schemas.openxmlformats.org/drawingml/2006/main">
-            <a:pPr algn="l">
-              <a:defRPr sz="1350" b="0">
-                <a:solidFill>
-                  <a:srgbClr val="62656A"/>
-                </a:solidFill>
-                <a:latin typeface="Helvetica Neue"/>
-                <a:ea typeface="Helvetica Neue"/>
-                <a:cs typeface="Helvetica Neue"/>
-              </a:defRPr>
-            </a:pPr>
-            <a:r>
-              <a:rPr sz="1350" b="0">
-                <a:solidFill>
-                  <a:srgbClr val="62656A"/>
-                </a:solidFill>
-                <a:latin typeface="Helvetica Neue"/>
-                <a:ea typeface="Helvetica Neue"/>
-                <a:cs typeface="Helvetica Neue"/>
-              </a:rPr>
-              <a:t>Four realistic users and tasks arrive through a reversible migration.</a:t>
-            </a:r>
-          </a:p>
-        </p:txBody>
-      </p:sp>
-      <p:sp>
-        <p:nvSpPr>
-          <p:cNvPr id="16" name="">
-            <a:extLst xmlns:a="http://schemas.openxmlformats.org/drawingml/2006/main">
-              <a:ext uri="{FF2B5EF4-FFF2-40B4-BE49-F238E27FC236}">
-                <a16:creationId xmlns:a16="http://schemas.microsoft.com/office/drawing/2014/main" id="{56247076-EC56-4191-9567-B106EE919569}"/>
-              </a:ext>
-            </a:extLst>
-          </p:cNvPr>
-          <p:cNvSpPr>
-            <a:spLocks xmlns:a="http://schemas.openxmlformats.org/drawingml/2006/main" noGrp="1"/>
-          </p:cNvSpPr>
-          <p:nvPr/>
-        </p:nvSpPr>
-        <p:spPr>
-          <a:xfrm xmlns:a="http://schemas.openxmlformats.org/drawingml/2006/main">
-            <a:off x="6496050" y="2724150"/>
-            <a:ext cx="438150" cy="285750"/>
-          </a:xfrm>
-          <a:prstGeom xmlns:a="http://schemas.openxmlformats.org/drawingml/2006/main" prst="rect">
-            <a:avLst/>
-          </a:prstGeom>
-          <a:noFill xmlns:a="http://schemas.openxmlformats.org/drawingml/2006/main"/>
-          <a:ln xmlns:a="http://schemas.openxmlformats.org/drawingml/2006/main" w="0">
-            <a:noFill/>
-            <a:prstDash val="solid"/>
-          </a:ln>
-        </p:spPr>
-        <p:txBody>
-          <a:bodyPr xmlns:a="http://schemas.openxmlformats.org/drawingml/2006/main" anchor="t"/>
-          <a:lstStyle xmlns:a="http://schemas.openxmlformats.org/drawingml/2006/main"/>
-          <a:p xmlns:a="http://schemas.openxmlformats.org/drawingml/2006/main">
-            <a:pPr algn="l">
-              <a:defRPr sz="1350" b="1">
-                <a:solidFill>
-                  <a:srgbClr val="858783"/>
-                </a:solidFill>
-                <a:latin typeface="Helvetica Neue"/>
-                <a:ea typeface="Helvetica Neue"/>
-                <a:cs typeface="Helvetica Neue"/>
-              </a:defRPr>
-            </a:pPr>
-            <a:r>
-              <a:rPr sz="1350" b="1">
-                <a:solidFill>
-                  <a:srgbClr val="858783"/>
-                </a:solidFill>
-                <a:latin typeface="Helvetica Neue"/>
-                <a:ea typeface="Helvetica Neue"/>
-                <a:cs typeface="Helvetica Neue"/>
-              </a:rPr>
-              <a:t>01</a:t>
-            </a:r>
-          </a:p>
-        </p:txBody>
-      </p:sp>
-      <p:sp>
-        <p:nvSpPr>
-          <p:cNvPr id="17" name="">
-            <a:extLst xmlns:a="http://schemas.openxmlformats.org/drawingml/2006/main">
-              <a:ext uri="{FF2B5EF4-FFF2-40B4-BE49-F238E27FC236}">
-                <a16:creationId xmlns:a16="http://schemas.microsoft.com/office/drawing/2014/main" id="{979F9FF7-53AF-4B02-A8DA-3E749B8754A3}"/>
-              </a:ext>
-            </a:extLst>
-          </p:cNvPr>
-          <p:cNvSpPr>
-            <a:spLocks xmlns:a="http://schemas.openxmlformats.org/drawingml/2006/main" noGrp="1"/>
-          </p:cNvSpPr>
-          <p:nvPr/>
-        </p:nvSpPr>
-        <p:spPr>
-          <a:xfrm xmlns:a="http://schemas.openxmlformats.org/drawingml/2006/main">
-            <a:off x="7086600" y="2705100"/>
-            <a:ext cx="4171950" cy="304800"/>
-          </a:xfrm>
-          <a:prstGeom xmlns:a="http://schemas.openxmlformats.org/drawingml/2006/main" prst="rect">
-            <a:avLst/>
-          </a:prstGeom>
-          <a:noFill xmlns:a="http://schemas.openxmlformats.org/drawingml/2006/main"/>
-          <a:ln xmlns:a="http://schemas.openxmlformats.org/drawingml/2006/main" w="0">
-            <a:noFill/>
-            <a:prstDash val="solid"/>
-          </a:ln>
-        </p:spPr>
-        <p:txBody>
-          <a:bodyPr xmlns:a="http://schemas.openxmlformats.org/drawingml/2006/main" anchor="t"/>
-          <a:lstStyle xmlns:a="http://schemas.openxmlformats.org/drawingml/2006/main"/>
-          <a:p xmlns:a="http://schemas.openxmlformats.org/drawingml/2006/main">
-            <a:pPr algn="l">
-              <a:defRPr sz="1875" b="1">
-                <a:solidFill>
-                  <a:srgbClr val="62656A"/>
-                </a:solidFill>
-                <a:latin typeface="Helvetica Neue"/>
-                <a:ea typeface="Helvetica Neue"/>
-                <a:cs typeface="Helvetica Neue"/>
-              </a:defRPr>
-            </a:pPr>
-            <a:r>
-              <a:rPr sz="1875" b="1">
-                <a:solidFill>
-                  <a:srgbClr val="62656A"/>
-                </a:solidFill>
-                <a:latin typeface="Helvetica Neue"/>
-                <a:ea typeface="Helvetica Neue"/>
-                <a:cs typeface="Helvetica Neue"/>
-              </a:rPr>
-              <a:t>Authentication</a:t>
-            </a:r>
-          </a:p>
-        </p:txBody>
-      </p:sp>
-      <p:sp>
-        <p:nvSpPr>
-          <p:cNvPr id="18" name="">
-            <a:extLst xmlns:a="http://schemas.openxmlformats.org/drawingml/2006/main">
-              <a:ext uri="{FF2B5EF4-FFF2-40B4-BE49-F238E27FC236}">
-                <a16:creationId xmlns:a16="http://schemas.microsoft.com/office/drawing/2014/main" id="{01850210-1C34-4AD2-A033-1FBB36AFC22F}"/>
-              </a:ext>
-            </a:extLst>
-          </p:cNvPr>
-          <p:cNvSpPr>
-            <a:spLocks xmlns:a="http://schemas.openxmlformats.org/drawingml/2006/main" noGrp="1"/>
-          </p:cNvSpPr>
-          <p:nvPr/>
-        </p:nvSpPr>
-        <p:spPr>
-          <a:xfrm xmlns:a="http://schemas.openxmlformats.org/drawingml/2006/main">
-            <a:off x="7086600" y="3086100"/>
-            <a:ext cx="4171950" cy="590550"/>
-          </a:xfrm>
-          <a:prstGeom xmlns:a="http://schemas.openxmlformats.org/drawingml/2006/main" prst="rect">
-            <a:avLst/>
-          </a:prstGeom>
-          <a:noFill xmlns:a="http://schemas.openxmlformats.org/drawingml/2006/main"/>
-          <a:ln xmlns:a="http://schemas.openxmlformats.org/drawingml/2006/main" w="0">
-            <a:noFill/>
-            <a:prstDash val="solid"/>
-          </a:ln>
-        </p:spPr>
-        <p:txBody>
-          <a:bodyPr xmlns:a="http://schemas.openxmlformats.org/drawingml/2006/main" anchor="t"/>
-          <a:lstStyle xmlns:a="http://schemas.openxmlformats.org/drawingml/2006/main"/>
-          <a:p xmlns:a="http://schemas.openxmlformats.org/drawingml/2006/main">
-            <a:pPr algn="l">
-              <a:defRPr sz="1350" b="0">
-                <a:solidFill>
-                  <a:srgbClr val="62656A"/>
-                </a:solidFill>
-                <a:latin typeface="Helvetica Neue"/>
-                <a:ea typeface="Helvetica Neue"/>
-                <a:cs typeface="Helvetica Neue"/>
-              </a:defRPr>
-            </a:pPr>
-            <a:r>
-              <a:rPr sz="1350" b="0">
-                <a:solidFill>
-                  <a:srgbClr val="62656A"/>
-                </a:solidFill>
-                <a:latin typeface="Helvetica Neue"/>
-                <a:ea typeface="Helvetica Neue"/>
-                <a:cs typeface="Helvetica Neue"/>
-              </a:rPr>
-              <a:t>A pretend login would add risk without a user requirement.</a:t>
-            </a:r>
-          </a:p>
-        </p:txBody>
-      </p:sp>
-      <p:sp>
-        <p:nvSpPr>
-          <p:cNvPr id="19" name="">
-            <a:extLst xmlns:a="http://schemas.openxmlformats.org/drawingml/2006/main">
-              <a:ext uri="{FF2B5EF4-FFF2-40B4-BE49-F238E27FC236}">
-                <a16:creationId xmlns:a16="http://schemas.microsoft.com/office/drawing/2014/main" id="{E4DF2264-694E-428B-A417-092B7F569599}"/>
-              </a:ext>
-            </a:extLst>
-          </p:cNvPr>
-          <p:cNvSpPr>
-            <a:spLocks xmlns:a="http://schemas.openxmlformats.org/drawingml/2006/main" noGrp="1"/>
-          </p:cNvSpPr>
-          <p:nvPr/>
-        </p:nvSpPr>
-        <p:spPr>
-          <a:xfrm xmlns:a="http://schemas.openxmlformats.org/drawingml/2006/main">
-            <a:off x="6496050" y="3886200"/>
-            <a:ext cx="438150" cy="285750"/>
-          </a:xfrm>
-          <a:prstGeom xmlns:a="http://schemas.openxmlformats.org/drawingml/2006/main" prst="rect">
-            <a:avLst/>
-          </a:prstGeom>
-          <a:noFill xmlns:a="http://schemas.openxmlformats.org/drawingml/2006/main"/>
-          <a:ln xmlns:a="http://schemas.openxmlformats.org/drawingml/2006/main" w="0">
-            <a:noFill/>
-            <a:prstDash val="solid"/>
-          </a:ln>
-        </p:spPr>
-        <p:txBody>
-          <a:bodyPr xmlns:a="http://schemas.openxmlformats.org/drawingml/2006/main" anchor="t"/>
-          <a:lstStyle xmlns:a="http://schemas.openxmlformats.org/drawingml/2006/main"/>
-          <a:p xmlns:a="http://schemas.openxmlformats.org/drawingml/2006/main">
-            <a:pPr algn="l">
-              <a:defRPr sz="1350" b="1">
-                <a:solidFill>
-                  <a:srgbClr val="858783"/>
-                </a:solidFill>
-                <a:latin typeface="Helvetica Neue"/>
-                <a:ea typeface="Helvetica Neue"/>
-                <a:cs typeface="Helvetica Neue"/>
-              </a:defRPr>
-            </a:pPr>
-            <a:r>
-              <a:rPr sz="1350" b="1">
-                <a:solidFill>
-                  <a:srgbClr val="858783"/>
-                </a:solidFill>
-                <a:latin typeface="Helvetica Neue"/>
-                <a:ea typeface="Helvetica Neue"/>
-                <a:cs typeface="Helvetica Neue"/>
-              </a:rPr>
-              <a:t>02</a:t>
-            </a:r>
-          </a:p>
-        </p:txBody>
-      </p:sp>
-      <p:sp>
-        <p:nvSpPr>
-          <p:cNvPr id="20" name="">
-            <a:extLst xmlns:a="http://schemas.openxmlformats.org/drawingml/2006/main">
-              <a:ext uri="{FF2B5EF4-FFF2-40B4-BE49-F238E27FC236}">
-                <a16:creationId xmlns:a16="http://schemas.microsoft.com/office/drawing/2014/main" id="{643532BF-6762-4DFA-8B8A-50B61946C5E5}"/>
-              </a:ext>
-            </a:extLst>
-          </p:cNvPr>
-          <p:cNvSpPr>
-            <a:spLocks xmlns:a="http://schemas.openxmlformats.org/drawingml/2006/main" noGrp="1"/>
-          </p:cNvSpPr>
-          <p:nvPr/>
-        </p:nvSpPr>
-        <p:spPr>
-          <a:xfrm xmlns:a="http://schemas.openxmlformats.org/drawingml/2006/main">
-            <a:off x="7086600" y="3867150"/>
-            <a:ext cx="4171950" cy="304800"/>
-          </a:xfrm>
-          <a:prstGeom xmlns:a="http://schemas.openxmlformats.org/drawingml/2006/main" prst="rect">
-            <a:avLst/>
-          </a:prstGeom>
-          <a:noFill xmlns:a="http://schemas.openxmlformats.org/drawingml/2006/main"/>
-          <a:ln xmlns:a="http://schemas.openxmlformats.org/drawingml/2006/main" w="0">
-            <a:noFill/>
-            <a:prstDash val="solid"/>
-          </a:ln>
-        </p:spPr>
-        <p:txBody>
-          <a:bodyPr xmlns:a="http://schemas.openxmlformats.org/drawingml/2006/main" anchor="t"/>
-          <a:lstStyle xmlns:a="http://schemas.openxmlformats.org/drawingml/2006/main"/>
-          <a:p xmlns:a="http://schemas.openxmlformats.org/drawingml/2006/main">
-            <a:pPr algn="l">
-              <a:defRPr sz="1875" b="1">
-                <a:solidFill>
-                  <a:srgbClr val="62656A"/>
-                </a:solidFill>
-                <a:latin typeface="Helvetica Neue"/>
-                <a:ea typeface="Helvetica Neue"/>
-                <a:cs typeface="Helvetica Neue"/>
-              </a:defRPr>
-            </a:pPr>
-            <a:r>
-              <a:rPr sz="1875" b="1">
-                <a:solidFill>
-                  <a:srgbClr val="62656A"/>
-                </a:solidFill>
-                <a:latin typeface="Helvetica Neue"/>
-                <a:ea typeface="Helvetica Neue"/>
-                <a:cs typeface="Helvetica Neue"/>
-              </a:rPr>
-              <a:t>Due dates and priority</a:t>
-            </a:r>
-          </a:p>
-        </p:txBody>
-      </p:sp>
-      <p:sp>
-        <p:nvSpPr>
-          <p:cNvPr id="21" name="">
-            <a:extLst xmlns:a="http://schemas.openxmlformats.org/drawingml/2006/main">
-              <a:ext uri="{FF2B5EF4-FFF2-40B4-BE49-F238E27FC236}">
-                <a16:creationId xmlns:a16="http://schemas.microsoft.com/office/drawing/2014/main" id="{7F1EDAA6-7517-4239-85DF-BBBA402FFA7B}"/>
-              </a:ext>
-            </a:extLst>
-          </p:cNvPr>
-          <p:cNvSpPr>
-            <a:spLocks xmlns:a="http://schemas.openxmlformats.org/drawingml/2006/main" noGrp="1"/>
-          </p:cNvSpPr>
-          <p:nvPr/>
-        </p:nvSpPr>
-        <p:spPr>
-          <a:xfrm xmlns:a="http://schemas.openxmlformats.org/drawingml/2006/main">
-            <a:off x="7086600" y="4248150"/>
-            <a:ext cx="4171950" cy="590550"/>
-          </a:xfrm>
-          <a:prstGeom xmlns:a="http://schemas.openxmlformats.org/drawingml/2006/main" prst="rect">
-            <a:avLst/>
-          </a:prstGeom>
-          <a:noFill xmlns:a="http://schemas.openxmlformats.org/drawingml/2006/main"/>
-          <a:ln xmlns:a="http://schemas.openxmlformats.org/drawingml/2006/main" w="0">
-            <a:noFill/>
-            <a:prstDash val="solid"/>
-          </a:ln>
-        </p:spPr>
-        <p:txBody>
-          <a:bodyPr xmlns:a="http://schemas.openxmlformats.org/drawingml/2006/main" anchor="t"/>
-          <a:lstStyle xmlns:a="http://schemas.openxmlformats.org/drawingml/2006/main"/>
-          <a:p xmlns:a="http://schemas.openxmlformats.org/drawingml/2006/main">
-            <a:pPr algn="l">
-              <a:defRPr sz="1350" b="0">
-                <a:solidFill>
-                  <a:srgbClr val="62656A"/>
-                </a:solidFill>
-                <a:latin typeface="Helvetica Neue"/>
-                <a:ea typeface="Helvetica Neue"/>
-                <a:cs typeface="Helvetica Neue"/>
-              </a:defRPr>
-            </a:pPr>
-            <a:r>
-              <a:rPr sz="1350" b="0">
-                <a:solidFill>
-                  <a:srgbClr val="62656A"/>
-                </a:solidFill>
-                <a:latin typeface="Helvetica Neue"/>
-                <a:ea typeface="Helvetica Neue"/>
-                <a:cs typeface="Helvetica Neue"/>
-              </a:rPr>
-              <a:t>Mentioned as optional, but not needed to prove the core flow.</a:t>
-            </a:r>
-          </a:p>
-        </p:txBody>
-      </p:sp>
-      <p:sp>
-        <p:nvSpPr>
-          <p:cNvPr id="22" name="">
-            <a:extLst xmlns:a="http://schemas.openxmlformats.org/drawingml/2006/main">
-              <a:ext uri="{FF2B5EF4-FFF2-40B4-BE49-F238E27FC236}">
-                <a16:creationId xmlns:a16="http://schemas.microsoft.com/office/drawing/2014/main" id="{35E9206B-2605-4471-B269-8B647149D62A}"/>
-              </a:ext>
-            </a:extLst>
-          </p:cNvPr>
-          <p:cNvSpPr>
-            <a:spLocks xmlns:a="http://schemas.openxmlformats.org/drawingml/2006/main" noGrp="1"/>
-          </p:cNvSpPr>
-          <p:nvPr/>
-        </p:nvSpPr>
-        <p:spPr>
-          <a:xfrm xmlns:a="http://schemas.openxmlformats.org/drawingml/2006/main">
-            <a:off x="6496050" y="5048250"/>
-            <a:ext cx="438150" cy="285750"/>
-          </a:xfrm>
-          <a:prstGeom xmlns:a="http://schemas.openxmlformats.org/drawingml/2006/main" prst="rect">
-            <a:avLst/>
-          </a:prstGeom>
-          <a:noFill xmlns:a="http://schemas.openxmlformats.org/drawingml/2006/main"/>
-          <a:ln xmlns:a="http://schemas.openxmlformats.org/drawingml/2006/main" w="0">
-            <a:noFill/>
-            <a:prstDash val="solid"/>
-          </a:ln>
-        </p:spPr>
-        <p:txBody>
-          <a:bodyPr xmlns:a="http://schemas.openxmlformats.org/drawingml/2006/main" anchor="t"/>
-          <a:lstStyle xmlns:a="http://schemas.openxmlformats.org/drawingml/2006/main"/>
-          <a:p xmlns:a="http://schemas.openxmlformats.org/drawingml/2006/main">
-            <a:pPr algn="l">
-              <a:defRPr sz="1350" b="1">
-                <a:solidFill>
-                  <a:srgbClr val="858783"/>
-                </a:solidFill>
-                <a:latin typeface="Helvetica Neue"/>
-                <a:ea typeface="Helvetica Neue"/>
-                <a:cs typeface="Helvetica Neue"/>
-              </a:defRPr>
-            </a:pPr>
-            <a:r>
-              <a:rPr sz="1350" b="1">
-                <a:solidFill>
-                  <a:srgbClr val="858783"/>
-                </a:solidFill>
-                <a:latin typeface="Helvetica Neue"/>
-                <a:ea typeface="Helvetica Neue"/>
-                <a:cs typeface="Helvetica Neue"/>
-              </a:rPr>
-              <a:t>03</a:t>
-            </a:r>
-          </a:p>
-        </p:txBody>
-      </p:sp>
-      <p:sp>
-        <p:nvSpPr>
-          <p:cNvPr id="23" name="">
-            <a:extLst xmlns:a="http://schemas.openxmlformats.org/drawingml/2006/main">
-              <a:ext uri="{FF2B5EF4-FFF2-40B4-BE49-F238E27FC236}">
-                <a16:creationId xmlns:a16="http://schemas.microsoft.com/office/drawing/2014/main" id="{69D84012-D3D2-497A-8DF7-708544408552}"/>
-              </a:ext>
-            </a:extLst>
-          </p:cNvPr>
-          <p:cNvSpPr>
-            <a:spLocks xmlns:a="http://schemas.openxmlformats.org/drawingml/2006/main" noGrp="1"/>
-          </p:cNvSpPr>
-          <p:nvPr/>
-        </p:nvSpPr>
-        <p:spPr>
-          <a:xfrm xmlns:a="http://schemas.openxmlformats.org/drawingml/2006/main">
-            <a:off x="7086600" y="5029200"/>
-            <a:ext cx="4171950" cy="304800"/>
-          </a:xfrm>
-          <a:prstGeom xmlns:a="http://schemas.openxmlformats.org/drawingml/2006/main" prst="rect">
-            <a:avLst/>
-          </a:prstGeom>
-          <a:noFill xmlns:a="http://schemas.openxmlformats.org/drawingml/2006/main"/>
-          <a:ln xmlns:a="http://schemas.openxmlformats.org/drawingml/2006/main" w="0">
-            <a:noFill/>
-            <a:prstDash val="solid"/>
-          </a:ln>
-        </p:spPr>
-        <p:txBody>
-          <a:bodyPr xmlns:a="http://schemas.openxmlformats.org/drawingml/2006/main" anchor="t"/>
-          <a:lstStyle xmlns:a="http://schemas.openxmlformats.org/drawingml/2006/main"/>
-          <a:p xmlns:a="http://schemas.openxmlformats.org/drawingml/2006/main">
-            <a:pPr algn="l">
-              <a:defRPr sz="1875" b="1">
-                <a:solidFill>
-                  <a:srgbClr val="62656A"/>
-                </a:solidFill>
-                <a:latin typeface="Helvetica Neue"/>
-                <a:ea typeface="Helvetica Neue"/>
-                <a:cs typeface="Helvetica Neue"/>
-              </a:defRPr>
-            </a:pPr>
-            <a:r>
-              <a:rPr sz="1875" b="1">
-                <a:solidFill>
-                  <a:srgbClr val="62656A"/>
-                </a:solidFill>
-                <a:latin typeface="Helvetica Neue"/>
-                <a:ea typeface="Helvetica Neue"/>
-                <a:cs typeface="Helvetica Neue"/>
-              </a:rPr>
-              <a:t>Extra infrastructure</a:t>
-            </a:r>
-          </a:p>
-        </p:txBody>
-      </p:sp>
-      <p:sp>
-        <p:nvSpPr>
-          <p:cNvPr id="24" name="">
-            <a:extLst xmlns:a="http://schemas.openxmlformats.org/drawingml/2006/main">
-              <a:ext uri="{FF2B5EF4-FFF2-40B4-BE49-F238E27FC236}">
-                <a16:creationId xmlns:a16="http://schemas.microsoft.com/office/drawing/2014/main" id="{514E2BD2-858B-4873-9881-66B4BF2576D2}"/>
-              </a:ext>
-            </a:extLst>
-          </p:cNvPr>
-          <p:cNvSpPr>
-            <a:spLocks xmlns:a="http://schemas.openxmlformats.org/drawingml/2006/main" noGrp="1"/>
-          </p:cNvSpPr>
-          <p:nvPr/>
-        </p:nvSpPr>
-        <p:spPr>
-          <a:xfrm xmlns:a="http://schemas.openxmlformats.org/drawingml/2006/main">
-            <a:off x="7086600" y="5410200"/>
-            <a:ext cx="4171950" cy="590550"/>
-          </a:xfrm>
-          <a:prstGeom xmlns:a="http://schemas.openxmlformats.org/drawingml/2006/main" prst="rect">
-            <a:avLst/>
-          </a:prstGeom>
-          <a:noFill xmlns:a="http://schemas.openxmlformats.org/drawingml/2006/main"/>
-          <a:ln xmlns:a="http://schemas.openxmlformats.org/drawingml/2006/main" w="0">
-            <a:noFill/>
-            <a:prstDash val="solid"/>
-          </a:ln>
-        </p:spPr>
-        <p:txBody>
-          <a:bodyPr xmlns:a="http://schemas.openxmlformats.org/drawingml/2006/main" anchor="t"/>
-          <a:lstStyle xmlns:a="http://schemas.openxmlformats.org/drawingml/2006/main"/>
-          <a:p xmlns:a="http://schemas.openxmlformats.org/drawingml/2006/main">
-            <a:pPr algn="l">
-              <a:defRPr sz="1350" b="0">
-                <a:solidFill>
-                  <a:srgbClr val="62656A"/>
-                </a:solidFill>
-                <a:latin typeface="Helvetica Neue"/>
-                <a:ea typeface="Helvetica Neue"/>
-                <a:cs typeface="Helvetica Neue"/>
-              </a:defRPr>
-            </a:pPr>
-            <a:r>
-              <a:rPr sz="1350" b="0">
-                <a:solidFill>
-                  <a:srgbClr val="62656A"/>
-                </a:solidFill>
-                <a:latin typeface="Helvetica Neue"/>
-                <a:ea typeface="Helvetica Neue"/>
-                <a:cs typeface="Helvetica Neue"/>
-              </a:rPr>
-              <a:t>No speculative services, state library, or delete workflow.</a:t>
-            </a:r>
-          </a:p>
-        </p:txBody>
-      </p:sp>
+      <p:pic xmlns:a="http://schemas.openxmlformats.org/drawingml/2006/main" xmlns:r="http://schemas.openxmlformats.org/officeDocument/2006/relationships">
+        <p:nvPicPr>
+          <p:cNvPr id="11" name="Spark Task Tracker demo video">
+            <a:hlinkClick r:id="" action="ppaction://media"/>
+          </p:cNvPr>
+          <p:cNvPicPr>
+            <a:picLocks noChangeAspect="1"/>
+          </p:cNvPicPr>
+          <p:nvPr>
+            <a:videoFile r:link="rId5"/>
+            <p:extLst>
+              <p:ext uri="{DAA4B4D4-6D71-4841-9C94-3DE7FCFB9230}">
+                <p14:media xmlns:p14="http://schemas.microsoft.com/office/powerpoint/2010/main" r:embed="rId4"/>
+              </p:ext>
+            </p:extLst>
+          </p:nvPr>
+        </p:nvPicPr>
+        <p:blipFill>
+          <a:blip r:embed="R5a5960fd13584218"/>
+          <a:stretch>
+            <a:fillRect/>
+          </a:stretch>
+        </p:blipFill>
+        <p:spPr>
+          <a:xfrm>
+            <a:off x="1885950" y="1771650"/>
+            <a:ext cx="8420100" cy="4648200"/>
+          </a:xfrm>
+          <a:prstGeom prst="rect">
+            <a:avLst/>
+          </a:prstGeom>
+        </p:spPr>
+      </p:pic>
     </p:spTree>
     <p:extLst>
       <p:ext uri="{BB962C8B-B14F-4D97-AF65-F5344CB8AC3E}">
-        <p14:creationId xmlns:p14="http://schemas.microsoft.com/office/powerpoint/2010/main" val="2071400373"/>
+        <p14:creationId xmlns:p14="http://schemas.microsoft.com/office/powerpoint/2010/main" val="1190883669"/>
       </p:ext>
     </p:extLst>
   </p:cSld>
+  <p:timing>
+    <p:tnLst>
+      <p:par>
+        <p:cTn id="1" dur="indefinite" restart="never" nodeType="tmRoot">
+          <p:childTnLst>
+            <p:video>
+              <p:cMediaNode vol="80000">
+                <p:cTn id="2" fill="hold" display="0">
+                  <p:stCondLst>
+                    <p:cond delay="indefinite"/>
+                  </p:stCondLst>
+                </p:cTn>
+                <p:tgtEl>
+                  <p:spTgt spid="11"/>
+                </p:tgtEl>
+              </p:cMediaNode>
+            </p:video>
+          </p:childTnLst>
+        </p:cTn>
+      </p:par>
+    </p:tnLst>
+  </p:timing>
 </p:sld>
 </file>
 
@@ -4145,10 +3271,10 @@
       </p:grpSpPr>
       <p:sp>
         <p:nvSpPr>
-          <p:cNvPr id="25" name="slide-4-title">
-            <a:extLst xmlns:a="http://schemas.openxmlformats.org/drawingml/2006/main">
-              <a:ext uri="{FF2B5EF4-FFF2-40B4-BE49-F238E27FC236}">
-                <a16:creationId xmlns:a16="http://schemas.microsoft.com/office/drawing/2014/main" id="{68448ACC-40DD-46E4-9EED-803F6932AE19}"/>
+          <p:cNvPr id="25" name="slide-3-title">
+            <a:extLst xmlns:a="http://schemas.openxmlformats.org/drawingml/2006/main">
+              <a:ext uri="{FF2B5EF4-FFF2-40B4-BE49-F238E27FC236}">
+                <a16:creationId xmlns:a16="http://schemas.microsoft.com/office/drawing/2014/main" id="{FF1714A1-5A57-43F3-BABA-D237E63EF147}"/>
               </a:ext>
             </a:extLst>
           </p:cNvPr>
@@ -4176,6 +3302,7 @@
           <a:lstStyle xmlns:a="http://schemas.openxmlformats.org/drawingml/2006/main"/>
           <a:p xmlns:a="http://schemas.openxmlformats.org/drawingml/2006/main">
             <a:pPr algn="l">
+              <a:buNone/>
               <a:defRPr sz="3150" b="1">
                 <a:solidFill>
                   <a:srgbClr val="202124"/>
@@ -4194,7 +3321,7 @@
                 <a:ea typeface="Helvetica Neue"/>
                 <a:cs typeface="Helvetica Neue"/>
               </a:rPr>
-              <a:t>Clear boundaries keep changes local.</a:t>
+              <a:t>Scope discipline keeps the product simple.</a:t>
             </a:r>
           </a:p>
         </p:txBody>
@@ -4204,7 +3331,7 @@
           <p:cNvPr id="2" name="">
             <a:extLst xmlns:a="http://schemas.openxmlformats.org/drawingml/2006/main">
               <a:ext uri="{FF2B5EF4-FFF2-40B4-BE49-F238E27FC236}">
-                <a16:creationId xmlns:a16="http://schemas.microsoft.com/office/drawing/2014/main" id="{7E72E872-9357-48F1-8BB0-0864ECA45F3E}"/>
+                <a16:creationId xmlns:a16="http://schemas.microsoft.com/office/drawing/2014/main" id="{FC2287AD-960B-463B-AEEB-F82871BFA775}"/>
               </a:ext>
             </a:extLst>
           </p:cNvPr>
@@ -4232,10 +3359,10 @@
       </p:sp>
       <p:sp>
         <p:nvSpPr>
-          <p:cNvPr id="3" name="slide-4-number">
-            <a:extLst xmlns:a="http://schemas.openxmlformats.org/drawingml/2006/main">
-              <a:ext uri="{FF2B5EF4-FFF2-40B4-BE49-F238E27FC236}">
-                <a16:creationId xmlns:a16="http://schemas.microsoft.com/office/drawing/2014/main" id="{61F90328-B5EF-4ED6-8FEF-669B333AD3CD}"/>
+          <p:cNvPr id="3" name="slide-3-number">
+            <a:extLst xmlns:a="http://schemas.openxmlformats.org/drawingml/2006/main">
+              <a:ext uri="{FF2B5EF4-FFF2-40B4-BE49-F238E27FC236}">
+                <a16:creationId xmlns:a16="http://schemas.microsoft.com/office/drawing/2014/main" id="{256E8E9A-23F4-4A75-83E7-90BC50711977}"/>
               </a:ext>
             </a:extLst>
           </p:cNvPr>
@@ -4263,6 +3390,7 @@
           <a:lstStyle xmlns:a="http://schemas.openxmlformats.org/drawingml/2006/main"/>
           <a:p xmlns:a="http://schemas.openxmlformats.org/drawingml/2006/main">
             <a:pPr algn="r">
+              <a:buNone/>
               <a:defRPr sz="1050" b="0">
                 <a:solidFill>
                   <a:srgbClr val="62656A"/>
@@ -4291,19 +3419,19 @@
           <p:cNvPr id="4" name="">
             <a:extLst xmlns:a="http://schemas.openxmlformats.org/drawingml/2006/main">
               <a:ext uri="{FF2B5EF4-FFF2-40B4-BE49-F238E27FC236}">
-                <a16:creationId xmlns:a16="http://schemas.microsoft.com/office/drawing/2014/main" id="{7AEAD698-8957-42BF-9179-82B4599331AA}"/>
-              </a:ext>
-            </a:extLst>
-          </p:cNvPr>
-          <p:cNvSpPr>
-            <a:spLocks xmlns:a="http://schemas.openxmlformats.org/drawingml/2006/main" noGrp="1"/>
-          </p:cNvSpPr>
-          <p:nvPr/>
-        </p:nvSpPr>
-        <p:spPr>
-          <a:xfrm xmlns:a="http://schemas.openxmlformats.org/drawingml/2006/main">
-            <a:off x="685800" y="1676400"/>
-            <a:ext cx="9906000" cy="361950"/>
+                <a16:creationId xmlns:a16="http://schemas.microsoft.com/office/drawing/2014/main" id="{6572D6B6-A317-4D60-85E0-8085F5594E83}"/>
+              </a:ext>
+            </a:extLst>
+          </p:cNvPr>
+          <p:cNvSpPr>
+            <a:spLocks xmlns:a="http://schemas.openxmlformats.org/drawingml/2006/main" noGrp="1"/>
+          </p:cNvSpPr>
+          <p:nvPr/>
+        </p:nvSpPr>
+        <p:spPr>
+          <a:xfrm xmlns:a="http://schemas.openxmlformats.org/drawingml/2006/main">
+            <a:off x="685800" y="2000250"/>
+            <a:ext cx="4572000" cy="400050"/>
           </a:xfrm>
           <a:prstGeom xmlns:a="http://schemas.openxmlformats.org/drawingml/2006/main" prst="rect">
             <a:avLst/>
@@ -4319,172 +3447,678 @@
           <a:lstStyle xmlns:a="http://schemas.openxmlformats.org/drawingml/2006/main"/>
           <a:p xmlns:a="http://schemas.openxmlformats.org/drawingml/2006/main">
             <a:pPr algn="l">
-              <a:defRPr sz="1650" b="0">
-                <a:solidFill>
-                  <a:srgbClr val="62656A"/>
-                </a:solidFill>
-                <a:latin typeface="Helvetica Neue"/>
-                <a:ea typeface="Helvetica Neue"/>
-                <a:cs typeface="Helvetica Neue"/>
-              </a:defRPr>
-            </a:pPr>
-            <a:r>
-              <a:rPr sz="1650" b="0">
-                <a:solidFill>
-                  <a:srgbClr val="62656A"/>
-                </a:solidFill>
-                <a:latin typeface="Helvetica Neue"/>
-                <a:ea typeface="Helvetica Neue"/>
-                <a:cs typeface="Helvetica Neue"/>
-              </a:rPr>
-              <a:t>Each layer has one job, and every boundary is replaceable without rewriting the rest.</a:t>
-            </a:r>
-          </a:p>
-        </p:txBody>
-      </p:sp>
-      <p:cxnSp>
-        <p:nvCxnSpPr>
-          <p:cNvPr id="29" name=""/>
-          <p:cNvCxnSpPr/>
-          <p:nvPr/>
-        </p:nvCxnSpPr>
-        <p:spPr>
-          <a:xfrm xmlns:a="http://schemas.openxmlformats.org/drawingml/2006/main">
-            <a:off x="2114550" y="3400425"/>
-            <a:ext cx="1524000" cy="0"/>
-          </a:xfrm>
-          <a:prstGeom xmlns:a="http://schemas.openxmlformats.org/drawingml/2006/main" prst="straightConnector1">
-            <a:avLst/>
-          </a:prstGeom>
-          <a:ln xmlns:a="http://schemas.openxmlformats.org/drawingml/2006/main" w="28575">
-            <a:solidFill>
-              <a:srgbClr val="D4D4D0"/>
-            </a:solidFill>
-            <a:prstDash val="solid"/>
-          </a:ln>
-        </p:spPr>
-      </p:cxnSp>
-      <p:cxnSp>
-        <p:nvCxnSpPr>
-          <p:cNvPr id="30" name=""/>
-          <p:cNvCxnSpPr/>
-          <p:nvPr/>
-        </p:nvCxnSpPr>
-        <p:spPr>
-          <a:xfrm xmlns:a="http://schemas.openxmlformats.org/drawingml/2006/main">
-            <a:off x="4781550" y="3400425"/>
-            <a:ext cx="1524000" cy="0"/>
-          </a:xfrm>
-          <a:prstGeom xmlns:a="http://schemas.openxmlformats.org/drawingml/2006/main" prst="straightConnector1">
-            <a:avLst/>
-          </a:prstGeom>
-          <a:ln xmlns:a="http://schemas.openxmlformats.org/drawingml/2006/main" w="28575">
-            <a:solidFill>
-              <a:srgbClr val="D4D4D0"/>
-            </a:solidFill>
-            <a:prstDash val="solid"/>
-          </a:ln>
-        </p:spPr>
-      </p:cxnSp>
-      <p:cxnSp>
-        <p:nvCxnSpPr>
-          <p:cNvPr id="31" name=""/>
-          <p:cNvCxnSpPr/>
-          <p:nvPr/>
-        </p:nvCxnSpPr>
-        <p:spPr>
-          <a:xfrm xmlns:a="http://schemas.openxmlformats.org/drawingml/2006/main">
-            <a:off x="7448550" y="3400425"/>
-            <a:ext cx="1524000" cy="0"/>
-          </a:xfrm>
-          <a:prstGeom xmlns:a="http://schemas.openxmlformats.org/drawingml/2006/main" prst="straightConnector1">
-            <a:avLst/>
-          </a:prstGeom>
-          <a:ln xmlns:a="http://schemas.openxmlformats.org/drawingml/2006/main" w="28575">
-            <a:solidFill>
-              <a:srgbClr val="D4D4D0"/>
-            </a:solidFill>
-            <a:prstDash val="solid"/>
-          </a:ln>
-        </p:spPr>
-      </p:cxnSp>
+              <a:buNone/>
+              <a:defRPr sz="2100" b="1">
+                <a:solidFill>
+                  <a:srgbClr val="B64F00"/>
+                </a:solidFill>
+                <a:latin typeface="Helvetica Neue"/>
+                <a:ea typeface="Helvetica Neue"/>
+                <a:cs typeface="Helvetica Neue"/>
+              </a:defRPr>
+            </a:pPr>
+            <a:r>
+              <a:rPr sz="2100" b="1">
+                <a:solidFill>
+                  <a:srgbClr val="B64F00"/>
+                </a:solidFill>
+                <a:latin typeface="Helvetica Neue"/>
+                <a:ea typeface="Helvetica Neue"/>
+                <a:cs typeface="Helvetica Neue"/>
+              </a:rPr>
+              <a:t>Included</a:t>
+            </a:r>
+          </a:p>
+        </p:txBody>
+      </p:sp>
+      <p:sp>
+        <p:nvSpPr>
+          <p:cNvPr id="5" name="">
+            <a:extLst xmlns:a="http://schemas.openxmlformats.org/drawingml/2006/main">
+              <a:ext uri="{FF2B5EF4-FFF2-40B4-BE49-F238E27FC236}">
+                <a16:creationId xmlns:a16="http://schemas.microsoft.com/office/drawing/2014/main" id="{FA671628-20D0-43F3-91B7-2699500D3FE9}"/>
+              </a:ext>
+            </a:extLst>
+          </p:cNvPr>
+          <p:cNvSpPr>
+            <a:spLocks xmlns:a="http://schemas.openxmlformats.org/drawingml/2006/main" noGrp="1"/>
+          </p:cNvSpPr>
+          <p:nvPr/>
+        </p:nvSpPr>
+        <p:spPr>
+          <a:xfrm xmlns:a="http://schemas.openxmlformats.org/drawingml/2006/main">
+            <a:off x="6496050" y="2000250"/>
+            <a:ext cx="4953000" cy="400050"/>
+          </a:xfrm>
+          <a:prstGeom xmlns:a="http://schemas.openxmlformats.org/drawingml/2006/main" prst="rect">
+            <a:avLst/>
+          </a:prstGeom>
+          <a:noFill xmlns:a="http://schemas.openxmlformats.org/drawingml/2006/main"/>
+          <a:ln xmlns:a="http://schemas.openxmlformats.org/drawingml/2006/main" w="0">
+            <a:noFill/>
+            <a:prstDash val="solid"/>
+          </a:ln>
+        </p:spPr>
+        <p:txBody>
+          <a:bodyPr xmlns:a="http://schemas.openxmlformats.org/drawingml/2006/main" anchor="t"/>
+          <a:lstStyle xmlns:a="http://schemas.openxmlformats.org/drawingml/2006/main"/>
+          <a:p xmlns:a="http://schemas.openxmlformats.org/drawingml/2006/main">
+            <a:pPr algn="l">
+              <a:buNone/>
+              <a:defRPr sz="2100" b="1">
+                <a:solidFill>
+                  <a:srgbClr val="62656A"/>
+                </a:solidFill>
+                <a:latin typeface="Helvetica Neue"/>
+                <a:ea typeface="Helvetica Neue"/>
+                <a:cs typeface="Helvetica Neue"/>
+              </a:defRPr>
+            </a:pPr>
+            <a:r>
+              <a:rPr sz="2100" b="1">
+                <a:solidFill>
+                  <a:srgbClr val="62656A"/>
+                </a:solidFill>
+                <a:latin typeface="Helvetica Neue"/>
+                <a:ea typeface="Helvetica Neue"/>
+                <a:cs typeface="Helvetica Neue"/>
+              </a:rPr>
+              <a:t>Intentionally excluded</a:t>
+            </a:r>
+          </a:p>
+        </p:txBody>
+      </p:sp>
+      <p:sp>
+        <p:nvSpPr>
+          <p:cNvPr id="6" name="">
+            <a:extLst xmlns:a="http://schemas.openxmlformats.org/drawingml/2006/main">
+              <a:ext uri="{FF2B5EF4-FFF2-40B4-BE49-F238E27FC236}">
+                <a16:creationId xmlns:a16="http://schemas.microsoft.com/office/drawing/2014/main" id="{3C250B21-86F8-4203-A83A-D45AF4696B1C}"/>
+              </a:ext>
+            </a:extLst>
+          </p:cNvPr>
+          <p:cNvSpPr>
+            <a:spLocks xmlns:a="http://schemas.openxmlformats.org/drawingml/2006/main" noGrp="1"/>
+          </p:cNvSpPr>
+          <p:nvPr/>
+        </p:nvSpPr>
+        <p:spPr>
+          <a:xfrm xmlns:a="http://schemas.openxmlformats.org/drawingml/2006/main">
+            <a:off x="6096000" y="1885950"/>
+            <a:ext cx="19050" cy="3810000"/>
+          </a:xfrm>
+          <a:prstGeom xmlns:a="http://schemas.openxmlformats.org/drawingml/2006/main" prst="rect">
+            <a:avLst/>
+          </a:prstGeom>
+          <a:solidFill xmlns:a="http://schemas.openxmlformats.org/drawingml/2006/main">
+            <a:srgbClr val="D4D4D0"/>
+          </a:solidFill>
+          <a:ln xmlns:a="http://schemas.openxmlformats.org/drawingml/2006/main" w="0">
+            <a:noFill/>
+            <a:prstDash val="solid"/>
+          </a:ln>
+        </p:spPr>
+      </p:sp>
+      <p:sp>
+        <p:nvSpPr>
+          <p:cNvPr id="7" name="">
+            <a:extLst xmlns:a="http://schemas.openxmlformats.org/drawingml/2006/main">
+              <a:ext uri="{FF2B5EF4-FFF2-40B4-BE49-F238E27FC236}">
+                <a16:creationId xmlns:a16="http://schemas.microsoft.com/office/drawing/2014/main" id="{DBB6397F-0213-4888-8BA6-A8AC90822B65}"/>
+              </a:ext>
+            </a:extLst>
+          </p:cNvPr>
+          <p:cNvSpPr>
+            <a:spLocks xmlns:a="http://schemas.openxmlformats.org/drawingml/2006/main" noGrp="1"/>
+          </p:cNvSpPr>
+          <p:nvPr/>
+        </p:nvSpPr>
+        <p:spPr>
+          <a:xfrm xmlns:a="http://schemas.openxmlformats.org/drawingml/2006/main">
+            <a:off x="685800" y="2724150"/>
+            <a:ext cx="438150" cy="285750"/>
+          </a:xfrm>
+          <a:prstGeom xmlns:a="http://schemas.openxmlformats.org/drawingml/2006/main" prst="rect">
+            <a:avLst/>
+          </a:prstGeom>
+          <a:noFill xmlns:a="http://schemas.openxmlformats.org/drawingml/2006/main"/>
+          <a:ln xmlns:a="http://schemas.openxmlformats.org/drawingml/2006/main" w="0">
+            <a:noFill/>
+            <a:prstDash val="solid"/>
+          </a:ln>
+        </p:spPr>
+        <p:txBody>
+          <a:bodyPr xmlns:a="http://schemas.openxmlformats.org/drawingml/2006/main" anchor="t"/>
+          <a:lstStyle xmlns:a="http://schemas.openxmlformats.org/drawingml/2006/main"/>
+          <a:p xmlns:a="http://schemas.openxmlformats.org/drawingml/2006/main">
+            <a:pPr algn="l">
+              <a:buNone/>
+              <a:defRPr sz="1350" b="1">
+                <a:solidFill>
+                  <a:srgbClr val="FF7A00"/>
+                </a:solidFill>
+                <a:latin typeface="Helvetica Neue"/>
+                <a:ea typeface="Helvetica Neue"/>
+                <a:cs typeface="Helvetica Neue"/>
+              </a:defRPr>
+            </a:pPr>
+            <a:r>
+              <a:rPr sz="1350" b="1">
+                <a:solidFill>
+                  <a:srgbClr val="FF7A00"/>
+                </a:solidFill>
+                <a:latin typeface="Helvetica Neue"/>
+                <a:ea typeface="Helvetica Neue"/>
+                <a:cs typeface="Helvetica Neue"/>
+              </a:rPr>
+              <a:t>01</a:t>
+            </a:r>
+          </a:p>
+        </p:txBody>
+      </p:sp>
       <p:sp>
         <p:nvSpPr>
           <p:cNvPr id="8" name="">
             <a:extLst xmlns:a="http://schemas.openxmlformats.org/drawingml/2006/main">
               <a:ext uri="{FF2B5EF4-FFF2-40B4-BE49-F238E27FC236}">
-                <a16:creationId xmlns:a16="http://schemas.microsoft.com/office/drawing/2014/main" id="{357A9562-5053-40E1-8287-78FCC2076FF3}"/>
-              </a:ext>
-            </a:extLst>
-          </p:cNvPr>
-          <p:cNvSpPr>
-            <a:spLocks xmlns:a="http://schemas.openxmlformats.org/drawingml/2006/main" noGrp="1"/>
-          </p:cNvSpPr>
-          <p:nvPr/>
-        </p:nvSpPr>
-        <p:spPr>
-          <a:xfrm xmlns:a="http://schemas.openxmlformats.org/drawingml/2006/main">
-            <a:off x="971550" y="3162300"/>
-            <a:ext cx="476250" cy="476250"/>
-          </a:xfrm>
-          <a:prstGeom xmlns:a="http://schemas.openxmlformats.org/drawingml/2006/main" prst="ellipse">
-            <a:avLst/>
-          </a:prstGeom>
-          <a:solidFill xmlns:a="http://schemas.openxmlformats.org/drawingml/2006/main">
-            <a:srgbClr val="202124"/>
-          </a:solidFill>
-          <a:ln xmlns:a="http://schemas.openxmlformats.org/drawingml/2006/main" w="0">
-            <a:noFill/>
-            <a:prstDash val="solid"/>
-          </a:ln>
-        </p:spPr>
+                <a16:creationId xmlns:a16="http://schemas.microsoft.com/office/drawing/2014/main" id="{5ECEE9F2-1517-436F-B31B-AE358B871E43}"/>
+              </a:ext>
+            </a:extLst>
+          </p:cNvPr>
+          <p:cNvSpPr>
+            <a:spLocks xmlns:a="http://schemas.openxmlformats.org/drawingml/2006/main" noGrp="1"/>
+          </p:cNvSpPr>
+          <p:nvPr/>
+        </p:nvSpPr>
+        <p:spPr>
+          <a:xfrm xmlns:a="http://schemas.openxmlformats.org/drawingml/2006/main">
+            <a:off x="1276350" y="2705100"/>
+            <a:ext cx="4171950" cy="304800"/>
+          </a:xfrm>
+          <a:prstGeom xmlns:a="http://schemas.openxmlformats.org/drawingml/2006/main" prst="rect">
+            <a:avLst/>
+          </a:prstGeom>
+          <a:noFill xmlns:a="http://schemas.openxmlformats.org/drawingml/2006/main"/>
+          <a:ln xmlns:a="http://schemas.openxmlformats.org/drawingml/2006/main" w="0">
+            <a:noFill/>
+            <a:prstDash val="solid"/>
+          </a:ln>
+        </p:spPr>
+        <p:txBody>
+          <a:bodyPr xmlns:a="http://schemas.openxmlformats.org/drawingml/2006/main" anchor="t"/>
+          <a:lstStyle xmlns:a="http://schemas.openxmlformats.org/drawingml/2006/main"/>
+          <a:p xmlns:a="http://schemas.openxmlformats.org/drawingml/2006/main">
+            <a:pPr algn="l">
+              <a:buNone/>
+              <a:defRPr sz="1875" b="1">
+                <a:solidFill>
+                  <a:srgbClr val="202124"/>
+                </a:solidFill>
+                <a:latin typeface="Helvetica Neue"/>
+                <a:ea typeface="Helvetica Neue"/>
+                <a:cs typeface="Helvetica Neue"/>
+              </a:defRPr>
+            </a:pPr>
+            <a:r>
+              <a:rPr sz="1875" b="1">
+                <a:solidFill>
+                  <a:srgbClr val="202124"/>
+                </a:solidFill>
+                <a:latin typeface="Helvetica Neue"/>
+                <a:ea typeface="Helvetica Neue"/>
+                <a:cs typeface="Helvetica Neue"/>
+              </a:rPr>
+              <a:t>Persistent CRUD subset</a:t>
+            </a:r>
+          </a:p>
+        </p:txBody>
       </p:sp>
       <p:sp>
         <p:nvSpPr>
           <p:cNvPr id="9" name="">
             <a:extLst xmlns:a="http://schemas.openxmlformats.org/drawingml/2006/main">
               <a:ext uri="{FF2B5EF4-FFF2-40B4-BE49-F238E27FC236}">
-                <a16:creationId xmlns:a16="http://schemas.microsoft.com/office/drawing/2014/main" id="{818A17E5-AE69-4729-9CD4-87ED8582B3E8}"/>
-              </a:ext>
-            </a:extLst>
-          </p:cNvPr>
-          <p:cNvSpPr>
-            <a:spLocks xmlns:a="http://schemas.openxmlformats.org/drawingml/2006/main" noGrp="1"/>
-          </p:cNvSpPr>
-          <p:nvPr/>
-        </p:nvSpPr>
-        <p:spPr>
-          <a:xfrm xmlns:a="http://schemas.openxmlformats.org/drawingml/2006/main">
-            <a:off x="971550" y="3267075"/>
-            <a:ext cx="476250" cy="228600"/>
-          </a:xfrm>
-          <a:prstGeom xmlns:a="http://schemas.openxmlformats.org/drawingml/2006/main" prst="rect">
-            <a:avLst/>
-          </a:prstGeom>
-          <a:noFill xmlns:a="http://schemas.openxmlformats.org/drawingml/2006/main"/>
-          <a:ln xmlns:a="http://schemas.openxmlformats.org/drawingml/2006/main" w="0">
-            <a:noFill/>
-            <a:prstDash val="solid"/>
-          </a:ln>
-        </p:spPr>
-        <p:txBody>
-          <a:bodyPr xmlns:a="http://schemas.openxmlformats.org/drawingml/2006/main" anchor="ctr"/>
-          <a:lstStyle xmlns:a="http://schemas.openxmlformats.org/drawingml/2006/main"/>
-          <a:p xmlns:a="http://schemas.openxmlformats.org/drawingml/2006/main">
-            <a:pPr algn="ctr">
-              <a:defRPr sz="1125" b="1">
-                <a:solidFill>
-                  <a:srgbClr val="FFFFFF"/>
-                </a:solidFill>
-                <a:latin typeface="Helvetica Neue"/>
-                <a:ea typeface="Helvetica Neue"/>
-                <a:cs typeface="Helvetica Neue"/>
-              </a:defRPr>
-            </a:pPr>
-            <a:r>
-              <a:rPr sz="1125" b="1">
-                <a:solidFill>
-                  <a:srgbClr val="FFFFFF"/>
+                <a16:creationId xmlns:a16="http://schemas.microsoft.com/office/drawing/2014/main" id="{A6D9C579-3E1F-4145-908C-76AFBF10E6E3}"/>
+              </a:ext>
+            </a:extLst>
+          </p:cNvPr>
+          <p:cNvSpPr>
+            <a:spLocks xmlns:a="http://schemas.openxmlformats.org/drawingml/2006/main" noGrp="1"/>
+          </p:cNvSpPr>
+          <p:nvPr/>
+        </p:nvSpPr>
+        <p:spPr>
+          <a:xfrm xmlns:a="http://schemas.openxmlformats.org/drawingml/2006/main">
+            <a:off x="1276350" y="3086100"/>
+            <a:ext cx="4171950" cy="590550"/>
+          </a:xfrm>
+          <a:prstGeom xmlns:a="http://schemas.openxmlformats.org/drawingml/2006/main" prst="rect">
+            <a:avLst/>
+          </a:prstGeom>
+          <a:noFill xmlns:a="http://schemas.openxmlformats.org/drawingml/2006/main"/>
+          <a:ln xmlns:a="http://schemas.openxmlformats.org/drawingml/2006/main" w="0">
+            <a:noFill/>
+            <a:prstDash val="solid"/>
+          </a:ln>
+        </p:spPr>
+        <p:txBody>
+          <a:bodyPr xmlns:a="http://schemas.openxmlformats.org/drawingml/2006/main" anchor="t"/>
+          <a:lstStyle xmlns:a="http://schemas.openxmlformats.org/drawingml/2006/main"/>
+          <a:p xmlns:a="http://schemas.openxmlformats.org/drawingml/2006/main">
+            <a:pPr algn="l">
+              <a:buNone/>
+              <a:defRPr sz="1350" b="0">
+                <a:solidFill>
+                  <a:srgbClr val="62656A"/>
+                </a:solidFill>
+                <a:latin typeface="Helvetica Neue"/>
+                <a:ea typeface="Helvetica Neue"/>
+                <a:cs typeface="Helvetica Neue"/>
+              </a:defRPr>
+            </a:pPr>
+            <a:r>
+              <a:rPr sz="1350" b="0">
+                <a:solidFill>
+                  <a:srgbClr val="62656A"/>
+                </a:solidFill>
+                <a:latin typeface="Helvetica Neue"/>
+                <a:ea typeface="Helvetica Neue"/>
+                <a:cs typeface="Helvetica Neue"/>
+              </a:rPr>
+              <a:t>Create and update only - deletion was not requested.</a:t>
+            </a:r>
+          </a:p>
+        </p:txBody>
+      </p:sp>
+      <p:sp>
+        <p:nvSpPr>
+          <p:cNvPr id="10" name="">
+            <a:extLst xmlns:a="http://schemas.openxmlformats.org/drawingml/2006/main">
+              <a:ext uri="{FF2B5EF4-FFF2-40B4-BE49-F238E27FC236}">
+                <a16:creationId xmlns:a16="http://schemas.microsoft.com/office/drawing/2014/main" id="{8CF903E5-3152-4D51-B7FB-6BD8B3F10507}"/>
+              </a:ext>
+            </a:extLst>
+          </p:cNvPr>
+          <p:cNvSpPr>
+            <a:spLocks xmlns:a="http://schemas.openxmlformats.org/drawingml/2006/main" noGrp="1"/>
+          </p:cNvSpPr>
+          <p:nvPr/>
+        </p:nvSpPr>
+        <p:spPr>
+          <a:xfrm xmlns:a="http://schemas.openxmlformats.org/drawingml/2006/main">
+            <a:off x="685800" y="3886200"/>
+            <a:ext cx="438150" cy="285750"/>
+          </a:xfrm>
+          <a:prstGeom xmlns:a="http://schemas.openxmlformats.org/drawingml/2006/main" prst="rect">
+            <a:avLst/>
+          </a:prstGeom>
+          <a:noFill xmlns:a="http://schemas.openxmlformats.org/drawingml/2006/main"/>
+          <a:ln xmlns:a="http://schemas.openxmlformats.org/drawingml/2006/main" w="0">
+            <a:noFill/>
+            <a:prstDash val="solid"/>
+          </a:ln>
+        </p:spPr>
+        <p:txBody>
+          <a:bodyPr xmlns:a="http://schemas.openxmlformats.org/drawingml/2006/main" anchor="t"/>
+          <a:lstStyle xmlns:a="http://schemas.openxmlformats.org/drawingml/2006/main"/>
+          <a:p xmlns:a="http://schemas.openxmlformats.org/drawingml/2006/main">
+            <a:pPr algn="l">
+              <a:buNone/>
+              <a:defRPr sz="1350" b="1">
+                <a:solidFill>
+                  <a:srgbClr val="FF7A00"/>
+                </a:solidFill>
+                <a:latin typeface="Helvetica Neue"/>
+                <a:ea typeface="Helvetica Neue"/>
+                <a:cs typeface="Helvetica Neue"/>
+              </a:defRPr>
+            </a:pPr>
+            <a:r>
+              <a:rPr sz="1350" b="1">
+                <a:solidFill>
+                  <a:srgbClr val="FF7A00"/>
+                </a:solidFill>
+                <a:latin typeface="Helvetica Neue"/>
+                <a:ea typeface="Helvetica Neue"/>
+                <a:cs typeface="Helvetica Neue"/>
+              </a:rPr>
+              <a:t>02</a:t>
+            </a:r>
+          </a:p>
+        </p:txBody>
+      </p:sp>
+      <p:sp>
+        <p:nvSpPr>
+          <p:cNvPr id="11" name="">
+            <a:extLst xmlns:a="http://schemas.openxmlformats.org/drawingml/2006/main">
+              <a:ext uri="{FF2B5EF4-FFF2-40B4-BE49-F238E27FC236}">
+                <a16:creationId xmlns:a16="http://schemas.microsoft.com/office/drawing/2014/main" id="{211D9B73-A7E8-4B31-9F83-3F4FA92BD52E}"/>
+              </a:ext>
+            </a:extLst>
+          </p:cNvPr>
+          <p:cNvSpPr>
+            <a:spLocks xmlns:a="http://schemas.openxmlformats.org/drawingml/2006/main" noGrp="1"/>
+          </p:cNvSpPr>
+          <p:nvPr/>
+        </p:nvSpPr>
+        <p:spPr>
+          <a:xfrm xmlns:a="http://schemas.openxmlformats.org/drawingml/2006/main">
+            <a:off x="1276350" y="3867150"/>
+            <a:ext cx="4171950" cy="304800"/>
+          </a:xfrm>
+          <a:prstGeom xmlns:a="http://schemas.openxmlformats.org/drawingml/2006/main" prst="rect">
+            <a:avLst/>
+          </a:prstGeom>
+          <a:noFill xmlns:a="http://schemas.openxmlformats.org/drawingml/2006/main"/>
+          <a:ln xmlns:a="http://schemas.openxmlformats.org/drawingml/2006/main" w="0">
+            <a:noFill/>
+            <a:prstDash val="solid"/>
+          </a:ln>
+        </p:spPr>
+        <p:txBody>
+          <a:bodyPr xmlns:a="http://schemas.openxmlformats.org/drawingml/2006/main" anchor="t"/>
+          <a:lstStyle xmlns:a="http://schemas.openxmlformats.org/drawingml/2006/main"/>
+          <a:p xmlns:a="http://schemas.openxmlformats.org/drawingml/2006/main">
+            <a:pPr algn="l">
+              <a:buNone/>
+              <a:defRPr sz="1875" b="1">
+                <a:solidFill>
+                  <a:srgbClr val="202124"/>
+                </a:solidFill>
+                <a:latin typeface="Helvetica Neue"/>
+                <a:ea typeface="Helvetica Neue"/>
+                <a:cs typeface="Helvetica Neue"/>
+              </a:defRPr>
+            </a:pPr>
+            <a:r>
+              <a:rPr sz="1875" b="1">
+                <a:solidFill>
+                  <a:srgbClr val="202124"/>
+                </a:solidFill>
+                <a:latin typeface="Helvetica Neue"/>
+                <a:ea typeface="Helvetica Neue"/>
+                <a:cs typeface="Helvetica Neue"/>
+              </a:rPr>
+              <a:t>One practical bonus</a:t>
+            </a:r>
+          </a:p>
+        </p:txBody>
+      </p:sp>
+      <p:sp>
+        <p:nvSpPr>
+          <p:cNvPr id="12" name="">
+            <a:extLst xmlns:a="http://schemas.openxmlformats.org/drawingml/2006/main">
+              <a:ext uri="{FF2B5EF4-FFF2-40B4-BE49-F238E27FC236}">
+                <a16:creationId xmlns:a16="http://schemas.microsoft.com/office/drawing/2014/main" id="{81707D27-B506-4EFD-9016-7F2281C8FEE9}"/>
+              </a:ext>
+            </a:extLst>
+          </p:cNvPr>
+          <p:cNvSpPr>
+            <a:spLocks xmlns:a="http://schemas.openxmlformats.org/drawingml/2006/main" noGrp="1"/>
+          </p:cNvSpPr>
+          <p:nvPr/>
+        </p:nvSpPr>
+        <p:spPr>
+          <a:xfrm xmlns:a="http://schemas.openxmlformats.org/drawingml/2006/main">
+            <a:off x="1276350" y="4248150"/>
+            <a:ext cx="4171950" cy="590550"/>
+          </a:xfrm>
+          <a:prstGeom xmlns:a="http://schemas.openxmlformats.org/drawingml/2006/main" prst="rect">
+            <a:avLst/>
+          </a:prstGeom>
+          <a:noFill xmlns:a="http://schemas.openxmlformats.org/drawingml/2006/main"/>
+          <a:ln xmlns:a="http://schemas.openxmlformats.org/drawingml/2006/main" w="0">
+            <a:noFill/>
+            <a:prstDash val="solid"/>
+          </a:ln>
+        </p:spPr>
+        <p:txBody>
+          <a:bodyPr xmlns:a="http://schemas.openxmlformats.org/drawingml/2006/main" anchor="t"/>
+          <a:lstStyle xmlns:a="http://schemas.openxmlformats.org/drawingml/2006/main"/>
+          <a:p xmlns:a="http://schemas.openxmlformats.org/drawingml/2006/main">
+            <a:pPr algn="l">
+              <a:buNone/>
+              <a:defRPr sz="1350" b="0">
+                <a:solidFill>
+                  <a:srgbClr val="62656A"/>
+                </a:solidFill>
+                <a:latin typeface="Helvetica Neue"/>
+                <a:ea typeface="Helvetica Neue"/>
+                <a:cs typeface="Helvetica Neue"/>
+              </a:defRPr>
+            </a:pPr>
+            <a:r>
+              <a:rPr sz="1350" b="0">
+                <a:solidFill>
+                  <a:srgbClr val="62656A"/>
+                </a:solidFill>
+                <a:latin typeface="Helvetica Neue"/>
+                <a:ea typeface="Helvetica Neue"/>
+                <a:cs typeface="Helvetica Neue"/>
+              </a:rPr>
+              <a:t>Search and status filters improve daily use at low complexity.</a:t>
+            </a:r>
+          </a:p>
+        </p:txBody>
+      </p:sp>
+      <p:sp>
+        <p:nvSpPr>
+          <p:cNvPr id="13" name="">
+            <a:extLst xmlns:a="http://schemas.openxmlformats.org/drawingml/2006/main">
+              <a:ext uri="{FF2B5EF4-FFF2-40B4-BE49-F238E27FC236}">
+                <a16:creationId xmlns:a16="http://schemas.microsoft.com/office/drawing/2014/main" id="{E6EE08EE-2BE1-4064-9F90-2FDCBD2747D1}"/>
+              </a:ext>
+            </a:extLst>
+          </p:cNvPr>
+          <p:cNvSpPr>
+            <a:spLocks xmlns:a="http://schemas.openxmlformats.org/drawingml/2006/main" noGrp="1"/>
+          </p:cNvSpPr>
+          <p:nvPr/>
+        </p:nvSpPr>
+        <p:spPr>
+          <a:xfrm xmlns:a="http://schemas.openxmlformats.org/drawingml/2006/main">
+            <a:off x="685800" y="5048250"/>
+            <a:ext cx="438150" cy="285750"/>
+          </a:xfrm>
+          <a:prstGeom xmlns:a="http://schemas.openxmlformats.org/drawingml/2006/main" prst="rect">
+            <a:avLst/>
+          </a:prstGeom>
+          <a:noFill xmlns:a="http://schemas.openxmlformats.org/drawingml/2006/main"/>
+          <a:ln xmlns:a="http://schemas.openxmlformats.org/drawingml/2006/main" w="0">
+            <a:noFill/>
+            <a:prstDash val="solid"/>
+          </a:ln>
+        </p:spPr>
+        <p:txBody>
+          <a:bodyPr xmlns:a="http://schemas.openxmlformats.org/drawingml/2006/main" anchor="t"/>
+          <a:lstStyle xmlns:a="http://schemas.openxmlformats.org/drawingml/2006/main"/>
+          <a:p xmlns:a="http://schemas.openxmlformats.org/drawingml/2006/main">
+            <a:pPr algn="l">
+              <a:buNone/>
+              <a:defRPr sz="1350" b="1">
+                <a:solidFill>
+                  <a:srgbClr val="FF7A00"/>
+                </a:solidFill>
+                <a:latin typeface="Helvetica Neue"/>
+                <a:ea typeface="Helvetica Neue"/>
+                <a:cs typeface="Helvetica Neue"/>
+              </a:defRPr>
+            </a:pPr>
+            <a:r>
+              <a:rPr sz="1350" b="1">
+                <a:solidFill>
+                  <a:srgbClr val="FF7A00"/>
+                </a:solidFill>
+                <a:latin typeface="Helvetica Neue"/>
+                <a:ea typeface="Helvetica Neue"/>
+                <a:cs typeface="Helvetica Neue"/>
+              </a:rPr>
+              <a:t>03</a:t>
+            </a:r>
+          </a:p>
+        </p:txBody>
+      </p:sp>
+      <p:sp>
+        <p:nvSpPr>
+          <p:cNvPr id="14" name="">
+            <a:extLst xmlns:a="http://schemas.openxmlformats.org/drawingml/2006/main">
+              <a:ext uri="{FF2B5EF4-FFF2-40B4-BE49-F238E27FC236}">
+                <a16:creationId xmlns:a16="http://schemas.microsoft.com/office/drawing/2014/main" id="{4B79D25C-5066-4160-B0A2-530651CB9BED}"/>
+              </a:ext>
+            </a:extLst>
+          </p:cNvPr>
+          <p:cNvSpPr>
+            <a:spLocks xmlns:a="http://schemas.openxmlformats.org/drawingml/2006/main" noGrp="1"/>
+          </p:cNvSpPr>
+          <p:nvPr/>
+        </p:nvSpPr>
+        <p:spPr>
+          <a:xfrm xmlns:a="http://schemas.openxmlformats.org/drawingml/2006/main">
+            <a:off x="1276350" y="5029200"/>
+            <a:ext cx="4171950" cy="304800"/>
+          </a:xfrm>
+          <a:prstGeom xmlns:a="http://schemas.openxmlformats.org/drawingml/2006/main" prst="rect">
+            <a:avLst/>
+          </a:prstGeom>
+          <a:noFill xmlns:a="http://schemas.openxmlformats.org/drawingml/2006/main"/>
+          <a:ln xmlns:a="http://schemas.openxmlformats.org/drawingml/2006/main" w="0">
+            <a:noFill/>
+            <a:prstDash val="solid"/>
+          </a:ln>
+        </p:spPr>
+        <p:txBody>
+          <a:bodyPr xmlns:a="http://schemas.openxmlformats.org/drawingml/2006/main" anchor="t"/>
+          <a:lstStyle xmlns:a="http://schemas.openxmlformats.org/drawingml/2006/main"/>
+          <a:p xmlns:a="http://schemas.openxmlformats.org/drawingml/2006/main">
+            <a:pPr algn="l">
+              <a:buNone/>
+              <a:defRPr sz="1875" b="1">
+                <a:solidFill>
+                  <a:srgbClr val="202124"/>
+                </a:solidFill>
+                <a:latin typeface="Helvetica Neue"/>
+                <a:ea typeface="Helvetica Neue"/>
+                <a:cs typeface="Helvetica Neue"/>
+              </a:defRPr>
+            </a:pPr>
+            <a:r>
+              <a:rPr sz="1875" b="1">
+                <a:solidFill>
+                  <a:srgbClr val="202124"/>
+                </a:solidFill>
+                <a:latin typeface="Helvetica Neue"/>
+                <a:ea typeface="Helvetica Neue"/>
+                <a:cs typeface="Helvetica Neue"/>
+              </a:rPr>
+              <a:t>Demo-ready data</a:t>
+            </a:r>
+          </a:p>
+        </p:txBody>
+      </p:sp>
+      <p:sp>
+        <p:nvSpPr>
+          <p:cNvPr id="15" name="">
+            <a:extLst xmlns:a="http://schemas.openxmlformats.org/drawingml/2006/main">
+              <a:ext uri="{FF2B5EF4-FFF2-40B4-BE49-F238E27FC236}">
+                <a16:creationId xmlns:a16="http://schemas.microsoft.com/office/drawing/2014/main" id="{306D93A1-0ADD-4767-AF13-521FBE98D2B6}"/>
+              </a:ext>
+            </a:extLst>
+          </p:cNvPr>
+          <p:cNvSpPr>
+            <a:spLocks xmlns:a="http://schemas.openxmlformats.org/drawingml/2006/main" noGrp="1"/>
+          </p:cNvSpPr>
+          <p:nvPr/>
+        </p:nvSpPr>
+        <p:spPr>
+          <a:xfrm xmlns:a="http://schemas.openxmlformats.org/drawingml/2006/main">
+            <a:off x="1276350" y="5410200"/>
+            <a:ext cx="4171950" cy="590550"/>
+          </a:xfrm>
+          <a:prstGeom xmlns:a="http://schemas.openxmlformats.org/drawingml/2006/main" prst="rect">
+            <a:avLst/>
+          </a:prstGeom>
+          <a:noFill xmlns:a="http://schemas.openxmlformats.org/drawingml/2006/main"/>
+          <a:ln xmlns:a="http://schemas.openxmlformats.org/drawingml/2006/main" w="0">
+            <a:noFill/>
+            <a:prstDash val="solid"/>
+          </a:ln>
+        </p:spPr>
+        <p:txBody>
+          <a:bodyPr xmlns:a="http://schemas.openxmlformats.org/drawingml/2006/main" anchor="t"/>
+          <a:lstStyle xmlns:a="http://schemas.openxmlformats.org/drawingml/2006/main"/>
+          <a:p xmlns:a="http://schemas.openxmlformats.org/drawingml/2006/main">
+            <a:pPr algn="l">
+              <a:buNone/>
+              <a:defRPr sz="1350" b="0">
+                <a:solidFill>
+                  <a:srgbClr val="62656A"/>
+                </a:solidFill>
+                <a:latin typeface="Helvetica Neue"/>
+                <a:ea typeface="Helvetica Neue"/>
+                <a:cs typeface="Helvetica Neue"/>
+              </a:defRPr>
+            </a:pPr>
+            <a:r>
+              <a:rPr sz="1350" b="0">
+                <a:solidFill>
+                  <a:srgbClr val="62656A"/>
+                </a:solidFill>
+                <a:latin typeface="Helvetica Neue"/>
+                <a:ea typeface="Helvetica Neue"/>
+                <a:cs typeface="Helvetica Neue"/>
+              </a:rPr>
+              <a:t>Four realistic users and tasks arrive through a reversible migration.</a:t>
+            </a:r>
+          </a:p>
+        </p:txBody>
+      </p:sp>
+      <p:sp>
+        <p:nvSpPr>
+          <p:cNvPr id="16" name="">
+            <a:extLst xmlns:a="http://schemas.openxmlformats.org/drawingml/2006/main">
+              <a:ext uri="{FF2B5EF4-FFF2-40B4-BE49-F238E27FC236}">
+                <a16:creationId xmlns:a16="http://schemas.microsoft.com/office/drawing/2014/main" id="{56247076-EC56-4191-9567-B106EE919569}"/>
+              </a:ext>
+            </a:extLst>
+          </p:cNvPr>
+          <p:cNvSpPr>
+            <a:spLocks xmlns:a="http://schemas.openxmlformats.org/drawingml/2006/main" noGrp="1"/>
+          </p:cNvSpPr>
+          <p:nvPr/>
+        </p:nvSpPr>
+        <p:spPr>
+          <a:xfrm xmlns:a="http://schemas.openxmlformats.org/drawingml/2006/main">
+            <a:off x="6496050" y="2724150"/>
+            <a:ext cx="438150" cy="285750"/>
+          </a:xfrm>
+          <a:prstGeom xmlns:a="http://schemas.openxmlformats.org/drawingml/2006/main" prst="rect">
+            <a:avLst/>
+          </a:prstGeom>
+          <a:noFill xmlns:a="http://schemas.openxmlformats.org/drawingml/2006/main"/>
+          <a:ln xmlns:a="http://schemas.openxmlformats.org/drawingml/2006/main" w="0">
+            <a:noFill/>
+            <a:prstDash val="solid"/>
+          </a:ln>
+        </p:spPr>
+        <p:txBody>
+          <a:bodyPr xmlns:a="http://schemas.openxmlformats.org/drawingml/2006/main" anchor="t"/>
+          <a:lstStyle xmlns:a="http://schemas.openxmlformats.org/drawingml/2006/main"/>
+          <a:p xmlns:a="http://schemas.openxmlformats.org/drawingml/2006/main">
+            <a:pPr algn="l">
+              <a:buNone/>
+              <a:defRPr sz="1350" b="1">
+                <a:solidFill>
+                  <a:srgbClr val="858783"/>
+                </a:solidFill>
+                <a:latin typeface="Helvetica Neue"/>
+                <a:ea typeface="Helvetica Neue"/>
+                <a:cs typeface="Helvetica Neue"/>
+              </a:defRPr>
+            </a:pPr>
+            <a:r>
+              <a:rPr sz="1350" b="1">
+                <a:solidFill>
+                  <a:srgbClr val="858783"/>
                 </a:solidFill>
                 <a:latin typeface="Helvetica Neue"/>
                 <a:ea typeface="Helvetica Neue"/>
@@ -4497,22 +4131,22 @@
       </p:sp>
       <p:sp>
         <p:nvSpPr>
-          <p:cNvPr id="10" name="">
-            <a:extLst xmlns:a="http://schemas.openxmlformats.org/drawingml/2006/main">
-              <a:ext uri="{FF2B5EF4-FFF2-40B4-BE49-F238E27FC236}">
-                <a16:creationId xmlns:a16="http://schemas.microsoft.com/office/drawing/2014/main" id="{237692E1-9821-48E9-BC7A-96D263BDEED7}"/>
-              </a:ext>
-            </a:extLst>
-          </p:cNvPr>
-          <p:cNvSpPr>
-            <a:spLocks xmlns:a="http://schemas.openxmlformats.org/drawingml/2006/main" noGrp="1"/>
-          </p:cNvSpPr>
-          <p:nvPr/>
-        </p:nvSpPr>
-        <p:spPr>
-          <a:xfrm xmlns:a="http://schemas.openxmlformats.org/drawingml/2006/main">
-            <a:off x="971550" y="2343150"/>
-            <a:ext cx="2095500" cy="381000"/>
+          <p:cNvPr id="17" name="">
+            <a:extLst xmlns:a="http://schemas.openxmlformats.org/drawingml/2006/main">
+              <a:ext uri="{FF2B5EF4-FFF2-40B4-BE49-F238E27FC236}">
+                <a16:creationId xmlns:a16="http://schemas.microsoft.com/office/drawing/2014/main" id="{979F9FF7-53AF-4B02-A8DA-3E749B8754A3}"/>
+              </a:ext>
+            </a:extLst>
+          </p:cNvPr>
+          <p:cNvSpPr>
+            <a:spLocks xmlns:a="http://schemas.openxmlformats.org/drawingml/2006/main" noGrp="1"/>
+          </p:cNvSpPr>
+          <p:nvPr/>
+        </p:nvSpPr>
+        <p:spPr>
+          <a:xfrm xmlns:a="http://schemas.openxmlformats.org/drawingml/2006/main">
+            <a:off x="7086600" y="2705100"/>
+            <a:ext cx="4171950" cy="304800"/>
           </a:xfrm>
           <a:prstGeom xmlns:a="http://schemas.openxmlformats.org/drawingml/2006/main" prst="rect">
             <a:avLst/>
@@ -4528,9 +4162,10 @@
           <a:lstStyle xmlns:a="http://schemas.openxmlformats.org/drawingml/2006/main"/>
           <a:p xmlns:a="http://schemas.openxmlformats.org/drawingml/2006/main">
             <a:pPr algn="l">
+              <a:buNone/>
               <a:defRPr sz="1875" b="1">
                 <a:solidFill>
-                  <a:srgbClr val="202124"/>
+                  <a:srgbClr val="62656A"/>
                 </a:solidFill>
                 <a:latin typeface="Helvetica Neue"/>
                 <a:ea typeface="Helvetica Neue"/>
@@ -4540,35 +4175,35 @@
             <a:r>
               <a:rPr sz="1875" b="1">
                 <a:solidFill>
-                  <a:srgbClr val="202124"/>
-                </a:solidFill>
-                <a:latin typeface="Helvetica Neue"/>
-                <a:ea typeface="Helvetica Neue"/>
-                <a:cs typeface="Helvetica Neue"/>
-              </a:rPr>
-              <a:t>React UI</a:t>
-            </a:r>
-          </a:p>
-        </p:txBody>
-      </p:sp>
-      <p:sp>
-        <p:nvSpPr>
-          <p:cNvPr id="11" name="">
-            <a:extLst xmlns:a="http://schemas.openxmlformats.org/drawingml/2006/main">
-              <a:ext uri="{FF2B5EF4-FFF2-40B4-BE49-F238E27FC236}">
-                <a16:creationId xmlns:a16="http://schemas.microsoft.com/office/drawing/2014/main" id="{0A966911-0058-4547-AED3-7A38F7DF6878}"/>
-              </a:ext>
-            </a:extLst>
-          </p:cNvPr>
-          <p:cNvSpPr>
-            <a:spLocks xmlns:a="http://schemas.openxmlformats.org/drawingml/2006/main" noGrp="1"/>
-          </p:cNvSpPr>
-          <p:nvPr/>
-        </p:nvSpPr>
-        <p:spPr>
-          <a:xfrm xmlns:a="http://schemas.openxmlformats.org/drawingml/2006/main">
-            <a:off x="971550" y="3981450"/>
-            <a:ext cx="2095500" cy="723900"/>
+                  <a:srgbClr val="62656A"/>
+                </a:solidFill>
+                <a:latin typeface="Helvetica Neue"/>
+                <a:ea typeface="Helvetica Neue"/>
+                <a:cs typeface="Helvetica Neue"/>
+              </a:rPr>
+              <a:t>Authentication</a:t>
+            </a:r>
+          </a:p>
+        </p:txBody>
+      </p:sp>
+      <p:sp>
+        <p:nvSpPr>
+          <p:cNvPr id="18" name="">
+            <a:extLst xmlns:a="http://schemas.openxmlformats.org/drawingml/2006/main">
+              <a:ext uri="{FF2B5EF4-FFF2-40B4-BE49-F238E27FC236}">
+                <a16:creationId xmlns:a16="http://schemas.microsoft.com/office/drawing/2014/main" id="{01850210-1C34-4AD2-A033-1FBB36AFC22F}"/>
+              </a:ext>
+            </a:extLst>
+          </p:cNvPr>
+          <p:cNvSpPr>
+            <a:spLocks xmlns:a="http://schemas.openxmlformats.org/drawingml/2006/main" noGrp="1"/>
+          </p:cNvSpPr>
+          <p:nvPr/>
+        </p:nvSpPr>
+        <p:spPr>
+          <a:xfrm xmlns:a="http://schemas.openxmlformats.org/drawingml/2006/main">
+            <a:off x="7086600" y="3086100"/>
+            <a:ext cx="4171950" cy="590550"/>
           </a:xfrm>
           <a:prstGeom xmlns:a="http://schemas.openxmlformats.org/drawingml/2006/main" prst="rect">
             <a:avLst/>
@@ -4584,6 +4219,7 @@
           <a:lstStyle xmlns:a="http://schemas.openxmlformats.org/drawingml/2006/main"/>
           <a:p xmlns:a="http://schemas.openxmlformats.org/drawingml/2006/main">
             <a:pPr algn="l">
+              <a:buNone/>
               <a:defRPr sz="1350" b="0">
                 <a:solidFill>
                   <a:srgbClr val="62656A"/>
@@ -4602,11 +4238,159 @@
                 <a:ea typeface="Helvetica Neue"/>
                 <a:cs typeface="Helvetica Neue"/>
               </a:rPr>
-              <a:t>Accessible interaction</a:t>
-            </a:r>
-          </a:p>
+              <a:t>A pretend login would add risk without a user requirement.</a:t>
+            </a:r>
+          </a:p>
+        </p:txBody>
+      </p:sp>
+      <p:sp>
+        <p:nvSpPr>
+          <p:cNvPr id="19" name="">
+            <a:extLst xmlns:a="http://schemas.openxmlformats.org/drawingml/2006/main">
+              <a:ext uri="{FF2B5EF4-FFF2-40B4-BE49-F238E27FC236}">
+                <a16:creationId xmlns:a16="http://schemas.microsoft.com/office/drawing/2014/main" id="{E4DF2264-694E-428B-A417-092B7F569599}"/>
+              </a:ext>
+            </a:extLst>
+          </p:cNvPr>
+          <p:cNvSpPr>
+            <a:spLocks xmlns:a="http://schemas.openxmlformats.org/drawingml/2006/main" noGrp="1"/>
+          </p:cNvSpPr>
+          <p:nvPr/>
+        </p:nvSpPr>
+        <p:spPr>
+          <a:xfrm xmlns:a="http://schemas.openxmlformats.org/drawingml/2006/main">
+            <a:off x="6496050" y="3886200"/>
+            <a:ext cx="438150" cy="285750"/>
+          </a:xfrm>
+          <a:prstGeom xmlns:a="http://schemas.openxmlformats.org/drawingml/2006/main" prst="rect">
+            <a:avLst/>
+          </a:prstGeom>
+          <a:noFill xmlns:a="http://schemas.openxmlformats.org/drawingml/2006/main"/>
+          <a:ln xmlns:a="http://schemas.openxmlformats.org/drawingml/2006/main" w="0">
+            <a:noFill/>
+            <a:prstDash val="solid"/>
+          </a:ln>
+        </p:spPr>
+        <p:txBody>
+          <a:bodyPr xmlns:a="http://schemas.openxmlformats.org/drawingml/2006/main" anchor="t"/>
+          <a:lstStyle xmlns:a="http://schemas.openxmlformats.org/drawingml/2006/main"/>
           <a:p xmlns:a="http://schemas.openxmlformats.org/drawingml/2006/main">
             <a:pPr algn="l">
+              <a:buNone/>
+              <a:defRPr sz="1350" b="1">
+                <a:solidFill>
+                  <a:srgbClr val="858783"/>
+                </a:solidFill>
+                <a:latin typeface="Helvetica Neue"/>
+                <a:ea typeface="Helvetica Neue"/>
+                <a:cs typeface="Helvetica Neue"/>
+              </a:defRPr>
+            </a:pPr>
+            <a:r>
+              <a:rPr sz="1350" b="1">
+                <a:solidFill>
+                  <a:srgbClr val="858783"/>
+                </a:solidFill>
+                <a:latin typeface="Helvetica Neue"/>
+                <a:ea typeface="Helvetica Neue"/>
+                <a:cs typeface="Helvetica Neue"/>
+              </a:rPr>
+              <a:t>02</a:t>
+            </a:r>
+          </a:p>
+        </p:txBody>
+      </p:sp>
+      <p:sp>
+        <p:nvSpPr>
+          <p:cNvPr id="20" name="">
+            <a:extLst xmlns:a="http://schemas.openxmlformats.org/drawingml/2006/main">
+              <a:ext uri="{FF2B5EF4-FFF2-40B4-BE49-F238E27FC236}">
+                <a16:creationId xmlns:a16="http://schemas.microsoft.com/office/drawing/2014/main" id="{643532BF-6762-4DFA-8B8A-50B61946C5E5}"/>
+              </a:ext>
+            </a:extLst>
+          </p:cNvPr>
+          <p:cNvSpPr>
+            <a:spLocks xmlns:a="http://schemas.openxmlformats.org/drawingml/2006/main" noGrp="1"/>
+          </p:cNvSpPr>
+          <p:nvPr/>
+        </p:nvSpPr>
+        <p:spPr>
+          <a:xfrm xmlns:a="http://schemas.openxmlformats.org/drawingml/2006/main">
+            <a:off x="7086600" y="3867150"/>
+            <a:ext cx="4171950" cy="304800"/>
+          </a:xfrm>
+          <a:prstGeom xmlns:a="http://schemas.openxmlformats.org/drawingml/2006/main" prst="rect">
+            <a:avLst/>
+          </a:prstGeom>
+          <a:noFill xmlns:a="http://schemas.openxmlformats.org/drawingml/2006/main"/>
+          <a:ln xmlns:a="http://schemas.openxmlformats.org/drawingml/2006/main" w="0">
+            <a:noFill/>
+            <a:prstDash val="solid"/>
+          </a:ln>
+        </p:spPr>
+        <p:txBody>
+          <a:bodyPr xmlns:a="http://schemas.openxmlformats.org/drawingml/2006/main" anchor="t"/>
+          <a:lstStyle xmlns:a="http://schemas.openxmlformats.org/drawingml/2006/main"/>
+          <a:p xmlns:a="http://schemas.openxmlformats.org/drawingml/2006/main">
+            <a:pPr algn="l">
+              <a:buNone/>
+              <a:defRPr sz="1875" b="1">
+                <a:solidFill>
+                  <a:srgbClr val="62656A"/>
+                </a:solidFill>
+                <a:latin typeface="Helvetica Neue"/>
+                <a:ea typeface="Helvetica Neue"/>
+                <a:cs typeface="Helvetica Neue"/>
+              </a:defRPr>
+            </a:pPr>
+            <a:r>
+              <a:rPr sz="1875" b="1">
+                <a:solidFill>
+                  <a:srgbClr val="62656A"/>
+                </a:solidFill>
+                <a:latin typeface="Helvetica Neue"/>
+                <a:ea typeface="Helvetica Neue"/>
+                <a:cs typeface="Helvetica Neue"/>
+              </a:rPr>
+              <a:t>Due dates and priority</a:t>
+            </a:r>
+          </a:p>
+        </p:txBody>
+      </p:sp>
+      <p:sp>
+        <p:nvSpPr>
+          <p:cNvPr id="21" name="">
+            <a:extLst xmlns:a="http://schemas.openxmlformats.org/drawingml/2006/main">
+              <a:ext uri="{FF2B5EF4-FFF2-40B4-BE49-F238E27FC236}">
+                <a16:creationId xmlns:a16="http://schemas.microsoft.com/office/drawing/2014/main" id="{7F1EDAA6-7517-4239-85DF-BBBA402FFA7B}"/>
+              </a:ext>
+            </a:extLst>
+          </p:cNvPr>
+          <p:cNvSpPr>
+            <a:spLocks xmlns:a="http://schemas.openxmlformats.org/drawingml/2006/main" noGrp="1"/>
+          </p:cNvSpPr>
+          <p:nvPr/>
+        </p:nvSpPr>
+        <p:spPr>
+          <a:xfrm xmlns:a="http://schemas.openxmlformats.org/drawingml/2006/main">
+            <a:off x="7086600" y="4248150"/>
+            <a:ext cx="4171950" cy="590550"/>
+          </a:xfrm>
+          <a:prstGeom xmlns:a="http://schemas.openxmlformats.org/drawingml/2006/main" prst="rect">
+            <a:avLst/>
+          </a:prstGeom>
+          <a:noFill xmlns:a="http://schemas.openxmlformats.org/drawingml/2006/main"/>
+          <a:ln xmlns:a="http://schemas.openxmlformats.org/drawingml/2006/main" w="0">
+            <a:noFill/>
+            <a:prstDash val="solid"/>
+          </a:ln>
+        </p:spPr>
+        <p:txBody>
+          <a:bodyPr xmlns:a="http://schemas.openxmlformats.org/drawingml/2006/main" anchor="t"/>
+          <a:lstStyle xmlns:a="http://schemas.openxmlformats.org/drawingml/2006/main"/>
+          <a:p xmlns:a="http://schemas.openxmlformats.org/drawingml/2006/main">
+            <a:pPr algn="l">
+              <a:buNone/>
               <a:defRPr sz="1350" b="0">
                 <a:solidFill>
                   <a:srgbClr val="62656A"/>
@@ -4625,116 +4409,29 @@
                 <a:ea typeface="Helvetica Neue"/>
                 <a:cs typeface="Helvetica Neue"/>
               </a:rPr>
-              <a:t>and responsive views</a:t>
-            </a:r>
-          </a:p>
-        </p:txBody>
-      </p:sp>
-      <p:sp>
-        <p:nvSpPr>
-          <p:cNvPr id="12" name="">
-            <a:extLst xmlns:a="http://schemas.openxmlformats.org/drawingml/2006/main">
-              <a:ext uri="{FF2B5EF4-FFF2-40B4-BE49-F238E27FC236}">
-                <a16:creationId xmlns:a16="http://schemas.microsoft.com/office/drawing/2014/main" id="{82A1A995-2FF9-43E5-AF55-0353724FA0E7}"/>
-              </a:ext>
-            </a:extLst>
-          </p:cNvPr>
-          <p:cNvSpPr>
-            <a:spLocks xmlns:a="http://schemas.openxmlformats.org/drawingml/2006/main" noGrp="1"/>
-          </p:cNvSpPr>
-          <p:nvPr/>
-        </p:nvSpPr>
-        <p:spPr>
-          <a:xfrm xmlns:a="http://schemas.openxmlformats.org/drawingml/2006/main">
-            <a:off x="3638550" y="3162300"/>
-            <a:ext cx="476250" cy="476250"/>
-          </a:xfrm>
-          <a:prstGeom xmlns:a="http://schemas.openxmlformats.org/drawingml/2006/main" prst="ellipse">
-            <a:avLst/>
-          </a:prstGeom>
-          <a:solidFill xmlns:a="http://schemas.openxmlformats.org/drawingml/2006/main">
-            <a:srgbClr val="202124"/>
-          </a:solidFill>
-          <a:ln xmlns:a="http://schemas.openxmlformats.org/drawingml/2006/main" w="0">
-            <a:noFill/>
-            <a:prstDash val="solid"/>
-          </a:ln>
-        </p:spPr>
-      </p:sp>
-      <p:sp>
-        <p:nvSpPr>
-          <p:cNvPr id="13" name="">
-            <a:extLst xmlns:a="http://schemas.openxmlformats.org/drawingml/2006/main">
-              <a:ext uri="{FF2B5EF4-FFF2-40B4-BE49-F238E27FC236}">
-                <a16:creationId xmlns:a16="http://schemas.microsoft.com/office/drawing/2014/main" id="{EB1AB5BC-B0FD-4FF3-938E-C597A35E377E}"/>
-              </a:ext>
-            </a:extLst>
-          </p:cNvPr>
-          <p:cNvSpPr>
-            <a:spLocks xmlns:a="http://schemas.openxmlformats.org/drawingml/2006/main" noGrp="1"/>
-          </p:cNvSpPr>
-          <p:nvPr/>
-        </p:nvSpPr>
-        <p:spPr>
-          <a:xfrm xmlns:a="http://schemas.openxmlformats.org/drawingml/2006/main">
-            <a:off x="3638550" y="3267075"/>
-            <a:ext cx="476250" cy="228600"/>
-          </a:xfrm>
-          <a:prstGeom xmlns:a="http://schemas.openxmlformats.org/drawingml/2006/main" prst="rect">
-            <a:avLst/>
-          </a:prstGeom>
-          <a:noFill xmlns:a="http://schemas.openxmlformats.org/drawingml/2006/main"/>
-          <a:ln xmlns:a="http://schemas.openxmlformats.org/drawingml/2006/main" w="0">
-            <a:noFill/>
-            <a:prstDash val="solid"/>
-          </a:ln>
-        </p:spPr>
-        <p:txBody>
-          <a:bodyPr xmlns:a="http://schemas.openxmlformats.org/drawingml/2006/main" anchor="ctr"/>
-          <a:lstStyle xmlns:a="http://schemas.openxmlformats.org/drawingml/2006/main"/>
-          <a:p xmlns:a="http://schemas.openxmlformats.org/drawingml/2006/main">
-            <a:pPr algn="ctr">
-              <a:defRPr sz="1125" b="1">
-                <a:solidFill>
-                  <a:srgbClr val="FFFFFF"/>
-                </a:solidFill>
-                <a:latin typeface="Helvetica Neue"/>
-                <a:ea typeface="Helvetica Neue"/>
-                <a:cs typeface="Helvetica Neue"/>
-              </a:defRPr>
-            </a:pPr>
-            <a:r>
-              <a:rPr sz="1125" b="1">
-                <a:solidFill>
-                  <a:srgbClr val="FFFFFF"/>
-                </a:solidFill>
-                <a:latin typeface="Helvetica Neue"/>
-                <a:ea typeface="Helvetica Neue"/>
-                <a:cs typeface="Helvetica Neue"/>
-              </a:rPr>
-              <a:t>02</a:t>
-            </a:r>
-          </a:p>
-        </p:txBody>
-      </p:sp>
-      <p:sp>
-        <p:nvSpPr>
-          <p:cNvPr id="14" name="">
-            <a:extLst xmlns:a="http://schemas.openxmlformats.org/drawingml/2006/main">
-              <a:ext uri="{FF2B5EF4-FFF2-40B4-BE49-F238E27FC236}">
-                <a16:creationId xmlns:a16="http://schemas.microsoft.com/office/drawing/2014/main" id="{87C6E59E-968E-456C-B2A8-54C53A6BEA1C}"/>
-              </a:ext>
-            </a:extLst>
-          </p:cNvPr>
-          <p:cNvSpPr>
-            <a:spLocks xmlns:a="http://schemas.openxmlformats.org/drawingml/2006/main" noGrp="1"/>
-          </p:cNvSpPr>
-          <p:nvPr/>
-        </p:nvSpPr>
-        <p:spPr>
-          <a:xfrm xmlns:a="http://schemas.openxmlformats.org/drawingml/2006/main">
-            <a:off x="3638550" y="2343150"/>
-            <a:ext cx="2095500" cy="381000"/>
+              <a:t>Mentioned as optional, but not needed to prove the core flow.</a:t>
+            </a:r>
+          </a:p>
+        </p:txBody>
+      </p:sp>
+      <p:sp>
+        <p:nvSpPr>
+          <p:cNvPr id="22" name="">
+            <a:extLst xmlns:a="http://schemas.openxmlformats.org/drawingml/2006/main">
+              <a:ext uri="{FF2B5EF4-FFF2-40B4-BE49-F238E27FC236}">
+                <a16:creationId xmlns:a16="http://schemas.microsoft.com/office/drawing/2014/main" id="{35E9206B-2605-4471-B269-8B647149D62A}"/>
+              </a:ext>
+            </a:extLst>
+          </p:cNvPr>
+          <p:cNvSpPr>
+            <a:spLocks xmlns:a="http://schemas.openxmlformats.org/drawingml/2006/main" noGrp="1"/>
+          </p:cNvSpPr>
+          <p:nvPr/>
+        </p:nvSpPr>
+        <p:spPr>
+          <a:xfrm xmlns:a="http://schemas.openxmlformats.org/drawingml/2006/main">
+            <a:off x="6496050" y="5048250"/>
+            <a:ext cx="438150" cy="285750"/>
           </a:xfrm>
           <a:prstGeom xmlns:a="http://schemas.openxmlformats.org/drawingml/2006/main" prst="rect">
             <a:avLst/>
@@ -4750,9 +4447,67 @@
           <a:lstStyle xmlns:a="http://schemas.openxmlformats.org/drawingml/2006/main"/>
           <a:p xmlns:a="http://schemas.openxmlformats.org/drawingml/2006/main">
             <a:pPr algn="l">
+              <a:buNone/>
+              <a:defRPr sz="1350" b="1">
+                <a:solidFill>
+                  <a:srgbClr val="858783"/>
+                </a:solidFill>
+                <a:latin typeface="Helvetica Neue"/>
+                <a:ea typeface="Helvetica Neue"/>
+                <a:cs typeface="Helvetica Neue"/>
+              </a:defRPr>
+            </a:pPr>
+            <a:r>
+              <a:rPr sz="1350" b="1">
+                <a:solidFill>
+                  <a:srgbClr val="858783"/>
+                </a:solidFill>
+                <a:latin typeface="Helvetica Neue"/>
+                <a:ea typeface="Helvetica Neue"/>
+                <a:cs typeface="Helvetica Neue"/>
+              </a:rPr>
+              <a:t>03</a:t>
+            </a:r>
+          </a:p>
+        </p:txBody>
+      </p:sp>
+      <p:sp>
+        <p:nvSpPr>
+          <p:cNvPr id="23" name="">
+            <a:extLst xmlns:a="http://schemas.openxmlformats.org/drawingml/2006/main">
+              <a:ext uri="{FF2B5EF4-FFF2-40B4-BE49-F238E27FC236}">
+                <a16:creationId xmlns:a16="http://schemas.microsoft.com/office/drawing/2014/main" id="{69D84012-D3D2-497A-8DF7-708544408552}"/>
+              </a:ext>
+            </a:extLst>
+          </p:cNvPr>
+          <p:cNvSpPr>
+            <a:spLocks xmlns:a="http://schemas.openxmlformats.org/drawingml/2006/main" noGrp="1"/>
+          </p:cNvSpPr>
+          <p:nvPr/>
+        </p:nvSpPr>
+        <p:spPr>
+          <a:xfrm xmlns:a="http://schemas.openxmlformats.org/drawingml/2006/main">
+            <a:off x="7086600" y="5029200"/>
+            <a:ext cx="4171950" cy="304800"/>
+          </a:xfrm>
+          <a:prstGeom xmlns:a="http://schemas.openxmlformats.org/drawingml/2006/main" prst="rect">
+            <a:avLst/>
+          </a:prstGeom>
+          <a:noFill xmlns:a="http://schemas.openxmlformats.org/drawingml/2006/main"/>
+          <a:ln xmlns:a="http://schemas.openxmlformats.org/drawingml/2006/main" w="0">
+            <a:noFill/>
+            <a:prstDash val="solid"/>
+          </a:ln>
+        </p:spPr>
+        <p:txBody>
+          <a:bodyPr xmlns:a="http://schemas.openxmlformats.org/drawingml/2006/main" anchor="t"/>
+          <a:lstStyle xmlns:a="http://schemas.openxmlformats.org/drawingml/2006/main"/>
+          <a:p xmlns:a="http://schemas.openxmlformats.org/drawingml/2006/main">
+            <a:pPr algn="l">
+              <a:buNone/>
               <a:defRPr sz="1875" b="1">
                 <a:solidFill>
-                  <a:srgbClr val="202124"/>
+                  <a:srgbClr val="62656A"/>
                 </a:solidFill>
                 <a:latin typeface="Helvetica Neue"/>
                 <a:ea typeface="Helvetica Neue"/>
@@ -4762,35 +4517,35 @@
             <a:r>
               <a:rPr sz="1875" b="1">
                 <a:solidFill>
-                  <a:srgbClr val="202124"/>
-                </a:solidFill>
-                <a:latin typeface="Helvetica Neue"/>
-                <a:ea typeface="Helvetica Neue"/>
-                <a:cs typeface="Helvetica Neue"/>
-              </a:rPr>
-              <a:t>API service</a:t>
-            </a:r>
-          </a:p>
-        </p:txBody>
-      </p:sp>
-      <p:sp>
-        <p:nvSpPr>
-          <p:cNvPr id="15" name="">
-            <a:extLst xmlns:a="http://schemas.openxmlformats.org/drawingml/2006/main">
-              <a:ext uri="{FF2B5EF4-FFF2-40B4-BE49-F238E27FC236}">
-                <a16:creationId xmlns:a16="http://schemas.microsoft.com/office/drawing/2014/main" id="{DE4E0CE2-6098-47CC-B42E-C76DC728281D}"/>
-              </a:ext>
-            </a:extLst>
-          </p:cNvPr>
-          <p:cNvSpPr>
-            <a:spLocks xmlns:a="http://schemas.openxmlformats.org/drawingml/2006/main" noGrp="1"/>
-          </p:cNvSpPr>
-          <p:nvPr/>
-        </p:nvSpPr>
-        <p:spPr>
-          <a:xfrm xmlns:a="http://schemas.openxmlformats.org/drawingml/2006/main">
-            <a:off x="3638550" y="3981450"/>
-            <a:ext cx="2095500" cy="723900"/>
+                  <a:srgbClr val="62656A"/>
+                </a:solidFill>
+                <a:latin typeface="Helvetica Neue"/>
+                <a:ea typeface="Helvetica Neue"/>
+                <a:cs typeface="Helvetica Neue"/>
+              </a:rPr>
+              <a:t>Extra infrastructure</a:t>
+            </a:r>
+          </a:p>
+        </p:txBody>
+      </p:sp>
+      <p:sp>
+        <p:nvSpPr>
+          <p:cNvPr id="24" name="">
+            <a:extLst xmlns:a="http://schemas.openxmlformats.org/drawingml/2006/main">
+              <a:ext uri="{FF2B5EF4-FFF2-40B4-BE49-F238E27FC236}">
+                <a16:creationId xmlns:a16="http://schemas.microsoft.com/office/drawing/2014/main" id="{514E2BD2-858B-4873-9881-66B4BF2576D2}"/>
+              </a:ext>
+            </a:extLst>
+          </p:cNvPr>
+          <p:cNvSpPr>
+            <a:spLocks xmlns:a="http://schemas.openxmlformats.org/drawingml/2006/main" noGrp="1"/>
+          </p:cNvSpPr>
+          <p:nvPr/>
+        </p:nvSpPr>
+        <p:spPr>
+          <a:xfrm xmlns:a="http://schemas.openxmlformats.org/drawingml/2006/main">
+            <a:off x="7086600" y="5410200"/>
+            <a:ext cx="4171950" cy="590550"/>
           </a:xfrm>
           <a:prstGeom xmlns:a="http://schemas.openxmlformats.org/drawingml/2006/main" prst="rect">
             <a:avLst/>
@@ -4806,6 +4561,7 @@
           <a:lstStyle xmlns:a="http://schemas.openxmlformats.org/drawingml/2006/main"/>
           <a:p xmlns:a="http://schemas.openxmlformats.org/drawingml/2006/main">
             <a:pPr algn="l">
+              <a:buNone/>
               <a:defRPr sz="1350" b="0">
                 <a:solidFill>
                   <a:srgbClr val="62656A"/>
@@ -4824,530 +4580,7 @@
                 <a:ea typeface="Helvetica Neue"/>
                 <a:cs typeface="Helvetica Neue"/>
               </a:rPr>
-              <a:t>Typed transport and</a:t>
-            </a:r>
-          </a:p>
-          <a:p xmlns:a="http://schemas.openxmlformats.org/drawingml/2006/main">
-            <a:pPr algn="l">
-              <a:defRPr sz="1350" b="0">
-                <a:solidFill>
-                  <a:srgbClr val="62656A"/>
-                </a:solidFill>
-                <a:latin typeface="Helvetica Neue"/>
-                <a:ea typeface="Helvetica Neue"/>
-                <a:cs typeface="Helvetica Neue"/>
-              </a:defRPr>
-            </a:pPr>
-            <a:r>
-              <a:rPr sz="1350" b="0">
-                <a:solidFill>
-                  <a:srgbClr val="62656A"/>
-                </a:solidFill>
-                <a:latin typeface="Helvetica Neue"/>
-                <a:ea typeface="Helvetica Neue"/>
-                <a:cs typeface="Helvetica Neue"/>
-              </a:rPr>
-              <a:t>error translation</a:t>
-            </a:r>
-          </a:p>
-        </p:txBody>
-      </p:sp>
-      <p:sp>
-        <p:nvSpPr>
-          <p:cNvPr id="16" name="">
-            <a:extLst xmlns:a="http://schemas.openxmlformats.org/drawingml/2006/main">
-              <a:ext uri="{FF2B5EF4-FFF2-40B4-BE49-F238E27FC236}">
-                <a16:creationId xmlns:a16="http://schemas.microsoft.com/office/drawing/2014/main" id="{D1514FDA-EAA7-495C-A774-E28E18A690B3}"/>
-              </a:ext>
-            </a:extLst>
-          </p:cNvPr>
-          <p:cNvSpPr>
-            <a:spLocks xmlns:a="http://schemas.openxmlformats.org/drawingml/2006/main" noGrp="1"/>
-          </p:cNvSpPr>
-          <p:nvPr/>
-        </p:nvSpPr>
-        <p:spPr>
-          <a:xfrm xmlns:a="http://schemas.openxmlformats.org/drawingml/2006/main">
-            <a:off x="6305550" y="3162300"/>
-            <a:ext cx="476250" cy="476250"/>
-          </a:xfrm>
-          <a:prstGeom xmlns:a="http://schemas.openxmlformats.org/drawingml/2006/main" prst="ellipse">
-            <a:avLst/>
-          </a:prstGeom>
-          <a:solidFill xmlns:a="http://schemas.openxmlformats.org/drawingml/2006/main">
-            <a:srgbClr val="FF7A00"/>
-          </a:solidFill>
-          <a:ln xmlns:a="http://schemas.openxmlformats.org/drawingml/2006/main" w="0">
-            <a:noFill/>
-            <a:prstDash val="solid"/>
-          </a:ln>
-        </p:spPr>
-      </p:sp>
-      <p:sp>
-        <p:nvSpPr>
-          <p:cNvPr id="17" name="">
-            <a:extLst xmlns:a="http://schemas.openxmlformats.org/drawingml/2006/main">
-              <a:ext uri="{FF2B5EF4-FFF2-40B4-BE49-F238E27FC236}">
-                <a16:creationId xmlns:a16="http://schemas.microsoft.com/office/drawing/2014/main" id="{EB0F0B43-E462-4C93-A995-4040C3E18CDE}"/>
-              </a:ext>
-            </a:extLst>
-          </p:cNvPr>
-          <p:cNvSpPr>
-            <a:spLocks xmlns:a="http://schemas.openxmlformats.org/drawingml/2006/main" noGrp="1"/>
-          </p:cNvSpPr>
-          <p:nvPr/>
-        </p:nvSpPr>
-        <p:spPr>
-          <a:xfrm xmlns:a="http://schemas.openxmlformats.org/drawingml/2006/main">
-            <a:off x="6305550" y="3267075"/>
-            <a:ext cx="476250" cy="228600"/>
-          </a:xfrm>
-          <a:prstGeom xmlns:a="http://schemas.openxmlformats.org/drawingml/2006/main" prst="rect">
-            <a:avLst/>
-          </a:prstGeom>
-          <a:noFill xmlns:a="http://schemas.openxmlformats.org/drawingml/2006/main"/>
-          <a:ln xmlns:a="http://schemas.openxmlformats.org/drawingml/2006/main" w="0">
-            <a:noFill/>
-            <a:prstDash val="solid"/>
-          </a:ln>
-        </p:spPr>
-        <p:txBody>
-          <a:bodyPr xmlns:a="http://schemas.openxmlformats.org/drawingml/2006/main" anchor="ctr"/>
-          <a:lstStyle xmlns:a="http://schemas.openxmlformats.org/drawingml/2006/main"/>
-          <a:p xmlns:a="http://schemas.openxmlformats.org/drawingml/2006/main">
-            <a:pPr algn="ctr">
-              <a:defRPr sz="1125" b="1">
-                <a:solidFill>
-                  <a:srgbClr val="FFFFFF"/>
-                </a:solidFill>
-                <a:latin typeface="Helvetica Neue"/>
-                <a:ea typeface="Helvetica Neue"/>
-                <a:cs typeface="Helvetica Neue"/>
-              </a:defRPr>
-            </a:pPr>
-            <a:r>
-              <a:rPr sz="1125" b="1">
-                <a:solidFill>
-                  <a:srgbClr val="FFFFFF"/>
-                </a:solidFill>
-                <a:latin typeface="Helvetica Neue"/>
-                <a:ea typeface="Helvetica Neue"/>
-                <a:cs typeface="Helvetica Neue"/>
-              </a:rPr>
-              <a:t>03</a:t>
-            </a:r>
-          </a:p>
-        </p:txBody>
-      </p:sp>
-      <p:sp>
-        <p:nvSpPr>
-          <p:cNvPr id="18" name="">
-            <a:extLst xmlns:a="http://schemas.openxmlformats.org/drawingml/2006/main">
-              <a:ext uri="{FF2B5EF4-FFF2-40B4-BE49-F238E27FC236}">
-                <a16:creationId xmlns:a16="http://schemas.microsoft.com/office/drawing/2014/main" id="{F9C3EF17-5431-41DE-9942-F4217DC49A7E}"/>
-              </a:ext>
-            </a:extLst>
-          </p:cNvPr>
-          <p:cNvSpPr>
-            <a:spLocks xmlns:a="http://schemas.openxmlformats.org/drawingml/2006/main" noGrp="1"/>
-          </p:cNvSpPr>
-          <p:nvPr/>
-        </p:nvSpPr>
-        <p:spPr>
-          <a:xfrm xmlns:a="http://schemas.openxmlformats.org/drawingml/2006/main">
-            <a:off x="6305550" y="2343150"/>
-            <a:ext cx="2095500" cy="381000"/>
-          </a:xfrm>
-          <a:prstGeom xmlns:a="http://schemas.openxmlformats.org/drawingml/2006/main" prst="rect">
-            <a:avLst/>
-          </a:prstGeom>
-          <a:noFill xmlns:a="http://schemas.openxmlformats.org/drawingml/2006/main"/>
-          <a:ln xmlns:a="http://schemas.openxmlformats.org/drawingml/2006/main" w="0">
-            <a:noFill/>
-            <a:prstDash val="solid"/>
-          </a:ln>
-        </p:spPr>
-        <p:txBody>
-          <a:bodyPr xmlns:a="http://schemas.openxmlformats.org/drawingml/2006/main" anchor="t"/>
-          <a:lstStyle xmlns:a="http://schemas.openxmlformats.org/drawingml/2006/main"/>
-          <a:p xmlns:a="http://schemas.openxmlformats.org/drawingml/2006/main">
-            <a:pPr algn="l">
-              <a:defRPr sz="1875" b="1">
-                <a:solidFill>
-                  <a:srgbClr val="202124"/>
-                </a:solidFill>
-                <a:latin typeface="Helvetica Neue"/>
-                <a:ea typeface="Helvetica Neue"/>
-                <a:cs typeface="Helvetica Neue"/>
-              </a:defRPr>
-            </a:pPr>
-            <a:r>
-              <a:rPr sz="1875" b="1">
-                <a:solidFill>
-                  <a:srgbClr val="202124"/>
-                </a:solidFill>
-                <a:latin typeface="Helvetica Neue"/>
-                <a:ea typeface="Helvetica Neue"/>
-                <a:cs typeface="Helvetica Neue"/>
-              </a:rPr>
-              <a:t>Django REST</a:t>
-            </a:r>
-          </a:p>
-        </p:txBody>
-      </p:sp>
-      <p:sp>
-        <p:nvSpPr>
-          <p:cNvPr id="19" name="">
-            <a:extLst xmlns:a="http://schemas.openxmlformats.org/drawingml/2006/main">
-              <a:ext uri="{FF2B5EF4-FFF2-40B4-BE49-F238E27FC236}">
-                <a16:creationId xmlns:a16="http://schemas.microsoft.com/office/drawing/2014/main" id="{CC0C73E6-83E4-4256-A8A3-74C6A3B145D4}"/>
-              </a:ext>
-            </a:extLst>
-          </p:cNvPr>
-          <p:cNvSpPr>
-            <a:spLocks xmlns:a="http://schemas.openxmlformats.org/drawingml/2006/main" noGrp="1"/>
-          </p:cNvSpPr>
-          <p:nvPr/>
-        </p:nvSpPr>
-        <p:spPr>
-          <a:xfrm xmlns:a="http://schemas.openxmlformats.org/drawingml/2006/main">
-            <a:off x="6305550" y="3981450"/>
-            <a:ext cx="2095500" cy="723900"/>
-          </a:xfrm>
-          <a:prstGeom xmlns:a="http://schemas.openxmlformats.org/drawingml/2006/main" prst="rect">
-            <a:avLst/>
-          </a:prstGeom>
-          <a:noFill xmlns:a="http://schemas.openxmlformats.org/drawingml/2006/main"/>
-          <a:ln xmlns:a="http://schemas.openxmlformats.org/drawingml/2006/main" w="0">
-            <a:noFill/>
-            <a:prstDash val="solid"/>
-          </a:ln>
-        </p:spPr>
-        <p:txBody>
-          <a:bodyPr xmlns:a="http://schemas.openxmlformats.org/drawingml/2006/main" anchor="t"/>
-          <a:lstStyle xmlns:a="http://schemas.openxmlformats.org/drawingml/2006/main"/>
-          <a:p xmlns:a="http://schemas.openxmlformats.org/drawingml/2006/main">
-            <a:pPr algn="l">
-              <a:defRPr sz="1350" b="0">
-                <a:solidFill>
-                  <a:srgbClr val="62656A"/>
-                </a:solidFill>
-                <a:latin typeface="Helvetica Neue"/>
-                <a:ea typeface="Helvetica Neue"/>
-                <a:cs typeface="Helvetica Neue"/>
-              </a:defRPr>
-            </a:pPr>
-            <a:r>
-              <a:rPr sz="1350" b="0">
-                <a:solidFill>
-                  <a:srgbClr val="62656A"/>
-                </a:solidFill>
-                <a:latin typeface="Helvetica Neue"/>
-                <a:ea typeface="Helvetica Neue"/>
-                <a:cs typeface="Helvetica Neue"/>
-              </a:rPr>
-              <a:t>Validation and</a:t>
-            </a:r>
-          </a:p>
-          <a:p xmlns:a="http://schemas.openxmlformats.org/drawingml/2006/main">
-            <a:pPr algn="l">
-              <a:defRPr sz="1350" b="0">
-                <a:solidFill>
-                  <a:srgbClr val="62656A"/>
-                </a:solidFill>
-                <a:latin typeface="Helvetica Neue"/>
-                <a:ea typeface="Helvetica Neue"/>
-                <a:cs typeface="Helvetica Neue"/>
-              </a:defRPr>
-            </a:pPr>
-            <a:r>
-              <a:rPr sz="1350" b="0">
-                <a:solidFill>
-                  <a:srgbClr val="62656A"/>
-                </a:solidFill>
-                <a:latin typeface="Helvetica Neue"/>
-                <a:ea typeface="Helvetica Neue"/>
-                <a:cs typeface="Helvetica Neue"/>
-              </a:rPr>
-              <a:t>use-case coordination</a:t>
-            </a:r>
-          </a:p>
-        </p:txBody>
-      </p:sp>
-      <p:sp>
-        <p:nvSpPr>
-          <p:cNvPr id="20" name="">
-            <a:extLst xmlns:a="http://schemas.openxmlformats.org/drawingml/2006/main">
-              <a:ext uri="{FF2B5EF4-FFF2-40B4-BE49-F238E27FC236}">
-                <a16:creationId xmlns:a16="http://schemas.microsoft.com/office/drawing/2014/main" id="{630BA40F-EDE9-4DE7-ABD7-079B4CA5C731}"/>
-              </a:ext>
-            </a:extLst>
-          </p:cNvPr>
-          <p:cNvSpPr>
-            <a:spLocks xmlns:a="http://schemas.openxmlformats.org/drawingml/2006/main" noGrp="1"/>
-          </p:cNvSpPr>
-          <p:nvPr/>
-        </p:nvSpPr>
-        <p:spPr>
-          <a:xfrm xmlns:a="http://schemas.openxmlformats.org/drawingml/2006/main">
-            <a:off x="8972550" y="3162300"/>
-            <a:ext cx="476250" cy="476250"/>
-          </a:xfrm>
-          <a:prstGeom xmlns:a="http://schemas.openxmlformats.org/drawingml/2006/main" prst="ellipse">
-            <a:avLst/>
-          </a:prstGeom>
-          <a:solidFill xmlns:a="http://schemas.openxmlformats.org/drawingml/2006/main">
-            <a:srgbClr val="202124"/>
-          </a:solidFill>
-          <a:ln xmlns:a="http://schemas.openxmlformats.org/drawingml/2006/main" w="0">
-            <a:noFill/>
-            <a:prstDash val="solid"/>
-          </a:ln>
-        </p:spPr>
-      </p:sp>
-      <p:sp>
-        <p:nvSpPr>
-          <p:cNvPr id="21" name="">
-            <a:extLst xmlns:a="http://schemas.openxmlformats.org/drawingml/2006/main">
-              <a:ext uri="{FF2B5EF4-FFF2-40B4-BE49-F238E27FC236}">
-                <a16:creationId xmlns:a16="http://schemas.microsoft.com/office/drawing/2014/main" id="{BA91FEB5-8390-4EE8-9921-E333101FC094}"/>
-              </a:ext>
-            </a:extLst>
-          </p:cNvPr>
-          <p:cNvSpPr>
-            <a:spLocks xmlns:a="http://schemas.openxmlformats.org/drawingml/2006/main" noGrp="1"/>
-          </p:cNvSpPr>
-          <p:nvPr/>
-        </p:nvSpPr>
-        <p:spPr>
-          <a:xfrm xmlns:a="http://schemas.openxmlformats.org/drawingml/2006/main">
-            <a:off x="8972550" y="3267075"/>
-            <a:ext cx="476250" cy="228600"/>
-          </a:xfrm>
-          <a:prstGeom xmlns:a="http://schemas.openxmlformats.org/drawingml/2006/main" prst="rect">
-            <a:avLst/>
-          </a:prstGeom>
-          <a:noFill xmlns:a="http://schemas.openxmlformats.org/drawingml/2006/main"/>
-          <a:ln xmlns:a="http://schemas.openxmlformats.org/drawingml/2006/main" w="0">
-            <a:noFill/>
-            <a:prstDash val="solid"/>
-          </a:ln>
-        </p:spPr>
-        <p:txBody>
-          <a:bodyPr xmlns:a="http://schemas.openxmlformats.org/drawingml/2006/main" anchor="ctr"/>
-          <a:lstStyle xmlns:a="http://schemas.openxmlformats.org/drawingml/2006/main"/>
-          <a:p xmlns:a="http://schemas.openxmlformats.org/drawingml/2006/main">
-            <a:pPr algn="ctr">
-              <a:defRPr sz="1125" b="1">
-                <a:solidFill>
-                  <a:srgbClr val="FFFFFF"/>
-                </a:solidFill>
-                <a:latin typeface="Helvetica Neue"/>
-                <a:ea typeface="Helvetica Neue"/>
-                <a:cs typeface="Helvetica Neue"/>
-              </a:defRPr>
-            </a:pPr>
-            <a:r>
-              <a:rPr sz="1125" b="1">
-                <a:solidFill>
-                  <a:srgbClr val="FFFFFF"/>
-                </a:solidFill>
-                <a:latin typeface="Helvetica Neue"/>
-                <a:ea typeface="Helvetica Neue"/>
-                <a:cs typeface="Helvetica Neue"/>
-              </a:rPr>
-              <a:t>04</a:t>
-            </a:r>
-          </a:p>
-        </p:txBody>
-      </p:sp>
-      <p:sp>
-        <p:nvSpPr>
-          <p:cNvPr id="22" name="">
-            <a:extLst xmlns:a="http://schemas.openxmlformats.org/drawingml/2006/main">
-              <a:ext uri="{FF2B5EF4-FFF2-40B4-BE49-F238E27FC236}">
-                <a16:creationId xmlns:a16="http://schemas.microsoft.com/office/drawing/2014/main" id="{A3EA5471-65C6-48F9-A15D-34BE53AF8B24}"/>
-              </a:ext>
-            </a:extLst>
-          </p:cNvPr>
-          <p:cNvSpPr>
-            <a:spLocks xmlns:a="http://schemas.openxmlformats.org/drawingml/2006/main" noGrp="1"/>
-          </p:cNvSpPr>
-          <p:nvPr/>
-        </p:nvSpPr>
-        <p:spPr>
-          <a:xfrm xmlns:a="http://schemas.openxmlformats.org/drawingml/2006/main">
-            <a:off x="8972550" y="2343150"/>
-            <a:ext cx="2095500" cy="381000"/>
-          </a:xfrm>
-          <a:prstGeom xmlns:a="http://schemas.openxmlformats.org/drawingml/2006/main" prst="rect">
-            <a:avLst/>
-          </a:prstGeom>
-          <a:noFill xmlns:a="http://schemas.openxmlformats.org/drawingml/2006/main"/>
-          <a:ln xmlns:a="http://schemas.openxmlformats.org/drawingml/2006/main" w="0">
-            <a:noFill/>
-            <a:prstDash val="solid"/>
-          </a:ln>
-        </p:spPr>
-        <p:txBody>
-          <a:bodyPr xmlns:a="http://schemas.openxmlformats.org/drawingml/2006/main" anchor="t"/>
-          <a:lstStyle xmlns:a="http://schemas.openxmlformats.org/drawingml/2006/main"/>
-          <a:p xmlns:a="http://schemas.openxmlformats.org/drawingml/2006/main">
-            <a:pPr algn="l">
-              <a:defRPr sz="1875" b="1">
-                <a:solidFill>
-                  <a:srgbClr val="202124"/>
-                </a:solidFill>
-                <a:latin typeface="Helvetica Neue"/>
-                <a:ea typeface="Helvetica Neue"/>
-                <a:cs typeface="Helvetica Neue"/>
-              </a:defRPr>
-            </a:pPr>
-            <a:r>
-              <a:rPr sz="1875" b="1">
-                <a:solidFill>
-                  <a:srgbClr val="202124"/>
-                </a:solidFill>
-                <a:latin typeface="Helvetica Neue"/>
-                <a:ea typeface="Helvetica Neue"/>
-                <a:cs typeface="Helvetica Neue"/>
-              </a:rPr>
-              <a:t>ORM + data</a:t>
-            </a:r>
-          </a:p>
-        </p:txBody>
-      </p:sp>
-      <p:sp>
-        <p:nvSpPr>
-          <p:cNvPr id="23" name="">
-            <a:extLst xmlns:a="http://schemas.openxmlformats.org/drawingml/2006/main">
-              <a:ext uri="{FF2B5EF4-FFF2-40B4-BE49-F238E27FC236}">
-                <a16:creationId xmlns:a16="http://schemas.microsoft.com/office/drawing/2014/main" id="{9B501C2E-2BAB-480C-8E55-5B68E362B0C9}"/>
-              </a:ext>
-            </a:extLst>
-          </p:cNvPr>
-          <p:cNvSpPr>
-            <a:spLocks xmlns:a="http://schemas.openxmlformats.org/drawingml/2006/main" noGrp="1"/>
-          </p:cNvSpPr>
-          <p:nvPr/>
-        </p:nvSpPr>
-        <p:spPr>
-          <a:xfrm xmlns:a="http://schemas.openxmlformats.org/drawingml/2006/main">
-            <a:off x="8972550" y="3981450"/>
-            <a:ext cx="2095500" cy="723900"/>
-          </a:xfrm>
-          <a:prstGeom xmlns:a="http://schemas.openxmlformats.org/drawingml/2006/main" prst="rect">
-            <a:avLst/>
-          </a:prstGeom>
-          <a:noFill xmlns:a="http://schemas.openxmlformats.org/drawingml/2006/main"/>
-          <a:ln xmlns:a="http://schemas.openxmlformats.org/drawingml/2006/main" w="0">
-            <a:noFill/>
-            <a:prstDash val="solid"/>
-          </a:ln>
-        </p:spPr>
-        <p:txBody>
-          <a:bodyPr xmlns:a="http://schemas.openxmlformats.org/drawingml/2006/main" anchor="t"/>
-          <a:lstStyle xmlns:a="http://schemas.openxmlformats.org/drawingml/2006/main"/>
-          <a:p xmlns:a="http://schemas.openxmlformats.org/drawingml/2006/main">
-            <a:pPr algn="l">
-              <a:defRPr sz="1350" b="0">
-                <a:solidFill>
-                  <a:srgbClr val="62656A"/>
-                </a:solidFill>
-                <a:latin typeface="Helvetica Neue"/>
-                <a:ea typeface="Helvetica Neue"/>
-                <a:cs typeface="Helvetica Neue"/>
-              </a:defRPr>
-            </a:pPr>
-            <a:r>
-              <a:rPr sz="1350" b="0">
-                <a:solidFill>
-                  <a:srgbClr val="62656A"/>
-                </a:solidFill>
-                <a:latin typeface="Helvetica Neue"/>
-                <a:ea typeface="Helvetica Neue"/>
-                <a:cs typeface="Helvetica Neue"/>
-              </a:rPr>
-              <a:t>SQLite by default;</a:t>
-            </a:r>
-          </a:p>
-          <a:p xmlns:a="http://schemas.openxmlformats.org/drawingml/2006/main">
-            <a:pPr algn="l">
-              <a:defRPr sz="1350" b="0">
-                <a:solidFill>
-                  <a:srgbClr val="62656A"/>
-                </a:solidFill>
-                <a:latin typeface="Helvetica Neue"/>
-                <a:ea typeface="Helvetica Neue"/>
-                <a:cs typeface="Helvetica Neue"/>
-              </a:defRPr>
-            </a:pPr>
-            <a:r>
-              <a:rPr sz="1350" b="0">
-                <a:solidFill>
-                  <a:srgbClr val="62656A"/>
-                </a:solidFill>
-                <a:latin typeface="Helvetica Neue"/>
-                <a:ea typeface="Helvetica Neue"/>
-                <a:cs typeface="Helvetica Neue"/>
-              </a:rPr>
-              <a:t>PostgreSQL by config</a:t>
-            </a:r>
-          </a:p>
-        </p:txBody>
-      </p:sp>
-      <p:sp>
-        <p:nvSpPr>
-          <p:cNvPr id="24" name="">
-            <a:extLst xmlns:a="http://schemas.openxmlformats.org/drawingml/2006/main">
-              <a:ext uri="{FF2B5EF4-FFF2-40B4-BE49-F238E27FC236}">
-                <a16:creationId xmlns:a16="http://schemas.microsoft.com/office/drawing/2014/main" id="{7DE491C9-F798-4DE3-98BB-96D7B0D1927F}"/>
-              </a:ext>
-            </a:extLst>
-          </p:cNvPr>
-          <p:cNvSpPr>
-            <a:spLocks xmlns:a="http://schemas.openxmlformats.org/drawingml/2006/main" noGrp="1"/>
-          </p:cNvSpPr>
-          <p:nvPr/>
-        </p:nvSpPr>
-        <p:spPr>
-          <a:xfrm xmlns:a="http://schemas.openxmlformats.org/drawingml/2006/main">
-            <a:off x="685800" y="5543550"/>
-            <a:ext cx="9525000" cy="342900"/>
-          </a:xfrm>
-          <a:prstGeom xmlns:a="http://schemas.openxmlformats.org/drawingml/2006/main" prst="rect">
-            <a:avLst/>
-          </a:prstGeom>
-          <a:noFill xmlns:a="http://schemas.openxmlformats.org/drawingml/2006/main"/>
-          <a:ln xmlns:a="http://schemas.openxmlformats.org/drawingml/2006/main" w="0">
-            <a:noFill/>
-            <a:prstDash val="solid"/>
-          </a:ln>
-        </p:spPr>
-        <p:txBody>
-          <a:bodyPr xmlns:a="http://schemas.openxmlformats.org/drawingml/2006/main" anchor="t"/>
-          <a:lstStyle xmlns:a="http://schemas.openxmlformats.org/drawingml/2006/main"/>
-          <a:p xmlns:a="http://schemas.openxmlformats.org/drawingml/2006/main">
-            <a:pPr algn="l">
-              <a:defRPr sz="1650" b="1">
-                <a:solidFill>
-                  <a:srgbClr val="B64F00"/>
-                </a:solidFill>
-                <a:latin typeface="Helvetica Neue"/>
-                <a:ea typeface="Helvetica Neue"/>
-                <a:cs typeface="Helvetica Neue"/>
-              </a:defRPr>
-            </a:pPr>
-            <a:r>
-              <a:rPr sz="1650" b="1">
-                <a:solidFill>
-                  <a:srgbClr val="B64F00"/>
-                </a:solidFill>
-                <a:latin typeface="Helvetica Neue"/>
-                <a:ea typeface="Helvetica Neue"/>
-                <a:cs typeface="Helvetica Neue"/>
-              </a:rPr>
-              <a:t>PostgreSQL support is configuration, not a second code path.</a:t>
+              <a:t>No speculative services, state library, or delete workflow.</a:t>
             </a:r>
           </a:p>
         </p:txBody>
@@ -5355,7 +4588,7 @@
     </p:spTree>
     <p:extLst>
       <p:ext uri="{BB962C8B-B14F-4D97-AF65-F5344CB8AC3E}">
-        <p14:creationId xmlns:p14="http://schemas.microsoft.com/office/powerpoint/2010/main" val="2063204130"/>
+        <p14:creationId xmlns:p14="http://schemas.microsoft.com/office/powerpoint/2010/main" val="2071400373"/>
       </p:ext>
     </p:extLst>
   </p:cSld>
@@ -5383,10 +4616,10 @@
       </p:grpSpPr>
       <p:sp>
         <p:nvSpPr>
-          <p:cNvPr id="21" name="slide-5-title">
-            <a:extLst xmlns:a="http://schemas.openxmlformats.org/drawingml/2006/main">
-              <a:ext uri="{FF2B5EF4-FFF2-40B4-BE49-F238E27FC236}">
-                <a16:creationId xmlns:a16="http://schemas.microsoft.com/office/drawing/2014/main" id="{58E18E9A-2EB2-4412-928A-6B1D7A8E6868}"/>
+          <p:cNvPr id="25" name="slide-4-title">
+            <a:extLst xmlns:a="http://schemas.openxmlformats.org/drawingml/2006/main">
+              <a:ext uri="{FF2B5EF4-FFF2-40B4-BE49-F238E27FC236}">
+                <a16:creationId xmlns:a16="http://schemas.microsoft.com/office/drawing/2014/main" id="{68448ACC-40DD-46E4-9EED-803F6932AE19}"/>
               </a:ext>
             </a:extLst>
           </p:cNvPr>
@@ -5414,6 +4647,7 @@
           <a:lstStyle xmlns:a="http://schemas.openxmlformats.org/drawingml/2006/main"/>
           <a:p xmlns:a="http://schemas.openxmlformats.org/drawingml/2006/main">
             <a:pPr algn="l">
+              <a:buNone/>
               <a:defRPr sz="3150" b="1">
                 <a:solidFill>
                   <a:srgbClr val="202124"/>
@@ -5432,7 +4666,7 @@
                 <a:ea typeface="Helvetica Neue"/>
                 <a:cs typeface="Helvetica Neue"/>
               </a:rPr>
-              <a:t>Quality is visible at every layer.</a:t>
+              <a:t>Clear boundaries keep changes local.</a:t>
             </a:r>
           </a:p>
         </p:txBody>
@@ -5442,7 +4676,7 @@
           <p:cNvPr id="2" name="">
             <a:extLst xmlns:a="http://schemas.openxmlformats.org/drawingml/2006/main">
               <a:ext uri="{FF2B5EF4-FFF2-40B4-BE49-F238E27FC236}">
-                <a16:creationId xmlns:a16="http://schemas.microsoft.com/office/drawing/2014/main" id="{AAB263A3-3A41-49D7-93EF-C0C630928CEF}"/>
+                <a16:creationId xmlns:a16="http://schemas.microsoft.com/office/drawing/2014/main" id="{7E72E872-9357-48F1-8BB0-0864ECA45F3E}"/>
               </a:ext>
             </a:extLst>
           </p:cNvPr>
@@ -5470,10 +4704,10 @@
       </p:sp>
       <p:sp>
         <p:nvSpPr>
-          <p:cNvPr id="3" name="slide-5-number">
-            <a:extLst xmlns:a="http://schemas.openxmlformats.org/drawingml/2006/main">
-              <a:ext uri="{FF2B5EF4-FFF2-40B4-BE49-F238E27FC236}">
-                <a16:creationId xmlns:a16="http://schemas.microsoft.com/office/drawing/2014/main" id="{62D19269-EBD9-4E33-85F3-EF91DA2541DE}"/>
+          <p:cNvPr id="3" name="slide-4-number">
+            <a:extLst xmlns:a="http://schemas.openxmlformats.org/drawingml/2006/main">
+              <a:ext uri="{FF2B5EF4-FFF2-40B4-BE49-F238E27FC236}">
+                <a16:creationId xmlns:a16="http://schemas.microsoft.com/office/drawing/2014/main" id="{61F90328-B5EF-4ED6-8FEF-669B333AD3CD}"/>
               </a:ext>
             </a:extLst>
           </p:cNvPr>
@@ -5501,6 +4735,7 @@
           <a:lstStyle xmlns:a="http://schemas.openxmlformats.org/drawingml/2006/main"/>
           <a:p xmlns:a="http://schemas.openxmlformats.org/drawingml/2006/main">
             <a:pPr algn="r">
+              <a:buNone/>
               <a:defRPr sz="1050" b="0">
                 <a:solidFill>
                   <a:srgbClr val="62656A"/>
@@ -5529,7 +4764,7 @@
           <p:cNvPr id="4" name="">
             <a:extLst xmlns:a="http://schemas.openxmlformats.org/drawingml/2006/main">
               <a:ext uri="{FF2B5EF4-FFF2-40B4-BE49-F238E27FC236}">
-                <a16:creationId xmlns:a16="http://schemas.microsoft.com/office/drawing/2014/main" id="{BA04B49F-8919-42BE-AD9D-D6510ADF9977}"/>
+                <a16:creationId xmlns:a16="http://schemas.microsoft.com/office/drawing/2014/main" id="{7AEAD698-8957-42BF-9179-82B4599331AA}"/>
               </a:ext>
             </a:extLst>
           </p:cNvPr>
@@ -5557,6 +4792,7 @@
           <a:lstStyle xmlns:a="http://schemas.openxmlformats.org/drawingml/2006/main"/>
           <a:p xmlns:a="http://schemas.openxmlformats.org/drawingml/2006/main">
             <a:pPr algn="l">
+              <a:buNone/>
               <a:defRPr sz="1650" b="0">
                 <a:solidFill>
                   <a:srgbClr val="62656A"/>
@@ -5575,35 +4811,101 @@
                 <a:ea typeface="Helvetica Neue"/>
                 <a:cs typeface="Helvetica Neue"/>
               </a:rPr>
-              <a:t>The same fast checks run locally and in GitHub Actions, supported by hands-on browser QA.</a:t>
-            </a:r>
-          </a:p>
-        </p:txBody>
-      </p:sp>
-      <p:sp>
-        <p:nvSpPr>
-          <p:cNvPr id="5" name="">
-            <a:extLst xmlns:a="http://schemas.openxmlformats.org/drawingml/2006/main">
-              <a:ext uri="{FF2B5EF4-FFF2-40B4-BE49-F238E27FC236}">
-                <a16:creationId xmlns:a16="http://schemas.microsoft.com/office/drawing/2014/main" id="{EB284E9B-FE1C-47D8-B07C-23D5C724D5C5}"/>
-              </a:ext>
-            </a:extLst>
-          </p:cNvPr>
-          <p:cNvSpPr>
-            <a:spLocks xmlns:a="http://schemas.openxmlformats.org/drawingml/2006/main" noGrp="1"/>
-          </p:cNvSpPr>
-          <p:nvPr/>
-        </p:nvSpPr>
-        <p:spPr>
-          <a:xfrm xmlns:a="http://schemas.openxmlformats.org/drawingml/2006/main">
-            <a:off x="685800" y="2714625"/>
-            <a:ext cx="3200400" cy="2762250"/>
-          </a:xfrm>
-          <a:prstGeom xmlns:a="http://schemas.openxmlformats.org/drawingml/2006/main" prst="rect">
+              <a:t>Each layer has one job, and every boundary is replaceable without rewriting the rest.</a:t>
+            </a:r>
+          </a:p>
+        </p:txBody>
+      </p:sp>
+      <p:cxnSp>
+        <p:nvCxnSpPr>
+          <p:cNvPr id="36" name=""/>
+          <p:cNvCxnSpPr/>
+          <p:nvPr/>
+        </p:nvCxnSpPr>
+        <p:spPr>
+          <a:xfrm xmlns:a="http://schemas.openxmlformats.org/drawingml/2006/main">
+            <a:off x="2114550" y="3400425"/>
+            <a:ext cx="1524000" cy="0"/>
+          </a:xfrm>
+          <a:prstGeom xmlns:a="http://schemas.openxmlformats.org/drawingml/2006/main" prst="straightConnector1">
+            <a:avLst/>
+          </a:prstGeom>
+          <a:ln xmlns:a="http://schemas.openxmlformats.org/drawingml/2006/main" w="28575">
+            <a:solidFill>
+              <a:srgbClr val="D4D4D0"/>
+            </a:solidFill>
+            <a:prstDash val="solid"/>
+          </a:ln>
+        </p:spPr>
+      </p:cxnSp>
+      <p:cxnSp>
+        <p:nvCxnSpPr>
+          <p:cNvPr id="37" name=""/>
+          <p:cNvCxnSpPr/>
+          <p:nvPr/>
+        </p:nvCxnSpPr>
+        <p:spPr>
+          <a:xfrm xmlns:a="http://schemas.openxmlformats.org/drawingml/2006/main">
+            <a:off x="4781550" y="3400425"/>
+            <a:ext cx="1524000" cy="0"/>
+          </a:xfrm>
+          <a:prstGeom xmlns:a="http://schemas.openxmlformats.org/drawingml/2006/main" prst="straightConnector1">
+            <a:avLst/>
+          </a:prstGeom>
+          <a:ln xmlns:a="http://schemas.openxmlformats.org/drawingml/2006/main" w="28575">
+            <a:solidFill>
+              <a:srgbClr val="D4D4D0"/>
+            </a:solidFill>
+            <a:prstDash val="solid"/>
+          </a:ln>
+        </p:spPr>
+      </p:cxnSp>
+      <p:cxnSp>
+        <p:nvCxnSpPr>
+          <p:cNvPr id="38" name=""/>
+          <p:cNvCxnSpPr/>
+          <p:nvPr/>
+        </p:nvCxnSpPr>
+        <p:spPr>
+          <a:xfrm xmlns:a="http://schemas.openxmlformats.org/drawingml/2006/main">
+            <a:off x="7448550" y="3400425"/>
+            <a:ext cx="1524000" cy="0"/>
+          </a:xfrm>
+          <a:prstGeom xmlns:a="http://schemas.openxmlformats.org/drawingml/2006/main" prst="straightConnector1">
+            <a:avLst/>
+          </a:prstGeom>
+          <a:ln xmlns:a="http://schemas.openxmlformats.org/drawingml/2006/main" w="28575">
+            <a:solidFill>
+              <a:srgbClr val="D4D4D0"/>
+            </a:solidFill>
+            <a:prstDash val="solid"/>
+          </a:ln>
+        </p:spPr>
+      </p:cxnSp>
+      <p:sp>
+        <p:nvSpPr>
+          <p:cNvPr id="8" name="">
+            <a:extLst xmlns:a="http://schemas.openxmlformats.org/drawingml/2006/main">
+              <a:ext uri="{FF2B5EF4-FFF2-40B4-BE49-F238E27FC236}">
+                <a16:creationId xmlns:a16="http://schemas.microsoft.com/office/drawing/2014/main" id="{357A9562-5053-40E1-8287-78FCC2076FF3}"/>
+              </a:ext>
+            </a:extLst>
+          </p:cNvPr>
+          <p:cNvSpPr>
+            <a:spLocks xmlns:a="http://schemas.openxmlformats.org/drawingml/2006/main" noGrp="1"/>
+          </p:cNvSpPr>
+          <p:nvPr/>
+        </p:nvSpPr>
+        <p:spPr>
+          <a:xfrm xmlns:a="http://schemas.openxmlformats.org/drawingml/2006/main">
+            <a:off x="971550" y="3162300"/>
+            <a:ext cx="476250" cy="476250"/>
+          </a:xfrm>
+          <a:prstGeom xmlns:a="http://schemas.openxmlformats.org/drawingml/2006/main" prst="ellipse">
             <a:avLst/>
           </a:prstGeom>
           <a:solidFill xmlns:a="http://schemas.openxmlformats.org/drawingml/2006/main">
-            <a:srgbClr val="F1F1EF"/>
+            <a:srgbClr val="202124"/>
           </a:solidFill>
           <a:ln xmlns:a="http://schemas.openxmlformats.org/drawingml/2006/main" w="0">
             <a:noFill/>
@@ -5613,24 +4915,445 @@
       </p:sp>
       <p:sp>
         <p:nvSpPr>
-          <p:cNvPr id="6" name="">
-            <a:extLst xmlns:a="http://schemas.openxmlformats.org/drawingml/2006/main">
-              <a:ext uri="{FF2B5EF4-FFF2-40B4-BE49-F238E27FC236}">
-                <a16:creationId xmlns:a16="http://schemas.microsoft.com/office/drawing/2014/main" id="{F01CDCD2-7887-416C-B0B9-937BDF276638}"/>
-              </a:ext>
-            </a:extLst>
-          </p:cNvPr>
-          <p:cNvSpPr>
-            <a:spLocks xmlns:a="http://schemas.openxmlformats.org/drawingml/2006/main" noGrp="1"/>
-          </p:cNvSpPr>
-          <p:nvPr/>
-        </p:nvSpPr>
-        <p:spPr>
-          <a:xfrm xmlns:a="http://schemas.openxmlformats.org/drawingml/2006/main">
-            <a:off x="685800" y="2714625"/>
-            <a:ext cx="3200400" cy="57150"/>
-          </a:xfrm>
-          <a:prstGeom xmlns:a="http://schemas.openxmlformats.org/drawingml/2006/main" prst="rect">
+          <p:cNvPr id="9" name="">
+            <a:extLst xmlns:a="http://schemas.openxmlformats.org/drawingml/2006/main">
+              <a:ext uri="{FF2B5EF4-FFF2-40B4-BE49-F238E27FC236}">
+                <a16:creationId xmlns:a16="http://schemas.microsoft.com/office/drawing/2014/main" id="{818A17E5-AE69-4729-9CD4-87ED8582B3E8}"/>
+              </a:ext>
+            </a:extLst>
+          </p:cNvPr>
+          <p:cNvSpPr>
+            <a:spLocks xmlns:a="http://schemas.openxmlformats.org/drawingml/2006/main" noGrp="1"/>
+          </p:cNvSpPr>
+          <p:nvPr/>
+        </p:nvSpPr>
+        <p:spPr>
+          <a:xfrm xmlns:a="http://schemas.openxmlformats.org/drawingml/2006/main">
+            <a:off x="971550" y="3267075"/>
+            <a:ext cx="476250" cy="228600"/>
+          </a:xfrm>
+          <a:prstGeom xmlns:a="http://schemas.openxmlformats.org/drawingml/2006/main" prst="rect">
+            <a:avLst/>
+          </a:prstGeom>
+          <a:noFill xmlns:a="http://schemas.openxmlformats.org/drawingml/2006/main"/>
+          <a:ln xmlns:a="http://schemas.openxmlformats.org/drawingml/2006/main" w="0">
+            <a:noFill/>
+            <a:prstDash val="solid"/>
+          </a:ln>
+        </p:spPr>
+        <p:txBody>
+          <a:bodyPr xmlns:a="http://schemas.openxmlformats.org/drawingml/2006/main" anchor="ctr"/>
+          <a:lstStyle xmlns:a="http://schemas.openxmlformats.org/drawingml/2006/main"/>
+          <a:p xmlns:a="http://schemas.openxmlformats.org/drawingml/2006/main">
+            <a:pPr algn="ctr">
+              <a:buNone/>
+              <a:defRPr sz="1125" b="1">
+                <a:solidFill>
+                  <a:srgbClr val="FFFFFF"/>
+                </a:solidFill>
+                <a:latin typeface="Helvetica Neue"/>
+                <a:ea typeface="Helvetica Neue"/>
+                <a:cs typeface="Helvetica Neue"/>
+              </a:defRPr>
+            </a:pPr>
+            <a:r>
+              <a:rPr sz="1125" b="1">
+                <a:solidFill>
+                  <a:srgbClr val="FFFFFF"/>
+                </a:solidFill>
+                <a:latin typeface="Helvetica Neue"/>
+                <a:ea typeface="Helvetica Neue"/>
+                <a:cs typeface="Helvetica Neue"/>
+              </a:rPr>
+              <a:t>01</a:t>
+            </a:r>
+          </a:p>
+        </p:txBody>
+      </p:sp>
+      <p:sp>
+        <p:nvSpPr>
+          <p:cNvPr id="10" name="">
+            <a:extLst xmlns:a="http://schemas.openxmlformats.org/drawingml/2006/main">
+              <a:ext uri="{FF2B5EF4-FFF2-40B4-BE49-F238E27FC236}">
+                <a16:creationId xmlns:a16="http://schemas.microsoft.com/office/drawing/2014/main" id="{237692E1-9821-48E9-BC7A-96D263BDEED7}"/>
+              </a:ext>
+            </a:extLst>
+          </p:cNvPr>
+          <p:cNvSpPr>
+            <a:spLocks xmlns:a="http://schemas.openxmlformats.org/drawingml/2006/main" noGrp="1"/>
+          </p:cNvSpPr>
+          <p:nvPr/>
+        </p:nvSpPr>
+        <p:spPr>
+          <a:xfrm xmlns:a="http://schemas.openxmlformats.org/drawingml/2006/main">
+            <a:off x="971550" y="2343150"/>
+            <a:ext cx="2095500" cy="381000"/>
+          </a:xfrm>
+          <a:prstGeom xmlns:a="http://schemas.openxmlformats.org/drawingml/2006/main" prst="rect">
+            <a:avLst/>
+          </a:prstGeom>
+          <a:noFill xmlns:a="http://schemas.openxmlformats.org/drawingml/2006/main"/>
+          <a:ln xmlns:a="http://schemas.openxmlformats.org/drawingml/2006/main" w="0">
+            <a:noFill/>
+            <a:prstDash val="solid"/>
+          </a:ln>
+        </p:spPr>
+        <p:txBody>
+          <a:bodyPr xmlns:a="http://schemas.openxmlformats.org/drawingml/2006/main" anchor="t"/>
+          <a:lstStyle xmlns:a="http://schemas.openxmlformats.org/drawingml/2006/main"/>
+          <a:p xmlns:a="http://schemas.openxmlformats.org/drawingml/2006/main">
+            <a:pPr algn="l">
+              <a:buNone/>
+              <a:defRPr sz="1875" b="1">
+                <a:solidFill>
+                  <a:srgbClr val="202124"/>
+                </a:solidFill>
+                <a:latin typeface="Helvetica Neue"/>
+                <a:ea typeface="Helvetica Neue"/>
+                <a:cs typeface="Helvetica Neue"/>
+              </a:defRPr>
+            </a:pPr>
+            <a:r>
+              <a:rPr sz="1875" b="1">
+                <a:solidFill>
+                  <a:srgbClr val="202124"/>
+                </a:solidFill>
+                <a:latin typeface="Helvetica Neue"/>
+                <a:ea typeface="Helvetica Neue"/>
+                <a:cs typeface="Helvetica Neue"/>
+              </a:rPr>
+              <a:t>React UI</a:t>
+            </a:r>
+          </a:p>
+        </p:txBody>
+      </p:sp>
+      <p:sp>
+        <p:nvSpPr>
+          <p:cNvPr id="11" name="">
+            <a:extLst xmlns:a="http://schemas.openxmlformats.org/drawingml/2006/main">
+              <a:ext uri="{FF2B5EF4-FFF2-40B4-BE49-F238E27FC236}">
+                <a16:creationId xmlns:a16="http://schemas.microsoft.com/office/drawing/2014/main" id="{0A966911-0058-4547-AED3-7A38F7DF6878}"/>
+              </a:ext>
+            </a:extLst>
+          </p:cNvPr>
+          <p:cNvSpPr>
+            <a:spLocks xmlns:a="http://schemas.openxmlformats.org/drawingml/2006/main" noGrp="1"/>
+          </p:cNvSpPr>
+          <p:nvPr/>
+        </p:nvSpPr>
+        <p:spPr>
+          <a:xfrm xmlns:a="http://schemas.openxmlformats.org/drawingml/2006/main">
+            <a:off x="971550" y="3981450"/>
+            <a:ext cx="2095500" cy="723900"/>
+          </a:xfrm>
+          <a:prstGeom xmlns:a="http://schemas.openxmlformats.org/drawingml/2006/main" prst="rect">
+            <a:avLst/>
+          </a:prstGeom>
+          <a:noFill xmlns:a="http://schemas.openxmlformats.org/drawingml/2006/main"/>
+          <a:ln xmlns:a="http://schemas.openxmlformats.org/drawingml/2006/main" w="0">
+            <a:noFill/>
+            <a:prstDash val="solid"/>
+          </a:ln>
+        </p:spPr>
+        <p:txBody>
+          <a:bodyPr xmlns:a="http://schemas.openxmlformats.org/drawingml/2006/main" anchor="t"/>
+          <a:lstStyle xmlns:a="http://schemas.openxmlformats.org/drawingml/2006/main"/>
+          <a:p xmlns:a="http://schemas.openxmlformats.org/drawingml/2006/main">
+            <a:pPr algn="l">
+              <a:buNone/>
+              <a:defRPr sz="1350" b="0">
+                <a:solidFill>
+                  <a:srgbClr val="62656A"/>
+                </a:solidFill>
+                <a:latin typeface="Helvetica Neue"/>
+                <a:ea typeface="Helvetica Neue"/>
+                <a:cs typeface="Helvetica Neue"/>
+              </a:defRPr>
+            </a:pPr>
+            <a:r>
+              <a:rPr sz="1350" b="0">
+                <a:solidFill>
+                  <a:srgbClr val="62656A"/>
+                </a:solidFill>
+                <a:latin typeface="Helvetica Neue"/>
+                <a:ea typeface="Helvetica Neue"/>
+                <a:cs typeface="Helvetica Neue"/>
+              </a:rPr>
+              <a:t>Accessible interaction</a:t>
+            </a:r>
+          </a:p>
+          <a:p xmlns:a="http://schemas.openxmlformats.org/drawingml/2006/main">
+            <a:pPr algn="l">
+              <a:buNone/>
+              <a:defRPr sz="1350" b="0">
+                <a:solidFill>
+                  <a:srgbClr val="62656A"/>
+                </a:solidFill>
+                <a:latin typeface="Helvetica Neue"/>
+                <a:ea typeface="Helvetica Neue"/>
+                <a:cs typeface="Helvetica Neue"/>
+              </a:defRPr>
+            </a:pPr>
+            <a:r>
+              <a:rPr sz="1350" b="0">
+                <a:solidFill>
+                  <a:srgbClr val="62656A"/>
+                </a:solidFill>
+                <a:latin typeface="Helvetica Neue"/>
+                <a:ea typeface="Helvetica Neue"/>
+                <a:cs typeface="Helvetica Neue"/>
+              </a:rPr>
+              <a:t>and responsive views</a:t>
+            </a:r>
+          </a:p>
+        </p:txBody>
+      </p:sp>
+      <p:sp>
+        <p:nvSpPr>
+          <p:cNvPr id="12" name="">
+            <a:extLst xmlns:a="http://schemas.openxmlformats.org/drawingml/2006/main">
+              <a:ext uri="{FF2B5EF4-FFF2-40B4-BE49-F238E27FC236}">
+                <a16:creationId xmlns:a16="http://schemas.microsoft.com/office/drawing/2014/main" id="{82A1A995-2FF9-43E5-AF55-0353724FA0E7}"/>
+              </a:ext>
+            </a:extLst>
+          </p:cNvPr>
+          <p:cNvSpPr>
+            <a:spLocks xmlns:a="http://schemas.openxmlformats.org/drawingml/2006/main" noGrp="1"/>
+          </p:cNvSpPr>
+          <p:nvPr/>
+        </p:nvSpPr>
+        <p:spPr>
+          <a:xfrm xmlns:a="http://schemas.openxmlformats.org/drawingml/2006/main">
+            <a:off x="3638550" y="3162300"/>
+            <a:ext cx="476250" cy="476250"/>
+          </a:xfrm>
+          <a:prstGeom xmlns:a="http://schemas.openxmlformats.org/drawingml/2006/main" prst="ellipse">
+            <a:avLst/>
+          </a:prstGeom>
+          <a:solidFill xmlns:a="http://schemas.openxmlformats.org/drawingml/2006/main">
+            <a:srgbClr val="202124"/>
+          </a:solidFill>
+          <a:ln xmlns:a="http://schemas.openxmlformats.org/drawingml/2006/main" w="0">
+            <a:noFill/>
+            <a:prstDash val="solid"/>
+          </a:ln>
+        </p:spPr>
+      </p:sp>
+      <p:sp>
+        <p:nvSpPr>
+          <p:cNvPr id="13" name="">
+            <a:extLst xmlns:a="http://schemas.openxmlformats.org/drawingml/2006/main">
+              <a:ext uri="{FF2B5EF4-FFF2-40B4-BE49-F238E27FC236}">
+                <a16:creationId xmlns:a16="http://schemas.microsoft.com/office/drawing/2014/main" id="{EB1AB5BC-B0FD-4FF3-938E-C597A35E377E}"/>
+              </a:ext>
+            </a:extLst>
+          </p:cNvPr>
+          <p:cNvSpPr>
+            <a:spLocks xmlns:a="http://schemas.openxmlformats.org/drawingml/2006/main" noGrp="1"/>
+          </p:cNvSpPr>
+          <p:nvPr/>
+        </p:nvSpPr>
+        <p:spPr>
+          <a:xfrm xmlns:a="http://schemas.openxmlformats.org/drawingml/2006/main">
+            <a:off x="3638550" y="3267075"/>
+            <a:ext cx="476250" cy="228600"/>
+          </a:xfrm>
+          <a:prstGeom xmlns:a="http://schemas.openxmlformats.org/drawingml/2006/main" prst="rect">
+            <a:avLst/>
+          </a:prstGeom>
+          <a:noFill xmlns:a="http://schemas.openxmlformats.org/drawingml/2006/main"/>
+          <a:ln xmlns:a="http://schemas.openxmlformats.org/drawingml/2006/main" w="0">
+            <a:noFill/>
+            <a:prstDash val="solid"/>
+          </a:ln>
+        </p:spPr>
+        <p:txBody>
+          <a:bodyPr xmlns:a="http://schemas.openxmlformats.org/drawingml/2006/main" anchor="ctr"/>
+          <a:lstStyle xmlns:a="http://schemas.openxmlformats.org/drawingml/2006/main"/>
+          <a:p xmlns:a="http://schemas.openxmlformats.org/drawingml/2006/main">
+            <a:pPr algn="ctr">
+              <a:buNone/>
+              <a:defRPr sz="1125" b="1">
+                <a:solidFill>
+                  <a:srgbClr val="FFFFFF"/>
+                </a:solidFill>
+                <a:latin typeface="Helvetica Neue"/>
+                <a:ea typeface="Helvetica Neue"/>
+                <a:cs typeface="Helvetica Neue"/>
+              </a:defRPr>
+            </a:pPr>
+            <a:r>
+              <a:rPr sz="1125" b="1">
+                <a:solidFill>
+                  <a:srgbClr val="FFFFFF"/>
+                </a:solidFill>
+                <a:latin typeface="Helvetica Neue"/>
+                <a:ea typeface="Helvetica Neue"/>
+                <a:cs typeface="Helvetica Neue"/>
+              </a:rPr>
+              <a:t>02</a:t>
+            </a:r>
+          </a:p>
+        </p:txBody>
+      </p:sp>
+      <p:sp>
+        <p:nvSpPr>
+          <p:cNvPr id="14" name="">
+            <a:extLst xmlns:a="http://schemas.openxmlformats.org/drawingml/2006/main">
+              <a:ext uri="{FF2B5EF4-FFF2-40B4-BE49-F238E27FC236}">
+                <a16:creationId xmlns:a16="http://schemas.microsoft.com/office/drawing/2014/main" id="{87C6E59E-968E-456C-B2A8-54C53A6BEA1C}"/>
+              </a:ext>
+            </a:extLst>
+          </p:cNvPr>
+          <p:cNvSpPr>
+            <a:spLocks xmlns:a="http://schemas.openxmlformats.org/drawingml/2006/main" noGrp="1"/>
+          </p:cNvSpPr>
+          <p:nvPr/>
+        </p:nvSpPr>
+        <p:spPr>
+          <a:xfrm xmlns:a="http://schemas.openxmlformats.org/drawingml/2006/main">
+            <a:off x="3638550" y="2343150"/>
+            <a:ext cx="2095500" cy="381000"/>
+          </a:xfrm>
+          <a:prstGeom xmlns:a="http://schemas.openxmlformats.org/drawingml/2006/main" prst="rect">
+            <a:avLst/>
+          </a:prstGeom>
+          <a:noFill xmlns:a="http://schemas.openxmlformats.org/drawingml/2006/main"/>
+          <a:ln xmlns:a="http://schemas.openxmlformats.org/drawingml/2006/main" w="0">
+            <a:noFill/>
+            <a:prstDash val="solid"/>
+          </a:ln>
+        </p:spPr>
+        <p:txBody>
+          <a:bodyPr xmlns:a="http://schemas.openxmlformats.org/drawingml/2006/main" anchor="t"/>
+          <a:lstStyle xmlns:a="http://schemas.openxmlformats.org/drawingml/2006/main"/>
+          <a:p xmlns:a="http://schemas.openxmlformats.org/drawingml/2006/main">
+            <a:pPr algn="l">
+              <a:buNone/>
+              <a:defRPr sz="1875" b="1">
+                <a:solidFill>
+                  <a:srgbClr val="202124"/>
+                </a:solidFill>
+                <a:latin typeface="Helvetica Neue"/>
+                <a:ea typeface="Helvetica Neue"/>
+                <a:cs typeface="Helvetica Neue"/>
+              </a:defRPr>
+            </a:pPr>
+            <a:r>
+              <a:rPr sz="1875" b="1">
+                <a:solidFill>
+                  <a:srgbClr val="202124"/>
+                </a:solidFill>
+                <a:latin typeface="Helvetica Neue"/>
+                <a:ea typeface="Helvetica Neue"/>
+                <a:cs typeface="Helvetica Neue"/>
+              </a:rPr>
+              <a:t>API service</a:t>
+            </a:r>
+          </a:p>
+        </p:txBody>
+      </p:sp>
+      <p:sp>
+        <p:nvSpPr>
+          <p:cNvPr id="15" name="">
+            <a:extLst xmlns:a="http://schemas.openxmlformats.org/drawingml/2006/main">
+              <a:ext uri="{FF2B5EF4-FFF2-40B4-BE49-F238E27FC236}">
+                <a16:creationId xmlns:a16="http://schemas.microsoft.com/office/drawing/2014/main" id="{DE4E0CE2-6098-47CC-B42E-C76DC728281D}"/>
+              </a:ext>
+            </a:extLst>
+          </p:cNvPr>
+          <p:cNvSpPr>
+            <a:spLocks xmlns:a="http://schemas.openxmlformats.org/drawingml/2006/main" noGrp="1"/>
+          </p:cNvSpPr>
+          <p:nvPr/>
+        </p:nvSpPr>
+        <p:spPr>
+          <a:xfrm xmlns:a="http://schemas.openxmlformats.org/drawingml/2006/main">
+            <a:off x="3638550" y="3981450"/>
+            <a:ext cx="2095500" cy="723900"/>
+          </a:xfrm>
+          <a:prstGeom xmlns:a="http://schemas.openxmlformats.org/drawingml/2006/main" prst="rect">
+            <a:avLst/>
+          </a:prstGeom>
+          <a:noFill xmlns:a="http://schemas.openxmlformats.org/drawingml/2006/main"/>
+          <a:ln xmlns:a="http://schemas.openxmlformats.org/drawingml/2006/main" w="0">
+            <a:noFill/>
+            <a:prstDash val="solid"/>
+          </a:ln>
+        </p:spPr>
+        <p:txBody>
+          <a:bodyPr xmlns:a="http://schemas.openxmlformats.org/drawingml/2006/main" anchor="t"/>
+          <a:lstStyle xmlns:a="http://schemas.openxmlformats.org/drawingml/2006/main"/>
+          <a:p xmlns:a="http://schemas.openxmlformats.org/drawingml/2006/main">
+            <a:pPr algn="l">
+              <a:buNone/>
+              <a:defRPr sz="1350" b="0">
+                <a:solidFill>
+                  <a:srgbClr val="62656A"/>
+                </a:solidFill>
+                <a:latin typeface="Helvetica Neue"/>
+                <a:ea typeface="Helvetica Neue"/>
+                <a:cs typeface="Helvetica Neue"/>
+              </a:defRPr>
+            </a:pPr>
+            <a:r>
+              <a:rPr sz="1350" b="0">
+                <a:solidFill>
+                  <a:srgbClr val="62656A"/>
+                </a:solidFill>
+                <a:latin typeface="Helvetica Neue"/>
+                <a:ea typeface="Helvetica Neue"/>
+                <a:cs typeface="Helvetica Neue"/>
+              </a:rPr>
+              <a:t>Typed transport and</a:t>
+            </a:r>
+          </a:p>
+          <a:p xmlns:a="http://schemas.openxmlformats.org/drawingml/2006/main">
+            <a:pPr algn="l">
+              <a:buNone/>
+              <a:defRPr sz="1350" b="0">
+                <a:solidFill>
+                  <a:srgbClr val="62656A"/>
+                </a:solidFill>
+                <a:latin typeface="Helvetica Neue"/>
+                <a:ea typeface="Helvetica Neue"/>
+                <a:cs typeface="Helvetica Neue"/>
+              </a:defRPr>
+            </a:pPr>
+            <a:r>
+              <a:rPr sz="1350" b="0">
+                <a:solidFill>
+                  <a:srgbClr val="62656A"/>
+                </a:solidFill>
+                <a:latin typeface="Helvetica Neue"/>
+                <a:ea typeface="Helvetica Neue"/>
+                <a:cs typeface="Helvetica Neue"/>
+              </a:rPr>
+              <a:t>error translation</a:t>
+            </a:r>
+          </a:p>
+        </p:txBody>
+      </p:sp>
+      <p:sp>
+        <p:nvSpPr>
+          <p:cNvPr id="16" name="">
+            <a:extLst xmlns:a="http://schemas.openxmlformats.org/drawingml/2006/main">
+              <a:ext uri="{FF2B5EF4-FFF2-40B4-BE49-F238E27FC236}">
+                <a16:creationId xmlns:a16="http://schemas.microsoft.com/office/drawing/2014/main" id="{D1514FDA-EAA7-495C-A774-E28E18A690B3}"/>
+              </a:ext>
+            </a:extLst>
+          </p:cNvPr>
+          <p:cNvSpPr>
+            <a:spLocks xmlns:a="http://schemas.openxmlformats.org/drawingml/2006/main" noGrp="1"/>
+          </p:cNvSpPr>
+          <p:nvPr/>
+        </p:nvSpPr>
+        <p:spPr>
+          <a:xfrm xmlns:a="http://schemas.openxmlformats.org/drawingml/2006/main">
+            <a:off x="6305550" y="3162300"/>
+            <a:ext cx="476250" cy="476250"/>
+          </a:xfrm>
+          <a:prstGeom xmlns:a="http://schemas.openxmlformats.org/drawingml/2006/main" prst="ellipse">
             <a:avLst/>
           </a:prstGeom>
           <a:solidFill xmlns:a="http://schemas.openxmlformats.org/drawingml/2006/main">
@@ -5644,22 +5367,79 @@
       </p:sp>
       <p:sp>
         <p:nvSpPr>
-          <p:cNvPr id="7" name="">
-            <a:extLst xmlns:a="http://schemas.openxmlformats.org/drawingml/2006/main">
-              <a:ext uri="{FF2B5EF4-FFF2-40B4-BE49-F238E27FC236}">
-                <a16:creationId xmlns:a16="http://schemas.microsoft.com/office/drawing/2014/main" id="{1C55F868-BDA1-4C4C-A142-69898C8B57B3}"/>
-              </a:ext>
-            </a:extLst>
-          </p:cNvPr>
-          <p:cNvSpPr>
-            <a:spLocks xmlns:a="http://schemas.openxmlformats.org/drawingml/2006/main" noGrp="1"/>
-          </p:cNvSpPr>
-          <p:nvPr/>
-        </p:nvSpPr>
-        <p:spPr>
-          <a:xfrm xmlns:a="http://schemas.openxmlformats.org/drawingml/2006/main">
-            <a:off x="952500" y="3048000"/>
-            <a:ext cx="2571750" cy="990600"/>
+          <p:cNvPr id="17" name="">
+            <a:extLst xmlns:a="http://schemas.openxmlformats.org/drawingml/2006/main">
+              <a:ext uri="{FF2B5EF4-FFF2-40B4-BE49-F238E27FC236}">
+                <a16:creationId xmlns:a16="http://schemas.microsoft.com/office/drawing/2014/main" id="{EB0F0B43-E462-4C93-A995-4040C3E18CDE}"/>
+              </a:ext>
+            </a:extLst>
+          </p:cNvPr>
+          <p:cNvSpPr>
+            <a:spLocks xmlns:a="http://schemas.openxmlformats.org/drawingml/2006/main" noGrp="1"/>
+          </p:cNvSpPr>
+          <p:nvPr/>
+        </p:nvSpPr>
+        <p:spPr>
+          <a:xfrm xmlns:a="http://schemas.openxmlformats.org/drawingml/2006/main">
+            <a:off x="6305550" y="3267075"/>
+            <a:ext cx="476250" cy="228600"/>
+          </a:xfrm>
+          <a:prstGeom xmlns:a="http://schemas.openxmlformats.org/drawingml/2006/main" prst="rect">
+            <a:avLst/>
+          </a:prstGeom>
+          <a:noFill xmlns:a="http://schemas.openxmlformats.org/drawingml/2006/main"/>
+          <a:ln xmlns:a="http://schemas.openxmlformats.org/drawingml/2006/main" w="0">
+            <a:noFill/>
+            <a:prstDash val="solid"/>
+          </a:ln>
+        </p:spPr>
+        <p:txBody>
+          <a:bodyPr xmlns:a="http://schemas.openxmlformats.org/drawingml/2006/main" anchor="ctr"/>
+          <a:lstStyle xmlns:a="http://schemas.openxmlformats.org/drawingml/2006/main"/>
+          <a:p xmlns:a="http://schemas.openxmlformats.org/drawingml/2006/main">
+            <a:pPr algn="ctr">
+              <a:buNone/>
+              <a:defRPr sz="1125" b="1">
+                <a:solidFill>
+                  <a:srgbClr val="FFFFFF"/>
+                </a:solidFill>
+                <a:latin typeface="Helvetica Neue"/>
+                <a:ea typeface="Helvetica Neue"/>
+                <a:cs typeface="Helvetica Neue"/>
+              </a:defRPr>
+            </a:pPr>
+            <a:r>
+              <a:rPr sz="1125" b="1">
+                <a:solidFill>
+                  <a:srgbClr val="FFFFFF"/>
+                </a:solidFill>
+                <a:latin typeface="Helvetica Neue"/>
+                <a:ea typeface="Helvetica Neue"/>
+                <a:cs typeface="Helvetica Neue"/>
+              </a:rPr>
+              <a:t>03</a:t>
+            </a:r>
+          </a:p>
+        </p:txBody>
+      </p:sp>
+      <p:sp>
+        <p:nvSpPr>
+          <p:cNvPr id="18" name="">
+            <a:extLst xmlns:a="http://schemas.openxmlformats.org/drawingml/2006/main">
+              <a:ext uri="{FF2B5EF4-FFF2-40B4-BE49-F238E27FC236}">
+                <a16:creationId xmlns:a16="http://schemas.microsoft.com/office/drawing/2014/main" id="{F9C3EF17-5431-41DE-9942-F4217DC49A7E}"/>
+              </a:ext>
+            </a:extLst>
+          </p:cNvPr>
+          <p:cNvSpPr>
+            <a:spLocks xmlns:a="http://schemas.openxmlformats.org/drawingml/2006/main" noGrp="1"/>
+          </p:cNvSpPr>
+          <p:nvPr/>
+        </p:nvSpPr>
+        <p:spPr>
+          <a:xfrm xmlns:a="http://schemas.openxmlformats.org/drawingml/2006/main">
+            <a:off x="6305550" y="2343150"/>
+            <a:ext cx="2095500" cy="381000"/>
           </a:xfrm>
           <a:prstGeom xmlns:a="http://schemas.openxmlformats.org/drawingml/2006/main" prst="rect">
             <a:avLst/>
@@ -5675,7 +5455,8 @@
           <a:lstStyle xmlns:a="http://schemas.openxmlformats.org/drawingml/2006/main"/>
           <a:p xmlns:a="http://schemas.openxmlformats.org/drawingml/2006/main">
             <a:pPr algn="l">
-              <a:defRPr sz="5550" b="1">
+              <a:buNone/>
+              <a:defRPr sz="1875" b="1">
                 <a:solidFill>
                   <a:srgbClr val="202124"/>
                 </a:solidFill>
@@ -5685,7 +5466,7 @@
               </a:defRPr>
             </a:pPr>
             <a:r>
-              <a:rPr sz="5550" b="1">
+              <a:rPr sz="1875" b="1">
                 <a:solidFill>
                   <a:srgbClr val="202124"/>
                 </a:solidFill>
@@ -5693,29 +5474,29 @@
                 <a:ea typeface="Helvetica Neue"/>
                 <a:cs typeface="Helvetica Neue"/>
               </a:rPr>
-              <a:t>12</a:t>
-            </a:r>
-          </a:p>
-        </p:txBody>
-      </p:sp>
-      <p:sp>
-        <p:nvSpPr>
-          <p:cNvPr id="8" name="">
-            <a:extLst xmlns:a="http://schemas.openxmlformats.org/drawingml/2006/main">
-              <a:ext uri="{FF2B5EF4-FFF2-40B4-BE49-F238E27FC236}">
-                <a16:creationId xmlns:a16="http://schemas.microsoft.com/office/drawing/2014/main" id="{B3E6160A-53F1-444A-9358-B0605CC0EE13}"/>
-              </a:ext>
-            </a:extLst>
-          </p:cNvPr>
-          <p:cNvSpPr>
-            <a:spLocks xmlns:a="http://schemas.openxmlformats.org/drawingml/2006/main" noGrp="1"/>
-          </p:cNvSpPr>
-          <p:nvPr/>
-        </p:nvSpPr>
-        <p:spPr>
-          <a:xfrm xmlns:a="http://schemas.openxmlformats.org/drawingml/2006/main">
-            <a:off x="952500" y="4019550"/>
-            <a:ext cx="2571750" cy="342900"/>
+              <a:t>Django REST</a:t>
+            </a:r>
+          </a:p>
+        </p:txBody>
+      </p:sp>
+      <p:sp>
+        <p:nvSpPr>
+          <p:cNvPr id="19" name="">
+            <a:extLst xmlns:a="http://schemas.openxmlformats.org/drawingml/2006/main">
+              <a:ext uri="{FF2B5EF4-FFF2-40B4-BE49-F238E27FC236}">
+                <a16:creationId xmlns:a16="http://schemas.microsoft.com/office/drawing/2014/main" id="{CC0C73E6-83E4-4256-A8A3-74C6A3B145D4}"/>
+              </a:ext>
+            </a:extLst>
+          </p:cNvPr>
+          <p:cNvSpPr>
+            <a:spLocks xmlns:a="http://schemas.openxmlformats.org/drawingml/2006/main" noGrp="1"/>
+          </p:cNvSpPr>
+          <p:nvPr/>
+        </p:nvSpPr>
+        <p:spPr>
+          <a:xfrm xmlns:a="http://schemas.openxmlformats.org/drawingml/2006/main">
+            <a:off x="6305550" y="3981450"/>
+            <a:ext cx="2095500" cy="723900"/>
           </a:xfrm>
           <a:prstGeom xmlns:a="http://schemas.openxmlformats.org/drawingml/2006/main" prst="rect">
             <a:avLst/>
@@ -5731,6 +5512,176 @@
           <a:lstStyle xmlns:a="http://schemas.openxmlformats.org/drawingml/2006/main"/>
           <a:p xmlns:a="http://schemas.openxmlformats.org/drawingml/2006/main">
             <a:pPr algn="l">
+              <a:buNone/>
+              <a:defRPr sz="1350" b="0">
+                <a:solidFill>
+                  <a:srgbClr val="62656A"/>
+                </a:solidFill>
+                <a:latin typeface="Helvetica Neue"/>
+                <a:ea typeface="Helvetica Neue"/>
+                <a:cs typeface="Helvetica Neue"/>
+              </a:defRPr>
+            </a:pPr>
+            <a:r>
+              <a:rPr sz="1350" b="0">
+                <a:solidFill>
+                  <a:srgbClr val="62656A"/>
+                </a:solidFill>
+                <a:latin typeface="Helvetica Neue"/>
+                <a:ea typeface="Helvetica Neue"/>
+                <a:cs typeface="Helvetica Neue"/>
+              </a:rPr>
+              <a:t>Validation and</a:t>
+            </a:r>
+          </a:p>
+          <a:p xmlns:a="http://schemas.openxmlformats.org/drawingml/2006/main">
+            <a:pPr algn="l">
+              <a:buNone/>
+              <a:defRPr sz="1350" b="0">
+                <a:solidFill>
+                  <a:srgbClr val="62656A"/>
+                </a:solidFill>
+                <a:latin typeface="Helvetica Neue"/>
+                <a:ea typeface="Helvetica Neue"/>
+                <a:cs typeface="Helvetica Neue"/>
+              </a:defRPr>
+            </a:pPr>
+            <a:r>
+              <a:rPr sz="1350" b="0">
+                <a:solidFill>
+                  <a:srgbClr val="62656A"/>
+                </a:solidFill>
+                <a:latin typeface="Helvetica Neue"/>
+                <a:ea typeface="Helvetica Neue"/>
+                <a:cs typeface="Helvetica Neue"/>
+              </a:rPr>
+              <a:t>use-case coordination</a:t>
+            </a:r>
+          </a:p>
+        </p:txBody>
+      </p:sp>
+      <p:sp>
+        <p:nvSpPr>
+          <p:cNvPr id="20" name="">
+            <a:extLst xmlns:a="http://schemas.openxmlformats.org/drawingml/2006/main">
+              <a:ext uri="{FF2B5EF4-FFF2-40B4-BE49-F238E27FC236}">
+                <a16:creationId xmlns:a16="http://schemas.microsoft.com/office/drawing/2014/main" id="{630BA40F-EDE9-4DE7-ABD7-079B4CA5C731}"/>
+              </a:ext>
+            </a:extLst>
+          </p:cNvPr>
+          <p:cNvSpPr>
+            <a:spLocks xmlns:a="http://schemas.openxmlformats.org/drawingml/2006/main" noGrp="1"/>
+          </p:cNvSpPr>
+          <p:nvPr/>
+        </p:nvSpPr>
+        <p:spPr>
+          <a:xfrm xmlns:a="http://schemas.openxmlformats.org/drawingml/2006/main">
+            <a:off x="8972550" y="3162300"/>
+            <a:ext cx="476250" cy="476250"/>
+          </a:xfrm>
+          <a:prstGeom xmlns:a="http://schemas.openxmlformats.org/drawingml/2006/main" prst="ellipse">
+            <a:avLst/>
+          </a:prstGeom>
+          <a:solidFill xmlns:a="http://schemas.openxmlformats.org/drawingml/2006/main">
+            <a:srgbClr val="202124"/>
+          </a:solidFill>
+          <a:ln xmlns:a="http://schemas.openxmlformats.org/drawingml/2006/main" w="0">
+            <a:noFill/>
+            <a:prstDash val="solid"/>
+          </a:ln>
+        </p:spPr>
+      </p:sp>
+      <p:sp>
+        <p:nvSpPr>
+          <p:cNvPr id="21" name="">
+            <a:extLst xmlns:a="http://schemas.openxmlformats.org/drawingml/2006/main">
+              <a:ext uri="{FF2B5EF4-FFF2-40B4-BE49-F238E27FC236}">
+                <a16:creationId xmlns:a16="http://schemas.microsoft.com/office/drawing/2014/main" id="{BA91FEB5-8390-4EE8-9921-E333101FC094}"/>
+              </a:ext>
+            </a:extLst>
+          </p:cNvPr>
+          <p:cNvSpPr>
+            <a:spLocks xmlns:a="http://schemas.openxmlformats.org/drawingml/2006/main" noGrp="1"/>
+          </p:cNvSpPr>
+          <p:nvPr/>
+        </p:nvSpPr>
+        <p:spPr>
+          <a:xfrm xmlns:a="http://schemas.openxmlformats.org/drawingml/2006/main">
+            <a:off x="8972550" y="3267075"/>
+            <a:ext cx="476250" cy="228600"/>
+          </a:xfrm>
+          <a:prstGeom xmlns:a="http://schemas.openxmlformats.org/drawingml/2006/main" prst="rect">
+            <a:avLst/>
+          </a:prstGeom>
+          <a:noFill xmlns:a="http://schemas.openxmlformats.org/drawingml/2006/main"/>
+          <a:ln xmlns:a="http://schemas.openxmlformats.org/drawingml/2006/main" w="0">
+            <a:noFill/>
+            <a:prstDash val="solid"/>
+          </a:ln>
+        </p:spPr>
+        <p:txBody>
+          <a:bodyPr xmlns:a="http://schemas.openxmlformats.org/drawingml/2006/main" anchor="ctr"/>
+          <a:lstStyle xmlns:a="http://schemas.openxmlformats.org/drawingml/2006/main"/>
+          <a:p xmlns:a="http://schemas.openxmlformats.org/drawingml/2006/main">
+            <a:pPr algn="ctr">
+              <a:buNone/>
+              <a:defRPr sz="1125" b="1">
+                <a:solidFill>
+                  <a:srgbClr val="FFFFFF"/>
+                </a:solidFill>
+                <a:latin typeface="Helvetica Neue"/>
+                <a:ea typeface="Helvetica Neue"/>
+                <a:cs typeface="Helvetica Neue"/>
+              </a:defRPr>
+            </a:pPr>
+            <a:r>
+              <a:rPr sz="1125" b="1">
+                <a:solidFill>
+                  <a:srgbClr val="FFFFFF"/>
+                </a:solidFill>
+                <a:latin typeface="Helvetica Neue"/>
+                <a:ea typeface="Helvetica Neue"/>
+                <a:cs typeface="Helvetica Neue"/>
+              </a:rPr>
+              <a:t>04</a:t>
+            </a:r>
+          </a:p>
+        </p:txBody>
+      </p:sp>
+      <p:sp>
+        <p:nvSpPr>
+          <p:cNvPr id="22" name="">
+            <a:extLst xmlns:a="http://schemas.openxmlformats.org/drawingml/2006/main">
+              <a:ext uri="{FF2B5EF4-FFF2-40B4-BE49-F238E27FC236}">
+                <a16:creationId xmlns:a16="http://schemas.microsoft.com/office/drawing/2014/main" id="{A3EA5471-65C6-48F9-A15D-34BE53AF8B24}"/>
+              </a:ext>
+            </a:extLst>
+          </p:cNvPr>
+          <p:cNvSpPr>
+            <a:spLocks xmlns:a="http://schemas.openxmlformats.org/drawingml/2006/main" noGrp="1"/>
+          </p:cNvSpPr>
+          <p:nvPr/>
+        </p:nvSpPr>
+        <p:spPr>
+          <a:xfrm xmlns:a="http://schemas.openxmlformats.org/drawingml/2006/main">
+            <a:off x="8972550" y="2343150"/>
+            <a:ext cx="2095500" cy="381000"/>
+          </a:xfrm>
+          <a:prstGeom xmlns:a="http://schemas.openxmlformats.org/drawingml/2006/main" prst="rect">
+            <a:avLst/>
+          </a:prstGeom>
+          <a:noFill xmlns:a="http://schemas.openxmlformats.org/drawingml/2006/main"/>
+          <a:ln xmlns:a="http://schemas.openxmlformats.org/drawingml/2006/main" w="0">
+            <a:noFill/>
+            <a:prstDash val="solid"/>
+          </a:ln>
+        </p:spPr>
+        <p:txBody>
+          <a:bodyPr xmlns:a="http://schemas.openxmlformats.org/drawingml/2006/main" anchor="t"/>
+          <a:lstStyle xmlns:a="http://schemas.openxmlformats.org/drawingml/2006/main"/>
+          <a:p xmlns:a="http://schemas.openxmlformats.org/drawingml/2006/main">
+            <a:pPr algn="l">
+              <a:buNone/>
               <a:defRPr sz="1875" b="1">
                 <a:solidFill>
                   <a:srgbClr val="202124"/>
@@ -5749,29 +5700,29 @@
                 <a:ea typeface="Helvetica Neue"/>
                 <a:cs typeface="Helvetica Neue"/>
               </a:rPr>
-              <a:t>backend tests</a:t>
-            </a:r>
-          </a:p>
-        </p:txBody>
-      </p:sp>
-      <p:sp>
-        <p:nvSpPr>
-          <p:cNvPr id="9" name="">
-            <a:extLst xmlns:a="http://schemas.openxmlformats.org/drawingml/2006/main">
-              <a:ext uri="{FF2B5EF4-FFF2-40B4-BE49-F238E27FC236}">
-                <a16:creationId xmlns:a16="http://schemas.microsoft.com/office/drawing/2014/main" id="{9FD8B7B9-53ED-4430-A387-24EF716B8CB6}"/>
-              </a:ext>
-            </a:extLst>
-          </p:cNvPr>
-          <p:cNvSpPr>
-            <a:spLocks xmlns:a="http://schemas.openxmlformats.org/drawingml/2006/main" noGrp="1"/>
-          </p:cNvSpPr>
-          <p:nvPr/>
-        </p:nvSpPr>
-        <p:spPr>
-          <a:xfrm xmlns:a="http://schemas.openxmlformats.org/drawingml/2006/main">
-            <a:off x="952500" y="4552950"/>
-            <a:ext cx="2647950" cy="685800"/>
+              <a:t>ORM + data</a:t>
+            </a:r>
+          </a:p>
+        </p:txBody>
+      </p:sp>
+      <p:sp>
+        <p:nvSpPr>
+          <p:cNvPr id="23" name="">
+            <a:extLst xmlns:a="http://schemas.openxmlformats.org/drawingml/2006/main">
+              <a:ext uri="{FF2B5EF4-FFF2-40B4-BE49-F238E27FC236}">
+                <a16:creationId xmlns:a16="http://schemas.microsoft.com/office/drawing/2014/main" id="{9B501C2E-2BAB-480C-8E55-5B68E362B0C9}"/>
+              </a:ext>
+            </a:extLst>
+          </p:cNvPr>
+          <p:cNvSpPr>
+            <a:spLocks xmlns:a="http://schemas.openxmlformats.org/drawingml/2006/main" noGrp="1"/>
+          </p:cNvSpPr>
+          <p:nvPr/>
+        </p:nvSpPr>
+        <p:spPr>
+          <a:xfrm xmlns:a="http://schemas.openxmlformats.org/drawingml/2006/main">
+            <a:off x="8972550" y="3981450"/>
+            <a:ext cx="2095500" cy="723900"/>
           </a:xfrm>
           <a:prstGeom xmlns:a="http://schemas.openxmlformats.org/drawingml/2006/main" prst="rect">
             <a:avLst/>
@@ -5787,109 +5738,72 @@
           <a:lstStyle xmlns:a="http://schemas.openxmlformats.org/drawingml/2006/main"/>
           <a:p xmlns:a="http://schemas.openxmlformats.org/drawingml/2006/main">
             <a:pPr algn="l">
-              <a:defRPr sz="1275" b="0">
-                <a:solidFill>
-                  <a:srgbClr val="62656A"/>
-                </a:solidFill>
-                <a:latin typeface="Helvetica Neue"/>
-                <a:ea typeface="Helvetica Neue"/>
-                <a:cs typeface="Helvetica Neue"/>
-              </a:defRPr>
-            </a:pPr>
-            <a:r>
-              <a:rPr sz="1275" b="0">
-                <a:solidFill>
-                  <a:srgbClr val="62656A"/>
-                </a:solidFill>
-                <a:latin typeface="Helvetica Neue"/>
-                <a:ea typeface="Helvetica Neue"/>
-                <a:cs typeface="Helvetica Neue"/>
-              </a:rPr>
-              <a:t>Models, validation, filtering, assignment, editing, and status changes.</a:t>
-            </a:r>
-          </a:p>
-        </p:txBody>
-      </p:sp>
-      <p:sp>
-        <p:nvSpPr>
-          <p:cNvPr id="10" name="">
-            <a:extLst xmlns:a="http://schemas.openxmlformats.org/drawingml/2006/main">
-              <a:ext uri="{FF2B5EF4-FFF2-40B4-BE49-F238E27FC236}">
-                <a16:creationId xmlns:a16="http://schemas.microsoft.com/office/drawing/2014/main" id="{7067B265-4CAE-40C8-9614-E0B3FDB1A854}"/>
-              </a:ext>
-            </a:extLst>
-          </p:cNvPr>
-          <p:cNvSpPr>
-            <a:spLocks xmlns:a="http://schemas.openxmlformats.org/drawingml/2006/main" noGrp="1"/>
-          </p:cNvSpPr>
-          <p:nvPr/>
-        </p:nvSpPr>
-        <p:spPr>
-          <a:xfrm xmlns:a="http://schemas.openxmlformats.org/drawingml/2006/main">
-            <a:off x="4305300" y="2714625"/>
-            <a:ext cx="3200400" cy="2762250"/>
-          </a:xfrm>
-          <a:prstGeom xmlns:a="http://schemas.openxmlformats.org/drawingml/2006/main" prst="rect">
-            <a:avLst/>
-          </a:prstGeom>
-          <a:solidFill xmlns:a="http://schemas.openxmlformats.org/drawingml/2006/main">
-            <a:srgbClr val="F1F1EF"/>
-          </a:solidFill>
-          <a:ln xmlns:a="http://schemas.openxmlformats.org/drawingml/2006/main" w="0">
-            <a:noFill/>
-            <a:prstDash val="solid"/>
-          </a:ln>
-        </p:spPr>
-      </p:sp>
-      <p:sp>
-        <p:nvSpPr>
-          <p:cNvPr id="11" name="">
-            <a:extLst xmlns:a="http://schemas.openxmlformats.org/drawingml/2006/main">
-              <a:ext uri="{FF2B5EF4-FFF2-40B4-BE49-F238E27FC236}">
-                <a16:creationId xmlns:a16="http://schemas.microsoft.com/office/drawing/2014/main" id="{2205C920-916B-4069-A793-ADEBE19F4059}"/>
-              </a:ext>
-            </a:extLst>
-          </p:cNvPr>
-          <p:cNvSpPr>
-            <a:spLocks xmlns:a="http://schemas.openxmlformats.org/drawingml/2006/main" noGrp="1"/>
-          </p:cNvSpPr>
-          <p:nvPr/>
-        </p:nvSpPr>
-        <p:spPr>
-          <a:xfrm xmlns:a="http://schemas.openxmlformats.org/drawingml/2006/main">
-            <a:off x="4305300" y="2714625"/>
-            <a:ext cx="3200400" cy="57150"/>
-          </a:xfrm>
-          <a:prstGeom xmlns:a="http://schemas.openxmlformats.org/drawingml/2006/main" prst="rect">
-            <a:avLst/>
-          </a:prstGeom>
-          <a:solidFill xmlns:a="http://schemas.openxmlformats.org/drawingml/2006/main">
-            <a:srgbClr val="FF7A00"/>
-          </a:solidFill>
-          <a:ln xmlns:a="http://schemas.openxmlformats.org/drawingml/2006/main" w="0">
-            <a:noFill/>
-            <a:prstDash val="solid"/>
-          </a:ln>
-        </p:spPr>
-      </p:sp>
-      <p:sp>
-        <p:nvSpPr>
-          <p:cNvPr id="12" name="">
-            <a:extLst xmlns:a="http://schemas.openxmlformats.org/drawingml/2006/main">
-              <a:ext uri="{FF2B5EF4-FFF2-40B4-BE49-F238E27FC236}">
-                <a16:creationId xmlns:a16="http://schemas.microsoft.com/office/drawing/2014/main" id="{2E5E4127-5D69-43D7-92F7-A18BB108B5AD}"/>
-              </a:ext>
-            </a:extLst>
-          </p:cNvPr>
-          <p:cNvSpPr>
-            <a:spLocks xmlns:a="http://schemas.openxmlformats.org/drawingml/2006/main" noGrp="1"/>
-          </p:cNvSpPr>
-          <p:nvPr/>
-        </p:nvSpPr>
-        <p:spPr>
-          <a:xfrm xmlns:a="http://schemas.openxmlformats.org/drawingml/2006/main">
-            <a:off x="4572000" y="3048000"/>
-            <a:ext cx="2571750" cy="990600"/>
+              <a:buNone/>
+              <a:defRPr sz="1350" b="0">
+                <a:solidFill>
+                  <a:srgbClr val="62656A"/>
+                </a:solidFill>
+                <a:latin typeface="Helvetica Neue"/>
+                <a:ea typeface="Helvetica Neue"/>
+                <a:cs typeface="Helvetica Neue"/>
+              </a:defRPr>
+            </a:pPr>
+            <a:r>
+              <a:rPr sz="1350" b="0">
+                <a:solidFill>
+                  <a:srgbClr val="62656A"/>
+                </a:solidFill>
+                <a:latin typeface="Helvetica Neue"/>
+                <a:ea typeface="Helvetica Neue"/>
+                <a:cs typeface="Helvetica Neue"/>
+              </a:rPr>
+              <a:t>SQLite by default;</a:t>
+            </a:r>
+          </a:p>
+          <a:p xmlns:a="http://schemas.openxmlformats.org/drawingml/2006/main">
+            <a:pPr algn="l">
+              <a:buNone/>
+              <a:defRPr sz="1350" b="0">
+                <a:solidFill>
+                  <a:srgbClr val="62656A"/>
+                </a:solidFill>
+                <a:latin typeface="Helvetica Neue"/>
+                <a:ea typeface="Helvetica Neue"/>
+                <a:cs typeface="Helvetica Neue"/>
+              </a:defRPr>
+            </a:pPr>
+            <a:r>
+              <a:rPr sz="1350" b="0">
+                <a:solidFill>
+                  <a:srgbClr val="62656A"/>
+                </a:solidFill>
+                <a:latin typeface="Helvetica Neue"/>
+                <a:ea typeface="Helvetica Neue"/>
+                <a:cs typeface="Helvetica Neue"/>
+              </a:rPr>
+              <a:t>PostgreSQL by config</a:t>
+            </a:r>
+          </a:p>
+        </p:txBody>
+      </p:sp>
+      <p:sp>
+        <p:nvSpPr>
+          <p:cNvPr id="24" name="">
+            <a:extLst xmlns:a="http://schemas.openxmlformats.org/drawingml/2006/main">
+              <a:ext uri="{FF2B5EF4-FFF2-40B4-BE49-F238E27FC236}">
+                <a16:creationId xmlns:a16="http://schemas.microsoft.com/office/drawing/2014/main" id="{7DE491C9-F798-4DE3-98BB-96D7B0D1927F}"/>
+              </a:ext>
+            </a:extLst>
+          </p:cNvPr>
+          <p:cNvSpPr>
+            <a:spLocks xmlns:a="http://schemas.openxmlformats.org/drawingml/2006/main" noGrp="1"/>
+          </p:cNvSpPr>
+          <p:nvPr/>
+        </p:nvSpPr>
+        <p:spPr>
+          <a:xfrm xmlns:a="http://schemas.openxmlformats.org/drawingml/2006/main">
+            <a:off x="685800" y="5543550"/>
+            <a:ext cx="9525000" cy="342900"/>
           </a:xfrm>
           <a:prstGeom xmlns:a="http://schemas.openxmlformats.org/drawingml/2006/main" prst="rect">
             <a:avLst/>
@@ -5905,404 +5819,7 @@
           <a:lstStyle xmlns:a="http://schemas.openxmlformats.org/drawingml/2006/main"/>
           <a:p xmlns:a="http://schemas.openxmlformats.org/drawingml/2006/main">
             <a:pPr algn="l">
-              <a:defRPr sz="5550" b="1">
-                <a:solidFill>
-                  <a:srgbClr val="202124"/>
-                </a:solidFill>
-                <a:latin typeface="Helvetica Neue"/>
-                <a:ea typeface="Helvetica Neue"/>
-                <a:cs typeface="Helvetica Neue"/>
-              </a:defRPr>
-            </a:pPr>
-            <a:r>
-              <a:rPr sz="5550" b="1">
-                <a:solidFill>
-                  <a:srgbClr val="202124"/>
-                </a:solidFill>
-                <a:latin typeface="Helvetica Neue"/>
-                <a:ea typeface="Helvetica Neue"/>
-                <a:cs typeface="Helvetica Neue"/>
-              </a:rPr>
-              <a:t>3</a:t>
-            </a:r>
-          </a:p>
-        </p:txBody>
-      </p:sp>
-      <p:sp>
-        <p:nvSpPr>
-          <p:cNvPr id="13" name="">
-            <a:extLst xmlns:a="http://schemas.openxmlformats.org/drawingml/2006/main">
-              <a:ext uri="{FF2B5EF4-FFF2-40B4-BE49-F238E27FC236}">
-                <a16:creationId xmlns:a16="http://schemas.microsoft.com/office/drawing/2014/main" id="{33DE94F8-DF33-4DA4-8D4C-F74ABC808CAC}"/>
-              </a:ext>
-            </a:extLst>
-          </p:cNvPr>
-          <p:cNvSpPr>
-            <a:spLocks xmlns:a="http://schemas.openxmlformats.org/drawingml/2006/main" noGrp="1"/>
-          </p:cNvSpPr>
-          <p:nvPr/>
-        </p:nvSpPr>
-        <p:spPr>
-          <a:xfrm xmlns:a="http://schemas.openxmlformats.org/drawingml/2006/main">
-            <a:off x="4572000" y="4019550"/>
-            <a:ext cx="2571750" cy="342900"/>
-          </a:xfrm>
-          <a:prstGeom xmlns:a="http://schemas.openxmlformats.org/drawingml/2006/main" prst="rect">
-            <a:avLst/>
-          </a:prstGeom>
-          <a:noFill xmlns:a="http://schemas.openxmlformats.org/drawingml/2006/main"/>
-          <a:ln xmlns:a="http://schemas.openxmlformats.org/drawingml/2006/main" w="0">
-            <a:noFill/>
-            <a:prstDash val="solid"/>
-          </a:ln>
-        </p:spPr>
-        <p:txBody>
-          <a:bodyPr xmlns:a="http://schemas.openxmlformats.org/drawingml/2006/main" anchor="t"/>
-          <a:lstStyle xmlns:a="http://schemas.openxmlformats.org/drawingml/2006/main"/>
-          <a:p xmlns:a="http://schemas.openxmlformats.org/drawingml/2006/main">
-            <a:pPr algn="l">
-              <a:defRPr sz="1875" b="1">
-                <a:solidFill>
-                  <a:srgbClr val="202124"/>
-                </a:solidFill>
-                <a:latin typeface="Helvetica Neue"/>
-                <a:ea typeface="Helvetica Neue"/>
-                <a:cs typeface="Helvetica Neue"/>
-              </a:defRPr>
-            </a:pPr>
-            <a:r>
-              <a:rPr sz="1875" b="1">
-                <a:solidFill>
-                  <a:srgbClr val="202124"/>
-                </a:solidFill>
-                <a:latin typeface="Helvetica Neue"/>
-                <a:ea typeface="Helvetica Neue"/>
-                <a:cs typeface="Helvetica Neue"/>
-              </a:rPr>
-              <a:t>frontend tests</a:t>
-            </a:r>
-          </a:p>
-        </p:txBody>
-      </p:sp>
-      <p:sp>
-        <p:nvSpPr>
-          <p:cNvPr id="14" name="">
-            <a:extLst xmlns:a="http://schemas.openxmlformats.org/drawingml/2006/main">
-              <a:ext uri="{FF2B5EF4-FFF2-40B4-BE49-F238E27FC236}">
-                <a16:creationId xmlns:a16="http://schemas.microsoft.com/office/drawing/2014/main" id="{494CCFFC-A893-4B56-9E2E-ED0C4661FE42}"/>
-              </a:ext>
-            </a:extLst>
-          </p:cNvPr>
-          <p:cNvSpPr>
-            <a:spLocks xmlns:a="http://schemas.openxmlformats.org/drawingml/2006/main" noGrp="1"/>
-          </p:cNvSpPr>
-          <p:nvPr/>
-        </p:nvSpPr>
-        <p:spPr>
-          <a:xfrm xmlns:a="http://schemas.openxmlformats.org/drawingml/2006/main">
-            <a:off x="4572000" y="4552950"/>
-            <a:ext cx="2647950" cy="685800"/>
-          </a:xfrm>
-          <a:prstGeom xmlns:a="http://schemas.openxmlformats.org/drawingml/2006/main" prst="rect">
-            <a:avLst/>
-          </a:prstGeom>
-          <a:noFill xmlns:a="http://schemas.openxmlformats.org/drawingml/2006/main"/>
-          <a:ln xmlns:a="http://schemas.openxmlformats.org/drawingml/2006/main" w="0">
-            <a:noFill/>
-            <a:prstDash val="solid"/>
-          </a:ln>
-        </p:spPr>
-        <p:txBody>
-          <a:bodyPr xmlns:a="http://schemas.openxmlformats.org/drawingml/2006/main" anchor="t"/>
-          <a:lstStyle xmlns:a="http://schemas.openxmlformats.org/drawingml/2006/main"/>
-          <a:p xmlns:a="http://schemas.openxmlformats.org/drawingml/2006/main">
-            <a:pPr algn="l">
-              <a:defRPr sz="1275" b="0">
-                <a:solidFill>
-                  <a:srgbClr val="62656A"/>
-                </a:solidFill>
-                <a:latin typeface="Helvetica Neue"/>
-                <a:ea typeface="Helvetica Neue"/>
-                <a:cs typeface="Helvetica Neue"/>
-              </a:defRPr>
-            </a:pPr>
-            <a:r>
-              <a:rPr sz="1275" b="0">
-                <a:solidFill>
-                  <a:srgbClr val="62656A"/>
-                </a:solidFill>
-                <a:latin typeface="Helvetica Neue"/>
-                <a:ea typeface="Helvetica Neue"/>
-                <a:cs typeface="Helvetica Neue"/>
-              </a:rPr>
-              <a:t>Required task content, actions, search, and filter interactions.</a:t>
-            </a:r>
-          </a:p>
-        </p:txBody>
-      </p:sp>
-      <p:sp>
-        <p:nvSpPr>
-          <p:cNvPr id="15" name="">
-            <a:extLst xmlns:a="http://schemas.openxmlformats.org/drawingml/2006/main">
-              <a:ext uri="{FF2B5EF4-FFF2-40B4-BE49-F238E27FC236}">
-                <a16:creationId xmlns:a16="http://schemas.microsoft.com/office/drawing/2014/main" id="{37699EF6-B709-4994-B084-8C1BC8070E70}"/>
-              </a:ext>
-            </a:extLst>
-          </p:cNvPr>
-          <p:cNvSpPr>
-            <a:spLocks xmlns:a="http://schemas.openxmlformats.org/drawingml/2006/main" noGrp="1"/>
-          </p:cNvSpPr>
-          <p:nvPr/>
-        </p:nvSpPr>
-        <p:spPr>
-          <a:xfrm xmlns:a="http://schemas.openxmlformats.org/drawingml/2006/main">
-            <a:off x="7924800" y="2714625"/>
-            <a:ext cx="3200400" cy="2762250"/>
-          </a:xfrm>
-          <a:prstGeom xmlns:a="http://schemas.openxmlformats.org/drawingml/2006/main" prst="rect">
-            <a:avLst/>
-          </a:prstGeom>
-          <a:solidFill xmlns:a="http://schemas.openxmlformats.org/drawingml/2006/main">
-            <a:srgbClr val="F1F1EF"/>
-          </a:solidFill>
-          <a:ln xmlns:a="http://schemas.openxmlformats.org/drawingml/2006/main" w="0">
-            <a:noFill/>
-            <a:prstDash val="solid"/>
-          </a:ln>
-        </p:spPr>
-      </p:sp>
-      <p:sp>
-        <p:nvSpPr>
-          <p:cNvPr id="16" name="">
-            <a:extLst xmlns:a="http://schemas.openxmlformats.org/drawingml/2006/main">
-              <a:ext uri="{FF2B5EF4-FFF2-40B4-BE49-F238E27FC236}">
-                <a16:creationId xmlns:a16="http://schemas.microsoft.com/office/drawing/2014/main" id="{E3865AF7-1F05-4E33-8A3A-8C5DF8423C46}"/>
-              </a:ext>
-            </a:extLst>
-          </p:cNvPr>
-          <p:cNvSpPr>
-            <a:spLocks xmlns:a="http://schemas.openxmlformats.org/drawingml/2006/main" noGrp="1"/>
-          </p:cNvSpPr>
-          <p:nvPr/>
-        </p:nvSpPr>
-        <p:spPr>
-          <a:xfrm xmlns:a="http://schemas.openxmlformats.org/drawingml/2006/main">
-            <a:off x="7924800" y="2714625"/>
-            <a:ext cx="3200400" cy="57150"/>
-          </a:xfrm>
-          <a:prstGeom xmlns:a="http://schemas.openxmlformats.org/drawingml/2006/main" prst="rect">
-            <a:avLst/>
-          </a:prstGeom>
-          <a:solidFill xmlns:a="http://schemas.openxmlformats.org/drawingml/2006/main">
-            <a:srgbClr val="FF7A00"/>
-          </a:solidFill>
-          <a:ln xmlns:a="http://schemas.openxmlformats.org/drawingml/2006/main" w="0">
-            <a:noFill/>
-            <a:prstDash val="solid"/>
-          </a:ln>
-        </p:spPr>
-      </p:sp>
-      <p:sp>
-        <p:nvSpPr>
-          <p:cNvPr id="17" name="">
-            <a:extLst xmlns:a="http://schemas.openxmlformats.org/drawingml/2006/main">
-              <a:ext uri="{FF2B5EF4-FFF2-40B4-BE49-F238E27FC236}">
-                <a16:creationId xmlns:a16="http://schemas.microsoft.com/office/drawing/2014/main" id="{B32279F3-3DB5-4B94-880D-BAFA4A1F28D8}"/>
-              </a:ext>
-            </a:extLst>
-          </p:cNvPr>
-          <p:cNvSpPr>
-            <a:spLocks xmlns:a="http://schemas.openxmlformats.org/drawingml/2006/main" noGrp="1"/>
-          </p:cNvSpPr>
-          <p:nvPr/>
-        </p:nvSpPr>
-        <p:spPr>
-          <a:xfrm xmlns:a="http://schemas.openxmlformats.org/drawingml/2006/main">
-            <a:off x="8191500" y="3048000"/>
-            <a:ext cx="2571750" cy="990600"/>
-          </a:xfrm>
-          <a:prstGeom xmlns:a="http://schemas.openxmlformats.org/drawingml/2006/main" prst="rect">
-            <a:avLst/>
-          </a:prstGeom>
-          <a:noFill xmlns:a="http://schemas.openxmlformats.org/drawingml/2006/main"/>
-          <a:ln xmlns:a="http://schemas.openxmlformats.org/drawingml/2006/main" w="0">
-            <a:noFill/>
-            <a:prstDash val="solid"/>
-          </a:ln>
-        </p:spPr>
-        <p:txBody>
-          <a:bodyPr xmlns:a="http://schemas.openxmlformats.org/drawingml/2006/main" anchor="t"/>
-          <a:lstStyle xmlns:a="http://schemas.openxmlformats.org/drawingml/2006/main"/>
-          <a:p xmlns:a="http://schemas.openxmlformats.org/drawingml/2006/main">
-            <a:pPr algn="l">
-              <a:defRPr sz="5550" b="1">
-                <a:solidFill>
-                  <a:srgbClr val="202124"/>
-                </a:solidFill>
-                <a:latin typeface="Helvetica Neue"/>
-                <a:ea typeface="Helvetica Neue"/>
-                <a:cs typeface="Helvetica Neue"/>
-              </a:defRPr>
-            </a:pPr>
-            <a:r>
-              <a:rPr sz="5550" b="1">
-                <a:solidFill>
-                  <a:srgbClr val="202124"/>
-                </a:solidFill>
-                <a:latin typeface="Helvetica Neue"/>
-                <a:ea typeface="Helvetica Neue"/>
-                <a:cs typeface="Helvetica Neue"/>
-              </a:rPr>
-              <a:t>2</a:t>
-            </a:r>
-          </a:p>
-        </p:txBody>
-      </p:sp>
-      <p:sp>
-        <p:nvSpPr>
-          <p:cNvPr id="18" name="">
-            <a:extLst xmlns:a="http://schemas.openxmlformats.org/drawingml/2006/main">
-              <a:ext uri="{FF2B5EF4-FFF2-40B4-BE49-F238E27FC236}">
-                <a16:creationId xmlns:a16="http://schemas.microsoft.com/office/drawing/2014/main" id="{887F6E75-4BE8-4E53-B8B9-1FAD525F8F87}"/>
-              </a:ext>
-            </a:extLst>
-          </p:cNvPr>
-          <p:cNvSpPr>
-            <a:spLocks xmlns:a="http://schemas.openxmlformats.org/drawingml/2006/main" noGrp="1"/>
-          </p:cNvSpPr>
-          <p:nvPr/>
-        </p:nvSpPr>
-        <p:spPr>
-          <a:xfrm xmlns:a="http://schemas.openxmlformats.org/drawingml/2006/main">
-            <a:off x="8191500" y="4019550"/>
-            <a:ext cx="2571750" cy="342900"/>
-          </a:xfrm>
-          <a:prstGeom xmlns:a="http://schemas.openxmlformats.org/drawingml/2006/main" prst="rect">
-            <a:avLst/>
-          </a:prstGeom>
-          <a:noFill xmlns:a="http://schemas.openxmlformats.org/drawingml/2006/main"/>
-          <a:ln xmlns:a="http://schemas.openxmlformats.org/drawingml/2006/main" w="0">
-            <a:noFill/>
-            <a:prstDash val="solid"/>
-          </a:ln>
-        </p:spPr>
-        <p:txBody>
-          <a:bodyPr xmlns:a="http://schemas.openxmlformats.org/drawingml/2006/main" anchor="t"/>
-          <a:lstStyle xmlns:a="http://schemas.openxmlformats.org/drawingml/2006/main"/>
-          <a:p xmlns:a="http://schemas.openxmlformats.org/drawingml/2006/main">
-            <a:pPr algn="l">
-              <a:defRPr sz="1875" b="1">
-                <a:solidFill>
-                  <a:srgbClr val="202124"/>
-                </a:solidFill>
-                <a:latin typeface="Helvetica Neue"/>
-                <a:ea typeface="Helvetica Neue"/>
-                <a:cs typeface="Helvetica Neue"/>
-              </a:defRPr>
-            </a:pPr>
-            <a:r>
-              <a:rPr sz="1875" b="1">
-                <a:solidFill>
-                  <a:srgbClr val="202124"/>
-                </a:solidFill>
-                <a:latin typeface="Helvetica Neue"/>
-                <a:ea typeface="Helvetica Neue"/>
-                <a:cs typeface="Helvetica Neue"/>
-              </a:rPr>
-              <a:t>verified viewports</a:t>
-            </a:r>
-          </a:p>
-        </p:txBody>
-      </p:sp>
-      <p:sp>
-        <p:nvSpPr>
-          <p:cNvPr id="19" name="">
-            <a:extLst xmlns:a="http://schemas.openxmlformats.org/drawingml/2006/main">
-              <a:ext uri="{FF2B5EF4-FFF2-40B4-BE49-F238E27FC236}">
-                <a16:creationId xmlns:a16="http://schemas.microsoft.com/office/drawing/2014/main" id="{CEC68702-CB0E-45BB-8F39-826023055832}"/>
-              </a:ext>
-            </a:extLst>
-          </p:cNvPr>
-          <p:cNvSpPr>
-            <a:spLocks xmlns:a="http://schemas.openxmlformats.org/drawingml/2006/main" noGrp="1"/>
-          </p:cNvSpPr>
-          <p:nvPr/>
-        </p:nvSpPr>
-        <p:spPr>
-          <a:xfrm xmlns:a="http://schemas.openxmlformats.org/drawingml/2006/main">
-            <a:off x="8191500" y="4552950"/>
-            <a:ext cx="2647950" cy="685800"/>
-          </a:xfrm>
-          <a:prstGeom xmlns:a="http://schemas.openxmlformats.org/drawingml/2006/main" prst="rect">
-            <a:avLst/>
-          </a:prstGeom>
-          <a:noFill xmlns:a="http://schemas.openxmlformats.org/drawingml/2006/main"/>
-          <a:ln xmlns:a="http://schemas.openxmlformats.org/drawingml/2006/main" w="0">
-            <a:noFill/>
-            <a:prstDash val="solid"/>
-          </a:ln>
-        </p:spPr>
-        <p:txBody>
-          <a:bodyPr xmlns:a="http://schemas.openxmlformats.org/drawingml/2006/main" anchor="t"/>
-          <a:lstStyle xmlns:a="http://schemas.openxmlformats.org/drawingml/2006/main"/>
-          <a:p xmlns:a="http://schemas.openxmlformats.org/drawingml/2006/main">
-            <a:pPr algn="l">
-              <a:defRPr sz="1275" b="0">
-                <a:solidFill>
-                  <a:srgbClr val="62656A"/>
-                </a:solidFill>
-                <a:latin typeface="Helvetica Neue"/>
-                <a:ea typeface="Helvetica Neue"/>
-                <a:cs typeface="Helvetica Neue"/>
-              </a:defRPr>
-            </a:pPr>
-            <a:r>
-              <a:rPr sz="1275" b="0">
-                <a:solidFill>
-                  <a:srgbClr val="62656A"/>
-                </a:solidFill>
-                <a:latin typeface="Helvetica Neue"/>
-                <a:ea typeface="Helvetica Neue"/>
-                <a:cs typeface="Helvetica Neue"/>
-              </a:rPr>
-              <a:t>Desktop and mobile flows, including the responsive edit dialog.</a:t>
-            </a:r>
-          </a:p>
-        </p:txBody>
-      </p:sp>
-      <p:sp>
-        <p:nvSpPr>
-          <p:cNvPr id="20" name="">
-            <a:extLst xmlns:a="http://schemas.openxmlformats.org/drawingml/2006/main">
-              <a:ext uri="{FF2B5EF4-FFF2-40B4-BE49-F238E27FC236}">
-                <a16:creationId xmlns:a16="http://schemas.microsoft.com/office/drawing/2014/main" id="{3A0DBBEB-EB95-4991-B219-E6F9BC3DE0B2}"/>
-              </a:ext>
-            </a:extLst>
-          </p:cNvPr>
-          <p:cNvSpPr>
-            <a:spLocks xmlns:a="http://schemas.openxmlformats.org/drawingml/2006/main" noGrp="1"/>
-          </p:cNvSpPr>
-          <p:nvPr/>
-        </p:nvSpPr>
-        <p:spPr>
-          <a:xfrm xmlns:a="http://schemas.openxmlformats.org/drawingml/2006/main">
-            <a:off x="685800" y="5886450"/>
-            <a:ext cx="9525000" cy="323850"/>
-          </a:xfrm>
-          <a:prstGeom xmlns:a="http://schemas.openxmlformats.org/drawingml/2006/main" prst="rect">
-            <a:avLst/>
-          </a:prstGeom>
-          <a:noFill xmlns:a="http://schemas.openxmlformats.org/drawingml/2006/main"/>
-          <a:ln xmlns:a="http://schemas.openxmlformats.org/drawingml/2006/main" w="0">
-            <a:noFill/>
-            <a:prstDash val="solid"/>
-          </a:ln>
-        </p:spPr>
-        <p:txBody>
-          <a:bodyPr xmlns:a="http://schemas.openxmlformats.org/drawingml/2006/main" anchor="t"/>
-          <a:lstStyle xmlns:a="http://schemas.openxmlformats.org/drawingml/2006/main"/>
-          <a:p xmlns:a="http://schemas.openxmlformats.org/drawingml/2006/main">
-            <a:pPr algn="l">
+              <a:buNone/>
               <a:defRPr sz="1650" b="1">
                 <a:solidFill>
                   <a:srgbClr val="B64F00"/>
@@ -6321,7 +5838,7 @@
                 <a:ea typeface="Helvetica Neue"/>
                 <a:cs typeface="Helvetica Neue"/>
               </a:rPr>
-              <a:t>0 browser console warnings or errors in the verified workflow</a:t>
+              <a:t>PostgreSQL support is configuration, not a second code path.</a:t>
             </a:r>
           </a:p>
         </p:txBody>
@@ -6329,7 +5846,7 @@
     </p:spTree>
     <p:extLst>
       <p:ext uri="{BB962C8B-B14F-4D97-AF65-F5344CB8AC3E}">
-        <p14:creationId xmlns:p14="http://schemas.microsoft.com/office/powerpoint/2010/main" val="395109675"/>
+        <p14:creationId xmlns:p14="http://schemas.microsoft.com/office/powerpoint/2010/main" val="2063204130"/>
       </p:ext>
     </p:extLst>
   </p:cSld>
@@ -6357,6 +5874,993 @@
       </p:grpSpPr>
       <p:sp>
         <p:nvSpPr>
+          <p:cNvPr id="21" name="slide-5-title">
+            <a:extLst xmlns:a="http://schemas.openxmlformats.org/drawingml/2006/main">
+              <a:ext uri="{FF2B5EF4-FFF2-40B4-BE49-F238E27FC236}">
+                <a16:creationId xmlns:a16="http://schemas.microsoft.com/office/drawing/2014/main" id="{58E18E9A-2EB2-4412-928A-6B1D7A8E6868}"/>
+              </a:ext>
+            </a:extLst>
+          </p:cNvPr>
+          <p:cNvSpPr>
+            <a:spLocks xmlns:a="http://schemas.openxmlformats.org/drawingml/2006/main" noGrp="1"/>
+          </p:cNvSpPr>
+          <p:nvPr/>
+        </p:nvSpPr>
+        <p:spPr>
+          <a:xfrm xmlns:a="http://schemas.openxmlformats.org/drawingml/2006/main">
+            <a:off x="685800" y="514350"/>
+            <a:ext cx="10820400" cy="914400"/>
+          </a:xfrm>
+          <a:prstGeom xmlns:a="http://schemas.openxmlformats.org/drawingml/2006/main" prst="rect">
+            <a:avLst/>
+          </a:prstGeom>
+          <a:noFill xmlns:a="http://schemas.openxmlformats.org/drawingml/2006/main"/>
+          <a:ln xmlns:a="http://schemas.openxmlformats.org/drawingml/2006/main" w="0">
+            <a:noFill/>
+            <a:prstDash val="solid"/>
+          </a:ln>
+        </p:spPr>
+        <p:txBody>
+          <a:bodyPr xmlns:a="http://schemas.openxmlformats.org/drawingml/2006/main" anchor="t"/>
+          <a:lstStyle xmlns:a="http://schemas.openxmlformats.org/drawingml/2006/main"/>
+          <a:p xmlns:a="http://schemas.openxmlformats.org/drawingml/2006/main">
+            <a:pPr algn="l">
+              <a:buNone/>
+              <a:defRPr sz="3150" b="1">
+                <a:solidFill>
+                  <a:srgbClr val="202124"/>
+                </a:solidFill>
+                <a:latin typeface="Helvetica Neue"/>
+                <a:ea typeface="Helvetica Neue"/>
+                <a:cs typeface="Helvetica Neue"/>
+              </a:defRPr>
+            </a:pPr>
+            <a:r>
+              <a:rPr sz="3150" b="1">
+                <a:solidFill>
+                  <a:srgbClr val="202124"/>
+                </a:solidFill>
+                <a:latin typeface="Helvetica Neue"/>
+                <a:ea typeface="Helvetica Neue"/>
+                <a:cs typeface="Helvetica Neue"/>
+              </a:rPr>
+              <a:t>Quality is visible at every layer.</a:t>
+            </a:r>
+          </a:p>
+        </p:txBody>
+      </p:sp>
+      <p:sp>
+        <p:nvSpPr>
+          <p:cNvPr id="2" name="">
+            <a:extLst xmlns:a="http://schemas.openxmlformats.org/drawingml/2006/main">
+              <a:ext uri="{FF2B5EF4-FFF2-40B4-BE49-F238E27FC236}">
+                <a16:creationId xmlns:a16="http://schemas.microsoft.com/office/drawing/2014/main" id="{AAB263A3-3A41-49D7-93EF-C0C630928CEF}"/>
+              </a:ext>
+            </a:extLst>
+          </p:cNvPr>
+          <p:cNvSpPr>
+            <a:spLocks xmlns:a="http://schemas.openxmlformats.org/drawingml/2006/main" noGrp="1"/>
+          </p:cNvSpPr>
+          <p:nvPr/>
+        </p:nvSpPr>
+        <p:spPr>
+          <a:xfrm xmlns:a="http://schemas.openxmlformats.org/drawingml/2006/main">
+            <a:off x="685800" y="1428750"/>
+            <a:ext cx="742950" cy="47625"/>
+          </a:xfrm>
+          <a:prstGeom xmlns:a="http://schemas.openxmlformats.org/drawingml/2006/main" prst="rect">
+            <a:avLst/>
+          </a:prstGeom>
+          <a:solidFill xmlns:a="http://schemas.openxmlformats.org/drawingml/2006/main">
+            <a:srgbClr val="FF7A00"/>
+          </a:solidFill>
+          <a:ln xmlns:a="http://schemas.openxmlformats.org/drawingml/2006/main" w="0">
+            <a:noFill/>
+            <a:prstDash val="solid"/>
+          </a:ln>
+        </p:spPr>
+      </p:sp>
+      <p:sp>
+        <p:nvSpPr>
+          <p:cNvPr id="3" name="slide-5-number">
+            <a:extLst xmlns:a="http://schemas.openxmlformats.org/drawingml/2006/main">
+              <a:ext uri="{FF2B5EF4-FFF2-40B4-BE49-F238E27FC236}">
+                <a16:creationId xmlns:a16="http://schemas.microsoft.com/office/drawing/2014/main" id="{62D19269-EBD9-4E33-85F3-EF91DA2541DE}"/>
+              </a:ext>
+            </a:extLst>
+          </p:cNvPr>
+          <p:cNvSpPr>
+            <a:spLocks xmlns:a="http://schemas.openxmlformats.org/drawingml/2006/main" noGrp="1"/>
+          </p:cNvSpPr>
+          <p:nvPr/>
+        </p:nvSpPr>
+        <p:spPr>
+          <a:xfrm xmlns:a="http://schemas.openxmlformats.org/drawingml/2006/main">
+            <a:off x="11096625" y="6276975"/>
+            <a:ext cx="666750" cy="228600"/>
+          </a:xfrm>
+          <a:prstGeom xmlns:a="http://schemas.openxmlformats.org/drawingml/2006/main" prst="rect">
+            <a:avLst/>
+          </a:prstGeom>
+          <a:noFill xmlns:a="http://schemas.openxmlformats.org/drawingml/2006/main"/>
+          <a:ln xmlns:a="http://schemas.openxmlformats.org/drawingml/2006/main" w="0">
+            <a:noFill/>
+            <a:prstDash val="solid"/>
+          </a:ln>
+        </p:spPr>
+        <p:txBody>
+          <a:bodyPr xmlns:a="http://schemas.openxmlformats.org/drawingml/2006/main" anchor="t"/>
+          <a:lstStyle xmlns:a="http://schemas.openxmlformats.org/drawingml/2006/main"/>
+          <a:p xmlns:a="http://schemas.openxmlformats.org/drawingml/2006/main">
+            <a:pPr algn="r">
+              <a:buNone/>
+              <a:defRPr sz="1050" b="0">
+                <a:solidFill>
+                  <a:srgbClr val="62656A"/>
+                </a:solidFill>
+                <a:latin typeface="Helvetica Neue"/>
+                <a:ea typeface="Helvetica Neue"/>
+                <a:cs typeface="Helvetica Neue"/>
+              </a:defRPr>
+            </a:pPr>
+            <a:r>
+              <a:rPr sz="1050" b="0">
+                <a:solidFill>
+                  <a:srgbClr val="62656A"/>
+                </a:solidFill>
+                <a:latin typeface="Helvetica Neue"/>
+                <a:ea typeface="Helvetica Neue"/>
+                <a:cs typeface="Helvetica Neue"/>
+              </a:rPr>
+              <a:t>06</a:t>
+            </a:r>
+          </a:p>
+        </p:txBody>
+      </p:sp>
+      <p:sp>
+        <p:nvSpPr>
+          <p:cNvPr id="4" name="">
+            <a:extLst xmlns:a="http://schemas.openxmlformats.org/drawingml/2006/main">
+              <a:ext uri="{FF2B5EF4-FFF2-40B4-BE49-F238E27FC236}">
+                <a16:creationId xmlns:a16="http://schemas.microsoft.com/office/drawing/2014/main" id="{BA04B49F-8919-42BE-AD9D-D6510ADF9977}"/>
+              </a:ext>
+            </a:extLst>
+          </p:cNvPr>
+          <p:cNvSpPr>
+            <a:spLocks xmlns:a="http://schemas.openxmlformats.org/drawingml/2006/main" noGrp="1"/>
+          </p:cNvSpPr>
+          <p:nvPr/>
+        </p:nvSpPr>
+        <p:spPr>
+          <a:xfrm xmlns:a="http://schemas.openxmlformats.org/drawingml/2006/main">
+            <a:off x="685800" y="1676400"/>
+            <a:ext cx="9906000" cy="361950"/>
+          </a:xfrm>
+          <a:prstGeom xmlns:a="http://schemas.openxmlformats.org/drawingml/2006/main" prst="rect">
+            <a:avLst/>
+          </a:prstGeom>
+          <a:noFill xmlns:a="http://schemas.openxmlformats.org/drawingml/2006/main"/>
+          <a:ln xmlns:a="http://schemas.openxmlformats.org/drawingml/2006/main" w="0">
+            <a:noFill/>
+            <a:prstDash val="solid"/>
+          </a:ln>
+        </p:spPr>
+        <p:txBody>
+          <a:bodyPr xmlns:a="http://schemas.openxmlformats.org/drawingml/2006/main" anchor="t"/>
+          <a:lstStyle xmlns:a="http://schemas.openxmlformats.org/drawingml/2006/main"/>
+          <a:p xmlns:a="http://schemas.openxmlformats.org/drawingml/2006/main">
+            <a:pPr algn="l">
+              <a:buNone/>
+              <a:defRPr sz="1650" b="0">
+                <a:solidFill>
+                  <a:srgbClr val="62656A"/>
+                </a:solidFill>
+                <a:latin typeface="Helvetica Neue"/>
+                <a:ea typeface="Helvetica Neue"/>
+                <a:cs typeface="Helvetica Neue"/>
+              </a:defRPr>
+            </a:pPr>
+            <a:r>
+              <a:rPr sz="1650" b="0">
+                <a:solidFill>
+                  <a:srgbClr val="62656A"/>
+                </a:solidFill>
+                <a:latin typeface="Helvetica Neue"/>
+                <a:ea typeface="Helvetica Neue"/>
+                <a:cs typeface="Helvetica Neue"/>
+              </a:rPr>
+              <a:t>The same fast checks run locally and in GitHub Actions, supported by hands-on browser QA.</a:t>
+            </a:r>
+          </a:p>
+        </p:txBody>
+      </p:sp>
+      <p:sp>
+        <p:nvSpPr>
+          <p:cNvPr id="5" name="">
+            <a:extLst xmlns:a="http://schemas.openxmlformats.org/drawingml/2006/main">
+              <a:ext uri="{FF2B5EF4-FFF2-40B4-BE49-F238E27FC236}">
+                <a16:creationId xmlns:a16="http://schemas.microsoft.com/office/drawing/2014/main" id="{EB284E9B-FE1C-47D8-B07C-23D5C724D5C5}"/>
+              </a:ext>
+            </a:extLst>
+          </p:cNvPr>
+          <p:cNvSpPr>
+            <a:spLocks xmlns:a="http://schemas.openxmlformats.org/drawingml/2006/main" noGrp="1"/>
+          </p:cNvSpPr>
+          <p:nvPr/>
+        </p:nvSpPr>
+        <p:spPr>
+          <a:xfrm xmlns:a="http://schemas.openxmlformats.org/drawingml/2006/main">
+            <a:off x="685800" y="2714625"/>
+            <a:ext cx="3200400" cy="2762250"/>
+          </a:xfrm>
+          <a:prstGeom xmlns:a="http://schemas.openxmlformats.org/drawingml/2006/main" prst="rect">
+            <a:avLst/>
+          </a:prstGeom>
+          <a:solidFill xmlns:a="http://schemas.openxmlformats.org/drawingml/2006/main">
+            <a:srgbClr val="F1F1EF"/>
+          </a:solidFill>
+          <a:ln xmlns:a="http://schemas.openxmlformats.org/drawingml/2006/main" w="0">
+            <a:noFill/>
+            <a:prstDash val="solid"/>
+          </a:ln>
+        </p:spPr>
+      </p:sp>
+      <p:sp>
+        <p:nvSpPr>
+          <p:cNvPr id="6" name="">
+            <a:extLst xmlns:a="http://schemas.openxmlformats.org/drawingml/2006/main">
+              <a:ext uri="{FF2B5EF4-FFF2-40B4-BE49-F238E27FC236}">
+                <a16:creationId xmlns:a16="http://schemas.microsoft.com/office/drawing/2014/main" id="{F01CDCD2-7887-416C-B0B9-937BDF276638}"/>
+              </a:ext>
+            </a:extLst>
+          </p:cNvPr>
+          <p:cNvSpPr>
+            <a:spLocks xmlns:a="http://schemas.openxmlformats.org/drawingml/2006/main" noGrp="1"/>
+          </p:cNvSpPr>
+          <p:nvPr/>
+        </p:nvSpPr>
+        <p:spPr>
+          <a:xfrm xmlns:a="http://schemas.openxmlformats.org/drawingml/2006/main">
+            <a:off x="685800" y="2714625"/>
+            <a:ext cx="3200400" cy="57150"/>
+          </a:xfrm>
+          <a:prstGeom xmlns:a="http://schemas.openxmlformats.org/drawingml/2006/main" prst="rect">
+            <a:avLst/>
+          </a:prstGeom>
+          <a:solidFill xmlns:a="http://schemas.openxmlformats.org/drawingml/2006/main">
+            <a:srgbClr val="FF7A00"/>
+          </a:solidFill>
+          <a:ln xmlns:a="http://schemas.openxmlformats.org/drawingml/2006/main" w="0">
+            <a:noFill/>
+            <a:prstDash val="solid"/>
+          </a:ln>
+        </p:spPr>
+      </p:sp>
+      <p:sp>
+        <p:nvSpPr>
+          <p:cNvPr id="7" name="">
+            <a:extLst xmlns:a="http://schemas.openxmlformats.org/drawingml/2006/main">
+              <a:ext uri="{FF2B5EF4-FFF2-40B4-BE49-F238E27FC236}">
+                <a16:creationId xmlns:a16="http://schemas.microsoft.com/office/drawing/2014/main" id="{1C55F868-BDA1-4C4C-A142-69898C8B57B3}"/>
+              </a:ext>
+            </a:extLst>
+          </p:cNvPr>
+          <p:cNvSpPr>
+            <a:spLocks xmlns:a="http://schemas.openxmlformats.org/drawingml/2006/main" noGrp="1"/>
+          </p:cNvSpPr>
+          <p:nvPr/>
+        </p:nvSpPr>
+        <p:spPr>
+          <a:xfrm xmlns:a="http://schemas.openxmlformats.org/drawingml/2006/main">
+            <a:off x="952500" y="3048000"/>
+            <a:ext cx="2571750" cy="990600"/>
+          </a:xfrm>
+          <a:prstGeom xmlns:a="http://schemas.openxmlformats.org/drawingml/2006/main" prst="rect">
+            <a:avLst/>
+          </a:prstGeom>
+          <a:noFill xmlns:a="http://schemas.openxmlformats.org/drawingml/2006/main"/>
+          <a:ln xmlns:a="http://schemas.openxmlformats.org/drawingml/2006/main" w="0">
+            <a:noFill/>
+            <a:prstDash val="solid"/>
+          </a:ln>
+        </p:spPr>
+        <p:txBody>
+          <a:bodyPr xmlns:a="http://schemas.openxmlformats.org/drawingml/2006/main" anchor="t"/>
+          <a:lstStyle xmlns:a="http://schemas.openxmlformats.org/drawingml/2006/main"/>
+          <a:p xmlns:a="http://schemas.openxmlformats.org/drawingml/2006/main">
+            <a:pPr algn="l">
+              <a:buNone/>
+              <a:defRPr sz="5550" b="1">
+                <a:solidFill>
+                  <a:srgbClr val="202124"/>
+                </a:solidFill>
+                <a:latin typeface="Helvetica Neue"/>
+                <a:ea typeface="Helvetica Neue"/>
+                <a:cs typeface="Helvetica Neue"/>
+              </a:defRPr>
+            </a:pPr>
+            <a:r>
+              <a:rPr sz="5550" b="1">
+                <a:solidFill>
+                  <a:srgbClr val="202124"/>
+                </a:solidFill>
+                <a:latin typeface="Helvetica Neue"/>
+                <a:ea typeface="Helvetica Neue"/>
+                <a:cs typeface="Helvetica Neue"/>
+              </a:rPr>
+              <a:t>12</a:t>
+            </a:r>
+          </a:p>
+        </p:txBody>
+      </p:sp>
+      <p:sp>
+        <p:nvSpPr>
+          <p:cNvPr id="8" name="">
+            <a:extLst xmlns:a="http://schemas.openxmlformats.org/drawingml/2006/main">
+              <a:ext uri="{FF2B5EF4-FFF2-40B4-BE49-F238E27FC236}">
+                <a16:creationId xmlns:a16="http://schemas.microsoft.com/office/drawing/2014/main" id="{B3E6160A-53F1-444A-9358-B0605CC0EE13}"/>
+              </a:ext>
+            </a:extLst>
+          </p:cNvPr>
+          <p:cNvSpPr>
+            <a:spLocks xmlns:a="http://schemas.openxmlformats.org/drawingml/2006/main" noGrp="1"/>
+          </p:cNvSpPr>
+          <p:nvPr/>
+        </p:nvSpPr>
+        <p:spPr>
+          <a:xfrm xmlns:a="http://schemas.openxmlformats.org/drawingml/2006/main">
+            <a:off x="952500" y="4019550"/>
+            <a:ext cx="2571750" cy="342900"/>
+          </a:xfrm>
+          <a:prstGeom xmlns:a="http://schemas.openxmlformats.org/drawingml/2006/main" prst="rect">
+            <a:avLst/>
+          </a:prstGeom>
+          <a:noFill xmlns:a="http://schemas.openxmlformats.org/drawingml/2006/main"/>
+          <a:ln xmlns:a="http://schemas.openxmlformats.org/drawingml/2006/main" w="0">
+            <a:noFill/>
+            <a:prstDash val="solid"/>
+          </a:ln>
+        </p:spPr>
+        <p:txBody>
+          <a:bodyPr xmlns:a="http://schemas.openxmlformats.org/drawingml/2006/main" anchor="t"/>
+          <a:lstStyle xmlns:a="http://schemas.openxmlformats.org/drawingml/2006/main"/>
+          <a:p xmlns:a="http://schemas.openxmlformats.org/drawingml/2006/main">
+            <a:pPr algn="l">
+              <a:buNone/>
+              <a:defRPr sz="1875" b="1">
+                <a:solidFill>
+                  <a:srgbClr val="202124"/>
+                </a:solidFill>
+                <a:latin typeface="Helvetica Neue"/>
+                <a:ea typeface="Helvetica Neue"/>
+                <a:cs typeface="Helvetica Neue"/>
+              </a:defRPr>
+            </a:pPr>
+            <a:r>
+              <a:rPr sz="1875" b="1">
+                <a:solidFill>
+                  <a:srgbClr val="202124"/>
+                </a:solidFill>
+                <a:latin typeface="Helvetica Neue"/>
+                <a:ea typeface="Helvetica Neue"/>
+                <a:cs typeface="Helvetica Neue"/>
+              </a:rPr>
+              <a:t>backend tests</a:t>
+            </a:r>
+          </a:p>
+        </p:txBody>
+      </p:sp>
+      <p:sp>
+        <p:nvSpPr>
+          <p:cNvPr id="9" name="">
+            <a:extLst xmlns:a="http://schemas.openxmlformats.org/drawingml/2006/main">
+              <a:ext uri="{FF2B5EF4-FFF2-40B4-BE49-F238E27FC236}">
+                <a16:creationId xmlns:a16="http://schemas.microsoft.com/office/drawing/2014/main" id="{9FD8B7B9-53ED-4430-A387-24EF716B8CB6}"/>
+              </a:ext>
+            </a:extLst>
+          </p:cNvPr>
+          <p:cNvSpPr>
+            <a:spLocks xmlns:a="http://schemas.openxmlformats.org/drawingml/2006/main" noGrp="1"/>
+          </p:cNvSpPr>
+          <p:nvPr/>
+        </p:nvSpPr>
+        <p:spPr>
+          <a:xfrm xmlns:a="http://schemas.openxmlformats.org/drawingml/2006/main">
+            <a:off x="952500" y="4552950"/>
+            <a:ext cx="2647950" cy="685800"/>
+          </a:xfrm>
+          <a:prstGeom xmlns:a="http://schemas.openxmlformats.org/drawingml/2006/main" prst="rect">
+            <a:avLst/>
+          </a:prstGeom>
+          <a:noFill xmlns:a="http://schemas.openxmlformats.org/drawingml/2006/main"/>
+          <a:ln xmlns:a="http://schemas.openxmlformats.org/drawingml/2006/main" w="0">
+            <a:noFill/>
+            <a:prstDash val="solid"/>
+          </a:ln>
+        </p:spPr>
+        <p:txBody>
+          <a:bodyPr xmlns:a="http://schemas.openxmlformats.org/drawingml/2006/main" anchor="t"/>
+          <a:lstStyle xmlns:a="http://schemas.openxmlformats.org/drawingml/2006/main"/>
+          <a:p xmlns:a="http://schemas.openxmlformats.org/drawingml/2006/main">
+            <a:pPr algn="l">
+              <a:buNone/>
+              <a:defRPr sz="1275" b="0">
+                <a:solidFill>
+                  <a:srgbClr val="62656A"/>
+                </a:solidFill>
+                <a:latin typeface="Helvetica Neue"/>
+                <a:ea typeface="Helvetica Neue"/>
+                <a:cs typeface="Helvetica Neue"/>
+              </a:defRPr>
+            </a:pPr>
+            <a:r>
+              <a:rPr sz="1275" b="0">
+                <a:solidFill>
+                  <a:srgbClr val="62656A"/>
+                </a:solidFill>
+                <a:latin typeface="Helvetica Neue"/>
+                <a:ea typeface="Helvetica Neue"/>
+                <a:cs typeface="Helvetica Neue"/>
+              </a:rPr>
+              <a:t>Models, validation, filtering, assignment, editing, and status changes.</a:t>
+            </a:r>
+          </a:p>
+        </p:txBody>
+      </p:sp>
+      <p:sp>
+        <p:nvSpPr>
+          <p:cNvPr id="10" name="">
+            <a:extLst xmlns:a="http://schemas.openxmlformats.org/drawingml/2006/main">
+              <a:ext uri="{FF2B5EF4-FFF2-40B4-BE49-F238E27FC236}">
+                <a16:creationId xmlns:a16="http://schemas.microsoft.com/office/drawing/2014/main" id="{7067B265-4CAE-40C8-9614-E0B3FDB1A854}"/>
+              </a:ext>
+            </a:extLst>
+          </p:cNvPr>
+          <p:cNvSpPr>
+            <a:spLocks xmlns:a="http://schemas.openxmlformats.org/drawingml/2006/main" noGrp="1"/>
+          </p:cNvSpPr>
+          <p:nvPr/>
+        </p:nvSpPr>
+        <p:spPr>
+          <a:xfrm xmlns:a="http://schemas.openxmlformats.org/drawingml/2006/main">
+            <a:off x="4305300" y="2714625"/>
+            <a:ext cx="3200400" cy="2762250"/>
+          </a:xfrm>
+          <a:prstGeom xmlns:a="http://schemas.openxmlformats.org/drawingml/2006/main" prst="rect">
+            <a:avLst/>
+          </a:prstGeom>
+          <a:solidFill xmlns:a="http://schemas.openxmlformats.org/drawingml/2006/main">
+            <a:srgbClr val="F1F1EF"/>
+          </a:solidFill>
+          <a:ln xmlns:a="http://schemas.openxmlformats.org/drawingml/2006/main" w="0">
+            <a:noFill/>
+            <a:prstDash val="solid"/>
+          </a:ln>
+        </p:spPr>
+      </p:sp>
+      <p:sp>
+        <p:nvSpPr>
+          <p:cNvPr id="11" name="">
+            <a:extLst xmlns:a="http://schemas.openxmlformats.org/drawingml/2006/main">
+              <a:ext uri="{FF2B5EF4-FFF2-40B4-BE49-F238E27FC236}">
+                <a16:creationId xmlns:a16="http://schemas.microsoft.com/office/drawing/2014/main" id="{2205C920-916B-4069-A793-ADEBE19F4059}"/>
+              </a:ext>
+            </a:extLst>
+          </p:cNvPr>
+          <p:cNvSpPr>
+            <a:spLocks xmlns:a="http://schemas.openxmlformats.org/drawingml/2006/main" noGrp="1"/>
+          </p:cNvSpPr>
+          <p:nvPr/>
+        </p:nvSpPr>
+        <p:spPr>
+          <a:xfrm xmlns:a="http://schemas.openxmlformats.org/drawingml/2006/main">
+            <a:off x="4305300" y="2714625"/>
+            <a:ext cx="3200400" cy="57150"/>
+          </a:xfrm>
+          <a:prstGeom xmlns:a="http://schemas.openxmlformats.org/drawingml/2006/main" prst="rect">
+            <a:avLst/>
+          </a:prstGeom>
+          <a:solidFill xmlns:a="http://schemas.openxmlformats.org/drawingml/2006/main">
+            <a:srgbClr val="FF7A00"/>
+          </a:solidFill>
+          <a:ln xmlns:a="http://schemas.openxmlformats.org/drawingml/2006/main" w="0">
+            <a:noFill/>
+            <a:prstDash val="solid"/>
+          </a:ln>
+        </p:spPr>
+      </p:sp>
+      <p:sp>
+        <p:nvSpPr>
+          <p:cNvPr id="12" name="">
+            <a:extLst xmlns:a="http://schemas.openxmlformats.org/drawingml/2006/main">
+              <a:ext uri="{FF2B5EF4-FFF2-40B4-BE49-F238E27FC236}">
+                <a16:creationId xmlns:a16="http://schemas.microsoft.com/office/drawing/2014/main" id="{2E5E4127-5D69-43D7-92F7-A18BB108B5AD}"/>
+              </a:ext>
+            </a:extLst>
+          </p:cNvPr>
+          <p:cNvSpPr>
+            <a:spLocks xmlns:a="http://schemas.openxmlformats.org/drawingml/2006/main" noGrp="1"/>
+          </p:cNvSpPr>
+          <p:nvPr/>
+        </p:nvSpPr>
+        <p:spPr>
+          <a:xfrm xmlns:a="http://schemas.openxmlformats.org/drawingml/2006/main">
+            <a:off x="4572000" y="3048000"/>
+            <a:ext cx="2571750" cy="990600"/>
+          </a:xfrm>
+          <a:prstGeom xmlns:a="http://schemas.openxmlformats.org/drawingml/2006/main" prst="rect">
+            <a:avLst/>
+          </a:prstGeom>
+          <a:noFill xmlns:a="http://schemas.openxmlformats.org/drawingml/2006/main"/>
+          <a:ln xmlns:a="http://schemas.openxmlformats.org/drawingml/2006/main" w="0">
+            <a:noFill/>
+            <a:prstDash val="solid"/>
+          </a:ln>
+        </p:spPr>
+        <p:txBody>
+          <a:bodyPr xmlns:a="http://schemas.openxmlformats.org/drawingml/2006/main" anchor="t"/>
+          <a:lstStyle xmlns:a="http://schemas.openxmlformats.org/drawingml/2006/main"/>
+          <a:p xmlns:a="http://schemas.openxmlformats.org/drawingml/2006/main">
+            <a:pPr algn="l">
+              <a:buNone/>
+              <a:defRPr sz="5550" b="1">
+                <a:solidFill>
+                  <a:srgbClr val="202124"/>
+                </a:solidFill>
+                <a:latin typeface="Helvetica Neue"/>
+                <a:ea typeface="Helvetica Neue"/>
+                <a:cs typeface="Helvetica Neue"/>
+              </a:defRPr>
+            </a:pPr>
+            <a:r>
+              <a:rPr sz="5550" b="1">
+                <a:solidFill>
+                  <a:srgbClr val="202124"/>
+                </a:solidFill>
+                <a:latin typeface="Helvetica Neue"/>
+                <a:ea typeface="Helvetica Neue"/>
+                <a:cs typeface="Helvetica Neue"/>
+              </a:rPr>
+              <a:t>3</a:t>
+            </a:r>
+          </a:p>
+        </p:txBody>
+      </p:sp>
+      <p:sp>
+        <p:nvSpPr>
+          <p:cNvPr id="13" name="">
+            <a:extLst xmlns:a="http://schemas.openxmlformats.org/drawingml/2006/main">
+              <a:ext uri="{FF2B5EF4-FFF2-40B4-BE49-F238E27FC236}">
+                <a16:creationId xmlns:a16="http://schemas.microsoft.com/office/drawing/2014/main" id="{33DE94F8-DF33-4DA4-8D4C-F74ABC808CAC}"/>
+              </a:ext>
+            </a:extLst>
+          </p:cNvPr>
+          <p:cNvSpPr>
+            <a:spLocks xmlns:a="http://schemas.openxmlformats.org/drawingml/2006/main" noGrp="1"/>
+          </p:cNvSpPr>
+          <p:nvPr/>
+        </p:nvSpPr>
+        <p:spPr>
+          <a:xfrm xmlns:a="http://schemas.openxmlformats.org/drawingml/2006/main">
+            <a:off x="4572000" y="4019550"/>
+            <a:ext cx="2571750" cy="342900"/>
+          </a:xfrm>
+          <a:prstGeom xmlns:a="http://schemas.openxmlformats.org/drawingml/2006/main" prst="rect">
+            <a:avLst/>
+          </a:prstGeom>
+          <a:noFill xmlns:a="http://schemas.openxmlformats.org/drawingml/2006/main"/>
+          <a:ln xmlns:a="http://schemas.openxmlformats.org/drawingml/2006/main" w="0">
+            <a:noFill/>
+            <a:prstDash val="solid"/>
+          </a:ln>
+        </p:spPr>
+        <p:txBody>
+          <a:bodyPr xmlns:a="http://schemas.openxmlformats.org/drawingml/2006/main" anchor="t"/>
+          <a:lstStyle xmlns:a="http://schemas.openxmlformats.org/drawingml/2006/main"/>
+          <a:p xmlns:a="http://schemas.openxmlformats.org/drawingml/2006/main">
+            <a:pPr algn="l">
+              <a:buNone/>
+              <a:defRPr sz="1875" b="1">
+                <a:solidFill>
+                  <a:srgbClr val="202124"/>
+                </a:solidFill>
+                <a:latin typeface="Helvetica Neue"/>
+                <a:ea typeface="Helvetica Neue"/>
+                <a:cs typeface="Helvetica Neue"/>
+              </a:defRPr>
+            </a:pPr>
+            <a:r>
+              <a:rPr sz="1875" b="1">
+                <a:solidFill>
+                  <a:srgbClr val="202124"/>
+                </a:solidFill>
+                <a:latin typeface="Helvetica Neue"/>
+                <a:ea typeface="Helvetica Neue"/>
+                <a:cs typeface="Helvetica Neue"/>
+              </a:rPr>
+              <a:t>frontend tests</a:t>
+            </a:r>
+          </a:p>
+        </p:txBody>
+      </p:sp>
+      <p:sp>
+        <p:nvSpPr>
+          <p:cNvPr id="14" name="">
+            <a:extLst xmlns:a="http://schemas.openxmlformats.org/drawingml/2006/main">
+              <a:ext uri="{FF2B5EF4-FFF2-40B4-BE49-F238E27FC236}">
+                <a16:creationId xmlns:a16="http://schemas.microsoft.com/office/drawing/2014/main" id="{494CCFFC-A893-4B56-9E2E-ED0C4661FE42}"/>
+              </a:ext>
+            </a:extLst>
+          </p:cNvPr>
+          <p:cNvSpPr>
+            <a:spLocks xmlns:a="http://schemas.openxmlformats.org/drawingml/2006/main" noGrp="1"/>
+          </p:cNvSpPr>
+          <p:nvPr/>
+        </p:nvSpPr>
+        <p:spPr>
+          <a:xfrm xmlns:a="http://schemas.openxmlformats.org/drawingml/2006/main">
+            <a:off x="4572000" y="4552950"/>
+            <a:ext cx="2647950" cy="685800"/>
+          </a:xfrm>
+          <a:prstGeom xmlns:a="http://schemas.openxmlformats.org/drawingml/2006/main" prst="rect">
+            <a:avLst/>
+          </a:prstGeom>
+          <a:noFill xmlns:a="http://schemas.openxmlformats.org/drawingml/2006/main"/>
+          <a:ln xmlns:a="http://schemas.openxmlformats.org/drawingml/2006/main" w="0">
+            <a:noFill/>
+            <a:prstDash val="solid"/>
+          </a:ln>
+        </p:spPr>
+        <p:txBody>
+          <a:bodyPr xmlns:a="http://schemas.openxmlformats.org/drawingml/2006/main" anchor="t"/>
+          <a:lstStyle xmlns:a="http://schemas.openxmlformats.org/drawingml/2006/main"/>
+          <a:p xmlns:a="http://schemas.openxmlformats.org/drawingml/2006/main">
+            <a:pPr algn="l">
+              <a:buNone/>
+              <a:defRPr sz="1275" b="0">
+                <a:solidFill>
+                  <a:srgbClr val="62656A"/>
+                </a:solidFill>
+                <a:latin typeface="Helvetica Neue"/>
+                <a:ea typeface="Helvetica Neue"/>
+                <a:cs typeface="Helvetica Neue"/>
+              </a:defRPr>
+            </a:pPr>
+            <a:r>
+              <a:rPr sz="1275" b="0">
+                <a:solidFill>
+                  <a:srgbClr val="62656A"/>
+                </a:solidFill>
+                <a:latin typeface="Helvetica Neue"/>
+                <a:ea typeface="Helvetica Neue"/>
+                <a:cs typeface="Helvetica Neue"/>
+              </a:rPr>
+              <a:t>Required task content, actions, search, and filter interactions.</a:t>
+            </a:r>
+          </a:p>
+        </p:txBody>
+      </p:sp>
+      <p:sp>
+        <p:nvSpPr>
+          <p:cNvPr id="15" name="">
+            <a:extLst xmlns:a="http://schemas.openxmlformats.org/drawingml/2006/main">
+              <a:ext uri="{FF2B5EF4-FFF2-40B4-BE49-F238E27FC236}">
+                <a16:creationId xmlns:a16="http://schemas.microsoft.com/office/drawing/2014/main" id="{37699EF6-B709-4994-B084-8C1BC8070E70}"/>
+              </a:ext>
+            </a:extLst>
+          </p:cNvPr>
+          <p:cNvSpPr>
+            <a:spLocks xmlns:a="http://schemas.openxmlformats.org/drawingml/2006/main" noGrp="1"/>
+          </p:cNvSpPr>
+          <p:nvPr/>
+        </p:nvSpPr>
+        <p:spPr>
+          <a:xfrm xmlns:a="http://schemas.openxmlformats.org/drawingml/2006/main">
+            <a:off x="7924800" y="2714625"/>
+            <a:ext cx="3200400" cy="2762250"/>
+          </a:xfrm>
+          <a:prstGeom xmlns:a="http://schemas.openxmlformats.org/drawingml/2006/main" prst="rect">
+            <a:avLst/>
+          </a:prstGeom>
+          <a:solidFill xmlns:a="http://schemas.openxmlformats.org/drawingml/2006/main">
+            <a:srgbClr val="F1F1EF"/>
+          </a:solidFill>
+          <a:ln xmlns:a="http://schemas.openxmlformats.org/drawingml/2006/main" w="0">
+            <a:noFill/>
+            <a:prstDash val="solid"/>
+          </a:ln>
+        </p:spPr>
+      </p:sp>
+      <p:sp>
+        <p:nvSpPr>
+          <p:cNvPr id="16" name="">
+            <a:extLst xmlns:a="http://schemas.openxmlformats.org/drawingml/2006/main">
+              <a:ext uri="{FF2B5EF4-FFF2-40B4-BE49-F238E27FC236}">
+                <a16:creationId xmlns:a16="http://schemas.microsoft.com/office/drawing/2014/main" id="{E3865AF7-1F05-4E33-8A3A-8C5DF8423C46}"/>
+              </a:ext>
+            </a:extLst>
+          </p:cNvPr>
+          <p:cNvSpPr>
+            <a:spLocks xmlns:a="http://schemas.openxmlformats.org/drawingml/2006/main" noGrp="1"/>
+          </p:cNvSpPr>
+          <p:nvPr/>
+        </p:nvSpPr>
+        <p:spPr>
+          <a:xfrm xmlns:a="http://schemas.openxmlformats.org/drawingml/2006/main">
+            <a:off x="7924800" y="2714625"/>
+            <a:ext cx="3200400" cy="57150"/>
+          </a:xfrm>
+          <a:prstGeom xmlns:a="http://schemas.openxmlformats.org/drawingml/2006/main" prst="rect">
+            <a:avLst/>
+          </a:prstGeom>
+          <a:solidFill xmlns:a="http://schemas.openxmlformats.org/drawingml/2006/main">
+            <a:srgbClr val="FF7A00"/>
+          </a:solidFill>
+          <a:ln xmlns:a="http://schemas.openxmlformats.org/drawingml/2006/main" w="0">
+            <a:noFill/>
+            <a:prstDash val="solid"/>
+          </a:ln>
+        </p:spPr>
+      </p:sp>
+      <p:sp>
+        <p:nvSpPr>
+          <p:cNvPr id="17" name="">
+            <a:extLst xmlns:a="http://schemas.openxmlformats.org/drawingml/2006/main">
+              <a:ext uri="{FF2B5EF4-FFF2-40B4-BE49-F238E27FC236}">
+                <a16:creationId xmlns:a16="http://schemas.microsoft.com/office/drawing/2014/main" id="{B32279F3-3DB5-4B94-880D-BAFA4A1F28D8}"/>
+              </a:ext>
+            </a:extLst>
+          </p:cNvPr>
+          <p:cNvSpPr>
+            <a:spLocks xmlns:a="http://schemas.openxmlformats.org/drawingml/2006/main" noGrp="1"/>
+          </p:cNvSpPr>
+          <p:nvPr/>
+        </p:nvSpPr>
+        <p:spPr>
+          <a:xfrm xmlns:a="http://schemas.openxmlformats.org/drawingml/2006/main">
+            <a:off x="8191500" y="3048000"/>
+            <a:ext cx="2571750" cy="990600"/>
+          </a:xfrm>
+          <a:prstGeom xmlns:a="http://schemas.openxmlformats.org/drawingml/2006/main" prst="rect">
+            <a:avLst/>
+          </a:prstGeom>
+          <a:noFill xmlns:a="http://schemas.openxmlformats.org/drawingml/2006/main"/>
+          <a:ln xmlns:a="http://schemas.openxmlformats.org/drawingml/2006/main" w="0">
+            <a:noFill/>
+            <a:prstDash val="solid"/>
+          </a:ln>
+        </p:spPr>
+        <p:txBody>
+          <a:bodyPr xmlns:a="http://schemas.openxmlformats.org/drawingml/2006/main" anchor="t"/>
+          <a:lstStyle xmlns:a="http://schemas.openxmlformats.org/drawingml/2006/main"/>
+          <a:p xmlns:a="http://schemas.openxmlformats.org/drawingml/2006/main">
+            <a:pPr algn="l">
+              <a:buNone/>
+              <a:defRPr sz="5550" b="1">
+                <a:solidFill>
+                  <a:srgbClr val="202124"/>
+                </a:solidFill>
+                <a:latin typeface="Helvetica Neue"/>
+                <a:ea typeface="Helvetica Neue"/>
+                <a:cs typeface="Helvetica Neue"/>
+              </a:defRPr>
+            </a:pPr>
+            <a:r>
+              <a:rPr sz="5550" b="1">
+                <a:solidFill>
+                  <a:srgbClr val="202124"/>
+                </a:solidFill>
+                <a:latin typeface="Helvetica Neue"/>
+                <a:ea typeface="Helvetica Neue"/>
+                <a:cs typeface="Helvetica Neue"/>
+              </a:rPr>
+              <a:t>2</a:t>
+            </a:r>
+          </a:p>
+        </p:txBody>
+      </p:sp>
+      <p:sp>
+        <p:nvSpPr>
+          <p:cNvPr id="18" name="">
+            <a:extLst xmlns:a="http://schemas.openxmlformats.org/drawingml/2006/main">
+              <a:ext uri="{FF2B5EF4-FFF2-40B4-BE49-F238E27FC236}">
+                <a16:creationId xmlns:a16="http://schemas.microsoft.com/office/drawing/2014/main" id="{887F6E75-4BE8-4E53-B8B9-1FAD525F8F87}"/>
+              </a:ext>
+            </a:extLst>
+          </p:cNvPr>
+          <p:cNvSpPr>
+            <a:spLocks xmlns:a="http://schemas.openxmlformats.org/drawingml/2006/main" noGrp="1"/>
+          </p:cNvSpPr>
+          <p:nvPr/>
+        </p:nvSpPr>
+        <p:spPr>
+          <a:xfrm xmlns:a="http://schemas.openxmlformats.org/drawingml/2006/main">
+            <a:off x="8191500" y="4019550"/>
+            <a:ext cx="2571750" cy="342900"/>
+          </a:xfrm>
+          <a:prstGeom xmlns:a="http://schemas.openxmlformats.org/drawingml/2006/main" prst="rect">
+            <a:avLst/>
+          </a:prstGeom>
+          <a:noFill xmlns:a="http://schemas.openxmlformats.org/drawingml/2006/main"/>
+          <a:ln xmlns:a="http://schemas.openxmlformats.org/drawingml/2006/main" w="0">
+            <a:noFill/>
+            <a:prstDash val="solid"/>
+          </a:ln>
+        </p:spPr>
+        <p:txBody>
+          <a:bodyPr xmlns:a="http://schemas.openxmlformats.org/drawingml/2006/main" anchor="t"/>
+          <a:lstStyle xmlns:a="http://schemas.openxmlformats.org/drawingml/2006/main"/>
+          <a:p xmlns:a="http://schemas.openxmlformats.org/drawingml/2006/main">
+            <a:pPr algn="l">
+              <a:buNone/>
+              <a:defRPr sz="1875" b="1">
+                <a:solidFill>
+                  <a:srgbClr val="202124"/>
+                </a:solidFill>
+                <a:latin typeface="Helvetica Neue"/>
+                <a:ea typeface="Helvetica Neue"/>
+                <a:cs typeface="Helvetica Neue"/>
+              </a:defRPr>
+            </a:pPr>
+            <a:r>
+              <a:rPr sz="1875" b="1">
+                <a:solidFill>
+                  <a:srgbClr val="202124"/>
+                </a:solidFill>
+                <a:latin typeface="Helvetica Neue"/>
+                <a:ea typeface="Helvetica Neue"/>
+                <a:cs typeface="Helvetica Neue"/>
+              </a:rPr>
+              <a:t>verified viewports</a:t>
+            </a:r>
+          </a:p>
+        </p:txBody>
+      </p:sp>
+      <p:sp>
+        <p:nvSpPr>
+          <p:cNvPr id="19" name="">
+            <a:extLst xmlns:a="http://schemas.openxmlformats.org/drawingml/2006/main">
+              <a:ext uri="{FF2B5EF4-FFF2-40B4-BE49-F238E27FC236}">
+                <a16:creationId xmlns:a16="http://schemas.microsoft.com/office/drawing/2014/main" id="{CEC68702-CB0E-45BB-8F39-826023055832}"/>
+              </a:ext>
+            </a:extLst>
+          </p:cNvPr>
+          <p:cNvSpPr>
+            <a:spLocks xmlns:a="http://schemas.openxmlformats.org/drawingml/2006/main" noGrp="1"/>
+          </p:cNvSpPr>
+          <p:nvPr/>
+        </p:nvSpPr>
+        <p:spPr>
+          <a:xfrm xmlns:a="http://schemas.openxmlformats.org/drawingml/2006/main">
+            <a:off x="8191500" y="4552950"/>
+            <a:ext cx="2647950" cy="685800"/>
+          </a:xfrm>
+          <a:prstGeom xmlns:a="http://schemas.openxmlformats.org/drawingml/2006/main" prst="rect">
+            <a:avLst/>
+          </a:prstGeom>
+          <a:noFill xmlns:a="http://schemas.openxmlformats.org/drawingml/2006/main"/>
+          <a:ln xmlns:a="http://schemas.openxmlformats.org/drawingml/2006/main" w="0">
+            <a:noFill/>
+            <a:prstDash val="solid"/>
+          </a:ln>
+        </p:spPr>
+        <p:txBody>
+          <a:bodyPr xmlns:a="http://schemas.openxmlformats.org/drawingml/2006/main" anchor="t"/>
+          <a:lstStyle xmlns:a="http://schemas.openxmlformats.org/drawingml/2006/main"/>
+          <a:p xmlns:a="http://schemas.openxmlformats.org/drawingml/2006/main">
+            <a:pPr algn="l">
+              <a:buNone/>
+              <a:defRPr sz="1275" b="0">
+                <a:solidFill>
+                  <a:srgbClr val="62656A"/>
+                </a:solidFill>
+                <a:latin typeface="Helvetica Neue"/>
+                <a:ea typeface="Helvetica Neue"/>
+                <a:cs typeface="Helvetica Neue"/>
+              </a:defRPr>
+            </a:pPr>
+            <a:r>
+              <a:rPr sz="1275" b="0">
+                <a:solidFill>
+                  <a:srgbClr val="62656A"/>
+                </a:solidFill>
+                <a:latin typeface="Helvetica Neue"/>
+                <a:ea typeface="Helvetica Neue"/>
+                <a:cs typeface="Helvetica Neue"/>
+              </a:rPr>
+              <a:t>Desktop and mobile flows, including the responsive edit dialog.</a:t>
+            </a:r>
+          </a:p>
+        </p:txBody>
+      </p:sp>
+      <p:sp>
+        <p:nvSpPr>
+          <p:cNvPr id="20" name="">
+            <a:extLst xmlns:a="http://schemas.openxmlformats.org/drawingml/2006/main">
+              <a:ext uri="{FF2B5EF4-FFF2-40B4-BE49-F238E27FC236}">
+                <a16:creationId xmlns:a16="http://schemas.microsoft.com/office/drawing/2014/main" id="{3A0DBBEB-EB95-4991-B219-E6F9BC3DE0B2}"/>
+              </a:ext>
+            </a:extLst>
+          </p:cNvPr>
+          <p:cNvSpPr>
+            <a:spLocks xmlns:a="http://schemas.openxmlformats.org/drawingml/2006/main" noGrp="1"/>
+          </p:cNvSpPr>
+          <p:nvPr/>
+        </p:nvSpPr>
+        <p:spPr>
+          <a:xfrm xmlns:a="http://schemas.openxmlformats.org/drawingml/2006/main">
+            <a:off x="685800" y="5886450"/>
+            <a:ext cx="9525000" cy="323850"/>
+          </a:xfrm>
+          <a:prstGeom xmlns:a="http://schemas.openxmlformats.org/drawingml/2006/main" prst="rect">
+            <a:avLst/>
+          </a:prstGeom>
+          <a:noFill xmlns:a="http://schemas.openxmlformats.org/drawingml/2006/main"/>
+          <a:ln xmlns:a="http://schemas.openxmlformats.org/drawingml/2006/main" w="0">
+            <a:noFill/>
+            <a:prstDash val="solid"/>
+          </a:ln>
+        </p:spPr>
+        <p:txBody>
+          <a:bodyPr xmlns:a="http://schemas.openxmlformats.org/drawingml/2006/main" anchor="t"/>
+          <a:lstStyle xmlns:a="http://schemas.openxmlformats.org/drawingml/2006/main"/>
+          <a:p xmlns:a="http://schemas.openxmlformats.org/drawingml/2006/main">
+            <a:pPr algn="l">
+              <a:buNone/>
+              <a:defRPr sz="1650" b="1">
+                <a:solidFill>
+                  <a:srgbClr val="B64F00"/>
+                </a:solidFill>
+                <a:latin typeface="Helvetica Neue"/>
+                <a:ea typeface="Helvetica Neue"/>
+                <a:cs typeface="Helvetica Neue"/>
+              </a:defRPr>
+            </a:pPr>
+            <a:r>
+              <a:rPr sz="1650" b="1">
+                <a:solidFill>
+                  <a:srgbClr val="B64F00"/>
+                </a:solidFill>
+                <a:latin typeface="Helvetica Neue"/>
+                <a:ea typeface="Helvetica Neue"/>
+                <a:cs typeface="Helvetica Neue"/>
+              </a:rPr>
+              <a:t>0 browser console warnings or errors in the verified workflow</a:t>
+            </a:r>
+          </a:p>
+        </p:txBody>
+      </p:sp>
+    </p:spTree>
+    <p:extLst>
+      <p:ext uri="{BB962C8B-B14F-4D97-AF65-F5344CB8AC3E}">
+        <p14:creationId xmlns:p14="http://schemas.microsoft.com/office/powerpoint/2010/main" val="395109675"/>
+      </p:ext>
+    </p:extLst>
+  </p:cSld>
+</p:sld>
+</file>
+
+<file path=ppt/slides/slide7.xml><?xml version="1.0" encoding="utf-8"?>
+<p:sld xmlns:p="http://schemas.openxmlformats.org/presentationml/2006/main">
+  <p:cSld>
+    <p:bg>
+      <p:bgPr>
+        <a:solidFill xmlns:a="http://schemas.openxmlformats.org/drawingml/2006/main">
+          <a:srgbClr val="FFFFFF"/>
+        </a:solidFill>
+      </p:bgPr>
+    </p:bg>
+    <p:spTree>
+      <p:nvGrpSpPr>
+        <p:cNvPr id="1" name=""/>
+        <p:cNvGrpSpPr/>
+        <p:nvPr/>
+      </p:nvGrpSpPr>
+      <p:grpSpPr>
+        <a:xfrm xmlns:a="http://schemas.openxmlformats.org/drawingml/2006/main"/>
+      </p:grpSpPr>
+      <p:sp>
+        <p:nvSpPr>
           <p:cNvPr id="11" name="">
             <a:extLst xmlns:a="http://schemas.openxmlformats.org/drawingml/2006/main">
               <a:ext uri="{FF2B5EF4-FFF2-40B4-BE49-F238E27FC236}">
@@ -6388,6 +6892,7 @@
           <a:lstStyle xmlns:a="http://schemas.openxmlformats.org/drawingml/2006/main"/>
           <a:p xmlns:a="http://schemas.openxmlformats.org/drawingml/2006/main">
             <a:pPr algn="l">
+              <a:buNone/>
               <a:defRPr sz="1350" b="1">
                 <a:solidFill>
                   <a:srgbClr val="B64F00"/>
@@ -6444,6 +6949,7 @@
           <a:lstStyle xmlns:a="http://schemas.openxmlformats.org/drawingml/2006/main"/>
           <a:p xmlns:a="http://schemas.openxmlformats.org/drawingml/2006/main">
             <a:pPr algn="l">
+              <a:buNone/>
               <a:defRPr sz="5850" b="1">
                 <a:solidFill>
                   <a:srgbClr val="202124"/>
@@ -6467,6 +6973,7 @@
           </a:p>
           <a:p xmlns:a="http://schemas.openxmlformats.org/drawingml/2006/main">
             <a:pPr algn="l">
+              <a:buNone/>
               <a:defRPr sz="5850" b="1">
                 <a:solidFill>
                   <a:srgbClr val="202124"/>
@@ -6554,6 +7061,7 @@
           <a:lstStyle xmlns:a="http://schemas.openxmlformats.org/drawingml/2006/main"/>
           <a:p xmlns:a="http://schemas.openxmlformats.org/drawingml/2006/main">
             <a:pPr algn="l">
+              <a:buNone/>
               <a:defRPr sz="1875" b="1">
                 <a:solidFill>
                   <a:srgbClr val="B64F00"/>
@@ -6610,6 +7118,7 @@
           <a:lstStyle xmlns:a="http://schemas.openxmlformats.org/drawingml/2006/main"/>
           <a:p xmlns:a="http://schemas.openxmlformats.org/drawingml/2006/main">
             <a:pPr algn="l">
+              <a:buNone/>
               <a:defRPr sz="1350" b="0">
                 <a:solidFill>
                   <a:srgbClr val="62656A"/>
@@ -6633,6 +7142,7 @@
           </a:p>
           <a:p xmlns:a="http://schemas.openxmlformats.org/drawingml/2006/main">
             <a:pPr algn="l">
+              <a:buNone/>
               <a:defRPr sz="1350" b="0">
                 <a:solidFill>
                   <a:srgbClr val="62656A"/>
@@ -6689,6 +7199,7 @@
           <a:lstStyle xmlns:a="http://schemas.openxmlformats.org/drawingml/2006/main"/>
           <a:p xmlns:a="http://schemas.openxmlformats.org/drawingml/2006/main">
             <a:pPr algn="l">
+              <a:buNone/>
               <a:defRPr sz="1875" b="1">
                 <a:solidFill>
                   <a:srgbClr val="B64F00"/>
@@ -6745,6 +7256,7 @@
           <a:lstStyle xmlns:a="http://schemas.openxmlformats.org/drawingml/2006/main"/>
           <a:p xmlns:a="http://schemas.openxmlformats.org/drawingml/2006/main">
             <a:pPr algn="l">
+              <a:buNone/>
               <a:defRPr sz="1350" b="0">
                 <a:solidFill>
                   <a:srgbClr val="62656A"/>
@@ -6768,6 +7280,7 @@
           </a:p>
           <a:p xmlns:a="http://schemas.openxmlformats.org/drawingml/2006/main">
             <a:pPr algn="l">
+              <a:buNone/>
               <a:defRPr sz="1350" b="0">
                 <a:solidFill>
                   <a:srgbClr val="62656A"/>
@@ -6824,6 +7337,7 @@
           <a:lstStyle xmlns:a="http://schemas.openxmlformats.org/drawingml/2006/main"/>
           <a:p xmlns:a="http://schemas.openxmlformats.org/drawingml/2006/main">
             <a:pPr algn="l">
+              <a:buNone/>
               <a:defRPr sz="1875" b="1">
                 <a:solidFill>
                   <a:srgbClr val="B64F00"/>
@@ -6880,6 +7394,7 @@
           <a:lstStyle xmlns:a="http://schemas.openxmlformats.org/drawingml/2006/main"/>
           <a:p xmlns:a="http://schemas.openxmlformats.org/drawingml/2006/main">
             <a:pPr algn="l">
+              <a:buNone/>
               <a:defRPr sz="1350" b="0">
                 <a:solidFill>
                   <a:srgbClr val="62656A"/>
@@ -6898,11 +7413,12 @@
                 <a:ea typeface="Helvetica Neue"/>
                 <a:cs typeface="Helvetica Neue"/>
               </a:rPr>
-              <a:t>A prepared 2-5 minute</a:t>
+              <a:t>Prepared 2–5 minute Loom,</a:t>
             </a:r>
           </a:p>
           <a:p xmlns:a="http://schemas.openxmlformats.org/drawingml/2006/main">
             <a:pPr algn="l">
+              <a:buNone/>
               <a:defRPr sz="1350" b="0">
                 <a:solidFill>
                   <a:srgbClr val="62656A"/>
@@ -6921,7 +7437,7 @@
                 <a:ea typeface="Helvetica Neue"/>
                 <a:cs typeface="Helvetica Neue"/>
               </a:rPr>
-              <a:t>Loom narrative and this deck.</a:t>
+              <a:t>plus the embedded app preview.</a:t>
             </a:r>
           </a:p>
         </p:txBody>
@@ -6959,6 +7475,7 @@
           <a:lstStyle xmlns:a="http://schemas.openxmlformats.org/drawingml/2006/main"/>
           <a:p xmlns:a="http://schemas.openxmlformats.org/drawingml/2006/main">
             <a:pPr algn="r">
+              <a:buNone/>
               <a:defRPr sz="1050" b="0">
                 <a:solidFill>
                   <a:srgbClr val="62656A"/>
@@ -6977,7 +7494,7 @@
                 <a:ea typeface="Helvetica Neue"/>
                 <a:cs typeface="Helvetica Neue"/>
               </a:rPr>
-              <a:t>06</a:t>
+              <a:t>07</a:t>
             </a:r>
           </a:p>
         </p:txBody>
